--- a/docs/slides/from-mice-to-humans-lab-meeting.pptx
+++ b/docs/slides/from-mice-to-humans-lab-meeting.pptx
@@ -1,29 +1,37 @@
 
 <file path=ppt/presentation.xml><?xml version="1.0" encoding="utf-8"?>
-<p:presentation xmlns:a="http://schemas.openxmlformats.org/drawingml/2006/main" xmlns:r="http://schemas.openxmlformats.org/officeDocument/2006/relationships" xmlns:p="http://schemas.openxmlformats.org/presentationml/2006/main" saveSubsetFonts="1" autoCompressPictures="0">
+<p:presentation xmlns:a="http://schemas.openxmlformats.org/drawingml/2006/main" xmlns:p="http://schemas.openxmlformats.org/presentationml/2006/main" xmlns:r="http://schemas.openxmlformats.org/officeDocument/2006/relationships" autoCompressPictures="0" saveSubsetFonts="1">
   <p:sldMasterIdLst>
     <p:sldMasterId id="2147483648" r:id="rId1"/>
   </p:sldMasterIdLst>
+  <p:notesMasterIdLst>
+    <p:notesMasterId r:id="rId17"/>
+  </p:notesMasterIdLst>
   <p:sldIdLst>
-    <p:sldId id="256" r:id="rId7"/>
-    <p:sldId id="257" r:id="rId9"/>
-    <p:sldId id="258" r:id="rId10"/>
-    <p:sldId id="259" r:id="rId11"/>
-    <p:sldId id="260" r:id="rId12"/>
-    <p:sldId id="261" r:id="rId13"/>
-    <p:sldId id="262" r:id="rId14"/>
-    <p:sldId id="263" r:id="rId15"/>
-    <p:sldId id="264" r:id="rId16"/>
-    <p:sldId id="265" r:id="rId17"/>
+    <p:sldId id="256" r:id="rId2"/>
+    <p:sldId id="257" r:id="rId3"/>
+    <p:sldId id="258" r:id="rId4"/>
+    <p:sldId id="259" r:id="rId5"/>
+    <p:sldId id="260" r:id="rId6"/>
+    <p:sldId id="261" r:id="rId7"/>
+    <p:sldId id="262" r:id="rId8"/>
+    <p:sldId id="263" r:id="rId9"/>
+    <p:sldId id="264" r:id="rId10"/>
+    <p:sldId id="265" r:id="rId11"/>
+    <p:sldId id="266" r:id="rId12"/>
+    <p:sldId id="267" r:id="rId13"/>
+    <p:sldId id="268" r:id="rId14"/>
+    <p:sldId id="269" r:id="rId15"/>
+    <p:sldId id="270" r:id="rId16"/>
   </p:sldIdLst>
-  <p:sldSz cx="12191695" cy="6858000" type="screen4x3"/>
+  <p:sldSz cx="9144000" cy="5143500" type="screen16x9"/>
   <p:notesSz cx="6858000" cy="9144000"/>
   <p:defaultTextStyle>
     <a:defPPr>
       <a:defRPr lang="en-US"/>
     </a:defPPr>
-    <a:lvl1pPr marL="0" algn="l" defTabSz="457200" rtl="0" eaLnBrk="1" latinLnBrk="0" hangingPunct="1">
-      <a:defRPr sz="1800" kern="1200">
+    <a:lvl1pPr algn="l" defTabSz="457200" eaLnBrk="1" hangingPunct="1" latinLnBrk="0" marL="0" rtl="0">
+      <a:defRPr kern="1200" sz="1800">
         <a:solidFill>
           <a:schemeClr val="tx1"/>
         </a:solidFill>
@@ -32,8 +40,8 @@
         <a:cs typeface="+mn-cs"/>
       </a:defRPr>
     </a:lvl1pPr>
-    <a:lvl2pPr marL="457200" algn="l" defTabSz="457200" rtl="0" eaLnBrk="1" latinLnBrk="0" hangingPunct="1">
-      <a:defRPr sz="1800" kern="1200">
+    <a:lvl2pPr algn="l" defTabSz="457200" eaLnBrk="1" hangingPunct="1" latinLnBrk="0" marL="457200" rtl="0">
+      <a:defRPr kern="1200" sz="1800">
         <a:solidFill>
           <a:schemeClr val="tx1"/>
         </a:solidFill>
@@ -42,8 +50,8 @@
         <a:cs typeface="+mn-cs"/>
       </a:defRPr>
     </a:lvl2pPr>
-    <a:lvl3pPr marL="914400" algn="l" defTabSz="457200" rtl="0" eaLnBrk="1" latinLnBrk="0" hangingPunct="1">
-      <a:defRPr sz="1800" kern="1200">
+    <a:lvl3pPr algn="l" defTabSz="457200" eaLnBrk="1" hangingPunct="1" latinLnBrk="0" marL="914400" rtl="0">
+      <a:defRPr kern="1200" sz="1800">
         <a:solidFill>
           <a:schemeClr val="tx1"/>
         </a:solidFill>
@@ -52,8 +60,8 @@
         <a:cs typeface="+mn-cs"/>
       </a:defRPr>
     </a:lvl3pPr>
-    <a:lvl4pPr marL="1371600" algn="l" defTabSz="457200" rtl="0" eaLnBrk="1" latinLnBrk="0" hangingPunct="1">
-      <a:defRPr sz="1800" kern="1200">
+    <a:lvl4pPr algn="l" defTabSz="457200" eaLnBrk="1" hangingPunct="1" latinLnBrk="0" marL="1371600" rtl="0">
+      <a:defRPr kern="1200" sz="1800">
         <a:solidFill>
           <a:schemeClr val="tx1"/>
         </a:solidFill>
@@ -62,8 +70,8 @@
         <a:cs typeface="+mn-cs"/>
       </a:defRPr>
     </a:lvl4pPr>
-    <a:lvl5pPr marL="1828800" algn="l" defTabSz="457200" rtl="0" eaLnBrk="1" latinLnBrk="0" hangingPunct="1">
-      <a:defRPr sz="1800" kern="1200">
+    <a:lvl5pPr algn="l" defTabSz="457200" eaLnBrk="1" hangingPunct="1" latinLnBrk="0" marL="1828800" rtl="0">
+      <a:defRPr kern="1200" sz="1800">
         <a:solidFill>
           <a:schemeClr val="tx1"/>
         </a:solidFill>
@@ -72,8 +80,8 @@
         <a:cs typeface="+mn-cs"/>
       </a:defRPr>
     </a:lvl5pPr>
-    <a:lvl6pPr marL="2286000" algn="l" defTabSz="457200" rtl="0" eaLnBrk="1" latinLnBrk="0" hangingPunct="1">
-      <a:defRPr sz="1800" kern="1200">
+    <a:lvl6pPr algn="l" defTabSz="457200" eaLnBrk="1" hangingPunct="1" latinLnBrk="0" marL="2286000" rtl="0">
+      <a:defRPr kern="1200" sz="1800">
         <a:solidFill>
           <a:schemeClr val="tx1"/>
         </a:solidFill>
@@ -82,8 +90,8 @@
         <a:cs typeface="+mn-cs"/>
       </a:defRPr>
     </a:lvl6pPr>
-    <a:lvl7pPr marL="2743200" algn="l" defTabSz="457200" rtl="0" eaLnBrk="1" latinLnBrk="0" hangingPunct="1">
-      <a:defRPr sz="1800" kern="1200">
+    <a:lvl7pPr algn="l" defTabSz="457200" eaLnBrk="1" hangingPunct="1" latinLnBrk="0" marL="2743200" rtl="0">
+      <a:defRPr kern="1200" sz="1800">
         <a:solidFill>
           <a:schemeClr val="tx1"/>
         </a:solidFill>
@@ -92,8 +100,8 @@
         <a:cs typeface="+mn-cs"/>
       </a:defRPr>
     </a:lvl7pPr>
-    <a:lvl8pPr marL="3200400" algn="l" defTabSz="457200" rtl="0" eaLnBrk="1" latinLnBrk="0" hangingPunct="1">
-      <a:defRPr sz="1800" kern="1200">
+    <a:lvl8pPr algn="l" defTabSz="457200" eaLnBrk="1" hangingPunct="1" latinLnBrk="0" marL="3200400" rtl="0">
+      <a:defRPr kern="1200" sz="1800">
         <a:solidFill>
           <a:schemeClr val="tx1"/>
         </a:solidFill>
@@ -102,8 +110,8 @@
         <a:cs typeface="+mn-cs"/>
       </a:defRPr>
     </a:lvl8pPr>
-    <a:lvl9pPr marL="3657600" algn="l" defTabSz="457200" rtl="0" eaLnBrk="1" latinLnBrk="0" hangingPunct="1">
-      <a:defRPr sz="1800" kern="1200">
+    <a:lvl9pPr algn="l" defTabSz="457200" eaLnBrk="1" hangingPunct="1" latinLnBrk="0" marL="3657600" rtl="0">
+      <a:defRPr kern="1200" sz="1800">
         <a:solidFill>
           <a:schemeClr val="tx1"/>
         </a:solidFill>
@@ -113,11 +121,27 @@
       </a:defRPr>
     </a:lvl9pPr>
   </p:defaultTextStyle>
+  <p:extLst>
+    <p:ext uri="{EFAFB233-063F-42B5-8137-9DF3F51BA10A}">
+      <p15:sldGuideLst xmlns:p15="http://schemas.microsoft.com/office/powerpoint/2012/main">
+        <p15:guide id="1" orient="horz" pos="1620" userDrawn="1">
+          <p15:clr>
+            <a:srgbClr val="A4A3A4"/>
+          </p15:clr>
+        </p15:guide>
+        <p15:guide id="2" pos="2880" userDrawn="1">
+          <p15:clr>
+            <a:srgbClr val="A4A3A4"/>
+          </p15:clr>
+        </p15:guide>
+      </p15:sldGuideLst>
+    </p:ext>
+  </p:extLst>
 </p:presentation>
 </file>
 
 <file path=ppt/notesMasters/notesMaster1.xml><?xml version="1.0" encoding="utf-8"?>
-<p:notesMaster xmlns:a="http://schemas.openxmlformats.org/drawingml/2006/main" xmlns:p="http://schemas.openxmlformats.org/presentationml/2006/main" xmlns:r="http://schemas.openxmlformats.org/officeDocument/2006/relationships">
+<p:notesMaster xmlns:a="http://schemas.openxmlformats.org/drawingml/2006/main" xmlns:r="http://schemas.openxmlformats.org/officeDocument/2006/relationships" xmlns:p="http://schemas.openxmlformats.org/presentationml/2006/main">
   <p:cSld>
     <p:bg>
       <p:bgRef idx="1001">
@@ -151,7 +175,7 @@
         <p:spPr>
           <a:xfrm>
             <a:off x="0" y="0"/>
-            <a:ext cx="2971800" cy="457200"/>
+            <a:ext cx="2971800" cy="458788"/>
           </a:xfrm>
           <a:prstGeom prst="rect">
             <a:avLst/>
@@ -182,7 +206,7 @@
         <p:spPr>
           <a:xfrm>
             <a:off x="3884613" y="0"/>
-            <a:ext cx="2971800" cy="457200"/>
+            <a:ext cx="2971800" cy="458788"/>
           </a:xfrm>
           <a:prstGeom prst="rect">
             <a:avLst/>
@@ -196,9 +220,9 @@
             </a:lvl1pPr>
           </a:lstStyle>
           <a:p>
-            <a:fld id="{0F89C1C7-3DCD-1040-A9CF-14679D8B5DDD}" type="datetimeFigureOut">
+            <a:fld id="{0F9C1CCF-B725-44A7-AA57-5E433BD85C9F}" type="datetimeFigureOut">
               <a:rPr lang="en-US" smtClean="0"/>
-              <a:t>10/17/16</a:t>
+              <a:t>1/2/22</a:t>
             </a:fld>
             <a:endParaRPr lang="en-US"/>
           </a:p>
@@ -216,8 +240,8 @@
         </p:nvSpPr>
         <p:spPr>
           <a:xfrm>
-            <a:off x="1143000" y="685800"/>
-            <a:ext cx="4572000" cy="3429000"/>
+            <a:off x="685800" y="1143000"/>
+            <a:ext cx="5486400" cy="3086100"/>
           </a:xfrm>
           <a:prstGeom prst="rect">
             <a:avLst/>
@@ -249,8 +273,8 @@
         </p:nvSpPr>
         <p:spPr>
           <a:xfrm>
-            <a:off x="685800" y="4343400"/>
-            <a:ext cx="5486400" cy="4114800"/>
+            <a:off x="685800" y="4400550"/>
+            <a:ext cx="5486400" cy="3600450"/>
           </a:xfrm>
           <a:prstGeom prst="rect">
             <a:avLst/>
@@ -262,38 +286,37 @@
           <a:p>
             <a:pPr lvl="0"/>
             <a:r>
-              <a:rPr lang="en-US" smtClean="0"/>
+              <a:rPr lang="en-US"/>
               <a:t>Click to edit Master text styles</a:t>
             </a:r>
           </a:p>
           <a:p>
             <a:pPr lvl="1"/>
             <a:r>
-              <a:rPr lang="en-US" smtClean="0"/>
+              <a:rPr lang="en-US"/>
               <a:t>Second level</a:t>
             </a:r>
           </a:p>
           <a:p>
             <a:pPr lvl="2"/>
             <a:r>
-              <a:rPr lang="en-US" smtClean="0"/>
+              <a:rPr lang="en-US"/>
               <a:t>Third level</a:t>
             </a:r>
           </a:p>
           <a:p>
             <a:pPr lvl="3"/>
             <a:r>
-              <a:rPr lang="en-US" smtClean="0"/>
+              <a:rPr lang="en-US"/>
               <a:t>Fourth level</a:t>
             </a:r>
           </a:p>
           <a:p>
             <a:pPr lvl="4"/>
             <a:r>
-              <a:rPr lang="en-US" smtClean="0"/>
+              <a:rPr lang="en-US"/>
               <a:t>Fifth level</a:t>
             </a:r>
-            <a:endParaRPr lang="en-US"/>
           </a:p>
         </p:txBody>
       </p:sp>
@@ -310,7 +333,7 @@
         <p:spPr>
           <a:xfrm>
             <a:off x="0" y="8685213"/>
-            <a:ext cx="2971800" cy="457200"/>
+            <a:ext cx="2971800" cy="458787"/>
           </a:xfrm>
           <a:prstGeom prst="rect">
             <a:avLst/>
@@ -341,7 +364,7 @@
         <p:spPr>
           <a:xfrm>
             <a:off x="3884613" y="8685213"/>
-            <a:ext cx="2971800" cy="457200"/>
+            <a:ext cx="2971800" cy="458787"/>
           </a:xfrm>
           <a:prstGeom prst="rect">
             <a:avLst/>
@@ -355,7 +378,7 @@
             </a:lvl1pPr>
           </a:lstStyle>
           <a:p>
-            <a:fld id="{BB5E49A5-4136-284D-997B-48E1D791AD67}" type="slidenum">
+            <a:fld id="{18BDFEC3-8487-43E8-A154-7C12CBC1FFF2}" type="slidenum">
               <a:rPr lang="en-US" smtClean="0"/>
               <a:t>‹#›</a:t>
             </a:fld>
@@ -366,13 +389,13 @@
     </p:spTree>
     <p:extLst>
       <p:ext uri="{BB962C8B-B14F-4D97-AF65-F5344CB8AC3E}">
-        <p14:creationId xmlns:p14="http://schemas.microsoft.com/office/powerpoint/2010/main" val="2623252185"/>
+        <p14:creationId xmlns:p14="http://schemas.microsoft.com/office/powerpoint/2010/main" val="3782709779"/>
       </p:ext>
     </p:extLst>
   </p:cSld>
   <p:clrMap bg1="lt1" tx1="dk1" bg2="lt2" tx2="dk2" accent1="accent1" accent2="accent2" accent3="accent3" accent4="accent4" accent5="accent5" accent6="accent6" hlink="hlink" folHlink="folHlink"/>
   <p:notesStyle>
-    <a:lvl1pPr marL="0" algn="l" defTabSz="457200" rtl="0" eaLnBrk="1" latinLnBrk="0" hangingPunct="1">
+    <a:lvl1pPr marL="0" algn="l" defTabSz="914400" rtl="0" eaLnBrk="1" latinLnBrk="0" hangingPunct="1">
       <a:defRPr sz="1200" kern="1200">
         <a:solidFill>
           <a:schemeClr val="tx1"/>
@@ -382,7 +405,7 @@
         <a:cs typeface="+mn-cs"/>
       </a:defRPr>
     </a:lvl1pPr>
-    <a:lvl2pPr marL="457200" algn="l" defTabSz="457200" rtl="0" eaLnBrk="1" latinLnBrk="0" hangingPunct="1">
+    <a:lvl2pPr marL="457200" algn="l" defTabSz="914400" rtl="0" eaLnBrk="1" latinLnBrk="0" hangingPunct="1">
       <a:defRPr sz="1200" kern="1200">
         <a:solidFill>
           <a:schemeClr val="tx1"/>
@@ -392,7 +415,7 @@
         <a:cs typeface="+mn-cs"/>
       </a:defRPr>
     </a:lvl2pPr>
-    <a:lvl3pPr marL="914400" algn="l" defTabSz="457200" rtl="0" eaLnBrk="1" latinLnBrk="0" hangingPunct="1">
+    <a:lvl3pPr marL="914400" algn="l" defTabSz="914400" rtl="0" eaLnBrk="1" latinLnBrk="0" hangingPunct="1">
       <a:defRPr sz="1200" kern="1200">
         <a:solidFill>
           <a:schemeClr val="tx1"/>
@@ -402,7 +425,7 @@
         <a:cs typeface="+mn-cs"/>
       </a:defRPr>
     </a:lvl3pPr>
-    <a:lvl4pPr marL="1371600" algn="l" defTabSz="457200" rtl="0" eaLnBrk="1" latinLnBrk="0" hangingPunct="1">
+    <a:lvl4pPr marL="1371600" algn="l" defTabSz="914400" rtl="0" eaLnBrk="1" latinLnBrk="0" hangingPunct="1">
       <a:defRPr sz="1200" kern="1200">
         <a:solidFill>
           <a:schemeClr val="tx1"/>
@@ -412,7 +435,7 @@
         <a:cs typeface="+mn-cs"/>
       </a:defRPr>
     </a:lvl4pPr>
-    <a:lvl5pPr marL="1828800" algn="l" defTabSz="457200" rtl="0" eaLnBrk="1" latinLnBrk="0" hangingPunct="1">
+    <a:lvl5pPr marL="1828800" algn="l" defTabSz="914400" rtl="0" eaLnBrk="1" latinLnBrk="0" hangingPunct="1">
       <a:defRPr sz="1200" kern="1200">
         <a:solidFill>
           <a:schemeClr val="tx1"/>
@@ -422,7 +445,7 @@
         <a:cs typeface="+mn-cs"/>
       </a:defRPr>
     </a:lvl5pPr>
-    <a:lvl6pPr marL="2286000" algn="l" defTabSz="457200" rtl="0" eaLnBrk="1" latinLnBrk="0" hangingPunct="1">
+    <a:lvl6pPr marL="2286000" algn="l" defTabSz="914400" rtl="0" eaLnBrk="1" latinLnBrk="0" hangingPunct="1">
       <a:defRPr sz="1200" kern="1200">
         <a:solidFill>
           <a:schemeClr val="tx1"/>
@@ -432,7 +455,7 @@
         <a:cs typeface="+mn-cs"/>
       </a:defRPr>
     </a:lvl6pPr>
-    <a:lvl7pPr marL="2743200" algn="l" defTabSz="457200" rtl="0" eaLnBrk="1" latinLnBrk="0" hangingPunct="1">
+    <a:lvl7pPr marL="2743200" algn="l" defTabSz="914400" rtl="0" eaLnBrk="1" latinLnBrk="0" hangingPunct="1">
       <a:defRPr sz="1200" kern="1200">
         <a:solidFill>
           <a:schemeClr val="tx1"/>
@@ -442,7 +465,7 @@
         <a:cs typeface="+mn-cs"/>
       </a:defRPr>
     </a:lvl7pPr>
-    <a:lvl8pPr marL="3200400" algn="l" defTabSz="457200" rtl="0" eaLnBrk="1" latinLnBrk="0" hangingPunct="1">
+    <a:lvl8pPr marL="3200400" algn="l" defTabSz="914400" rtl="0" eaLnBrk="1" latinLnBrk="0" hangingPunct="1">
       <a:defRPr sz="1200" kern="1200">
         <a:solidFill>
           <a:schemeClr val="tx1"/>
@@ -452,7 +475,7 @@
         <a:cs typeface="+mn-cs"/>
       </a:defRPr>
     </a:lvl8pPr>
-    <a:lvl9pPr marL="3657600" algn="l" defTabSz="457200" rtl="0" eaLnBrk="1" latinLnBrk="0" hangingPunct="1">
+    <a:lvl9pPr marL="3657600" algn="l" defTabSz="914400" rtl="0" eaLnBrk="1" latinLnBrk="0" hangingPunct="1">
       <a:defRPr sz="1200" kern="1200">
         <a:solidFill>
           <a:schemeClr val="tx1"/>
@@ -467,7 +490,7 @@
 </file>
 
 <file path=ppt/notesSlides/notesSlide1.xml><?xml version="1.0" encoding="utf-8"?>
-<p:notes xmlns:a="http://schemas.openxmlformats.org/drawingml/2006/main" xmlns:p="http://schemas.openxmlformats.org/presentationml/2006/main" xmlns:r="http://schemas.openxmlformats.org/officeDocument/2006/relationships">
+<p:notes xmlns:a="http://schemas.openxmlformats.org/drawingml/2006/main" xmlns:r="http://schemas.openxmlformats.org/officeDocument/2006/relationships" xmlns:p="http://schemas.openxmlformats.org/presentationml/2006/main">
   <p:cSld>
     <p:spTree>
       <p:nvGrpSpPr>
@@ -487,10 +510,10 @@
         <p:nvSpPr>
           <p:cNvPr id="2" name="Slide Image Placeholder 1"/>
           <p:cNvSpPr>
-            <a:spLocks noGrp="1"/>
-          </p:cNvSpPr>
-          <p:nvPr>
-            <p:ph type="sldImg" idx="2"/>
+            <a:spLocks noGrp="1" noRot="1" noChangeAspect="1"/>
+          </p:cNvSpPr>
+          <p:nvPr>
+            <p:ph type="sldImg"/>
           </p:nvPr>
         </p:nvSpPr>
         <p:spPr/>
@@ -502,16 +525,20 @@
             <a:spLocks noGrp="1"/>
           </p:cNvSpPr>
           <p:nvPr>
-            <p:ph type="body" idx="3" sz="quarter"/>
-          </p:nvPr>
-        </p:nvSpPr>
-        <p:spPr/>
-        <p:txBody>
-          <a:bodyPr/>
-          <a:lstStyle/>
-          <a:p>
-            <a:r>
-              <a:t>Opening: this is the multi-omic framework our group built to ask a simple but contested question — how well does a mouse predict a human immune response? Manuscript under review at Genes and Immunity.</a:t>
+            <p:ph type="body" idx="1"/>
+          </p:nvPr>
+        </p:nvSpPr>
+        <p:spPr/>
+        <p:txBody>
+          <a:bodyPr/>
+          <a:lstStyle/>
+          <a:p>
+            <a:pPr lvl="0" indent="0" marL="0">
+              <a:buNone/>
+            </a:pPr>
+            <a:r>
+              <a:rPr/>
+              <a:t>Frame the problem: mice are the dominant preclinical model, but their predictive value is contested and the literature is contradictory. Crucially, previous comparisons were descriptive and disconnected from genomic architecture — nobody linked conservation to sequence evolution or cis-regulation.</a:t>
             </a:r>
           </a:p>
         </p:txBody>
@@ -523,21 +550,29 @@
             <a:spLocks noGrp="1"/>
           </p:cNvSpPr>
           <p:nvPr>
-            <p:ph type="sldNum" idx="5" sz="quarter"/>
-          </p:nvPr>
-        </p:nvSpPr>
-        <p:spPr/>
+            <p:ph type="sldNum" sz="quarter" idx="10"/>
+          </p:nvPr>
+        </p:nvSpPr>
+        <p:spPr/>
+        <p:txBody>
+          <a:bodyPr/>
+          <a:lstStyle/>
+          <a:p>
+            <a:fld id="{18BDFEC3-8487-43E8-A154-7C12CBC1FFF2}" type="slidenum">
+              <a:rPr lang="en-US"/>
+              <a:t>2</a:t>
+            </a:fld>
+            <a:endParaRPr lang="en-US"/>
+          </a:p>
+        </p:txBody>
       </p:sp>
     </p:spTree>
   </p:cSld>
-  <p:clrMapOvr>
-    <a:masterClrMapping/>
-  </p:clrMapOvr>
 </p:notes>
 </file>
 
-<file path=ppt/notesSlides/notesSlide10.xml><?xml version="1.0" encoding="utf-8"?>
-<p:notes xmlns:a="http://schemas.openxmlformats.org/drawingml/2006/main" xmlns:p="http://schemas.openxmlformats.org/presentationml/2006/main" xmlns:r="http://schemas.openxmlformats.org/officeDocument/2006/relationships">
+<file path=ppt/notesSlides/notesSlide2.xml><?xml version="1.0" encoding="utf-8"?>
+<p:notes xmlns:a="http://schemas.openxmlformats.org/drawingml/2006/main" xmlns:r="http://schemas.openxmlformats.org/officeDocument/2006/relationships" xmlns:p="http://schemas.openxmlformats.org/presentationml/2006/main">
   <p:cSld>
     <p:spTree>
       <p:nvGrpSpPr>
@@ -557,10 +592,10 @@
         <p:nvSpPr>
           <p:cNvPr id="2" name="Slide Image Placeholder 1"/>
           <p:cNvSpPr>
-            <a:spLocks noGrp="1"/>
-          </p:cNvSpPr>
-          <p:nvPr>
-            <p:ph type="sldImg" idx="2"/>
+            <a:spLocks noGrp="1" noRot="1" noChangeAspect="1"/>
+          </p:cNvSpPr>
+          <p:nvPr>
+            <p:ph type="sldImg"/>
           </p:nvPr>
         </p:nvSpPr>
         <p:spPr/>
@@ -572,16 +607,20 @@
             <a:spLocks noGrp="1"/>
           </p:cNvSpPr>
           <p:nvPr>
-            <p:ph type="body" idx="3" sz="quarter"/>
-          </p:nvPr>
-        </p:nvSpPr>
-        <p:spPr/>
-        <p:txBody>
-          <a:bodyPr/>
-          <a:lstStyle/>
-          <a:p>
-            <a:r>
-              <a:t>Close by pointing to the deliverables: the full open-source pipeline, the project site that documents the methodology and the notebook map, and the step-by-step notebook that applies the trained models to a new mouse dataset — runnable in the browser via Binder. Everything is open so the community can audit and retrain.</a:t>
+            <p:ph type="body" idx="1"/>
+          </p:nvPr>
+        </p:nvSpPr>
+        <p:spPr/>
+        <p:txBody>
+          <a:bodyPr/>
+          <a:lstStyle/>
+          <a:p>
+            <a:pPr lvl="0" indent="0" marL="0">
+              <a:buNone/>
+            </a:pPr>
+            <a:r>
+              <a:rPr/>
+              <a:t>Design: three stimulus categories — vaccination, acute infection and injury — each with matched mouse and human blood transcriptomes. DMD (mdx) is our biological negative control. Everything is harmonised: limma with empirical Bayes, covariate adjustment, and iterative downsampling of human subjects to n = 5 over 200 iterations to remove pseudo-significance.</a:t>
             </a:r>
           </a:p>
         </p:txBody>
@@ -593,21 +632,29 @@
             <a:spLocks noGrp="1"/>
           </p:cNvSpPr>
           <p:nvPr>
-            <p:ph type="sldNum" idx="5" sz="quarter"/>
-          </p:nvPr>
-        </p:nvSpPr>
-        <p:spPr/>
+            <p:ph type="sldNum" sz="quarter" idx="10"/>
+          </p:nvPr>
+        </p:nvSpPr>
+        <p:spPr/>
+        <p:txBody>
+          <a:bodyPr/>
+          <a:lstStyle/>
+          <a:p>
+            <a:fld id="{18BDFEC3-8487-43E8-A154-7C12CBC1FFF2}" type="slidenum">
+              <a:rPr lang="en-US"/>
+              <a:t>3</a:t>
+            </a:fld>
+            <a:endParaRPr lang="en-US"/>
+          </a:p>
+        </p:txBody>
       </p:sp>
     </p:spTree>
   </p:cSld>
-  <p:clrMapOvr>
-    <a:masterClrMapping/>
-  </p:clrMapOvr>
 </p:notes>
 </file>
 
-<file path=ppt/notesSlides/notesSlide2.xml><?xml version="1.0" encoding="utf-8"?>
-<p:notes xmlns:a="http://schemas.openxmlformats.org/drawingml/2006/main" xmlns:p="http://schemas.openxmlformats.org/presentationml/2006/main" xmlns:r="http://schemas.openxmlformats.org/officeDocument/2006/relationships">
+<file path=ppt/notesSlides/notesSlide3.xml><?xml version="1.0" encoding="utf-8"?>
+<p:notes xmlns:a="http://schemas.openxmlformats.org/drawingml/2006/main" xmlns:r="http://schemas.openxmlformats.org/officeDocument/2006/relationships" xmlns:p="http://schemas.openxmlformats.org/presentationml/2006/main">
   <p:cSld>
     <p:spTree>
       <p:nvGrpSpPr>
@@ -627,10 +674,10 @@
         <p:nvSpPr>
           <p:cNvPr id="2" name="Slide Image Placeholder 1"/>
           <p:cNvSpPr>
-            <a:spLocks noGrp="1"/>
-          </p:cNvSpPr>
-          <p:nvPr>
-            <p:ph type="sldImg" idx="2"/>
+            <a:spLocks noGrp="1" noRot="1" noChangeAspect="1"/>
+          </p:cNvSpPr>
+          <p:nvPr>
+            <p:ph type="sldImg"/>
           </p:nvPr>
         </p:nvSpPr>
         <p:spPr/>
@@ -642,16 +689,20 @@
             <a:spLocks noGrp="1"/>
           </p:cNvSpPr>
           <p:nvPr>
-            <p:ph type="body" idx="3" sz="quarter"/>
-          </p:nvPr>
-        </p:nvSpPr>
-        <p:spPr/>
-        <p:txBody>
-          <a:bodyPr/>
-          <a:lstStyle/>
-          <a:p>
-            <a:r>
-              <a:t>Frame the problem: mice are the dominant preclinical model, but their predictive value is contested and the literature is contradictory. Crucially, previous comparisons were descriptive and disconnected from genomic architecture — nobody linked conservation to sequence evolution or cis-regulation.</a:t>
+            <p:ph type="body" idx="1"/>
+          </p:nvPr>
+        </p:nvSpPr>
+        <p:spPr/>
+        <p:txBody>
+          <a:bodyPr/>
+          <a:lstStyle/>
+          <a:p>
+            <a:pPr lvl="0" indent="0" marL="0">
+              <a:buNone/>
+            </a:pPr>
+            <a:r>
+              <a:rPr/>
+              <a:t>First result: granularity matters. Individual orthologous genes correlate only moderately, but when we collapse the transcriptome into Blood Transcription Modules the correlation jumps to 0.89–0.97 (trauma being the exception). Shared leading-edge genes account for 67.5–79% of mouse LEGs — the translational signal lives in the leading edge, not in all genes.</a:t>
             </a:r>
           </a:p>
         </p:txBody>
@@ -663,21 +714,29 @@
             <a:spLocks noGrp="1"/>
           </p:cNvSpPr>
           <p:nvPr>
-            <p:ph type="sldNum" idx="5" sz="quarter"/>
-          </p:nvPr>
-        </p:nvSpPr>
-        <p:spPr/>
+            <p:ph type="sldNum" sz="quarter" idx="10"/>
+          </p:nvPr>
+        </p:nvSpPr>
+        <p:spPr/>
+        <p:txBody>
+          <a:bodyPr/>
+          <a:lstStyle/>
+          <a:p>
+            <a:fld id="{18BDFEC3-8487-43E8-A154-7C12CBC1FFF2}" type="slidenum">
+              <a:rPr lang="en-US"/>
+              <a:t>4</a:t>
+            </a:fld>
+            <a:endParaRPr lang="en-US"/>
+          </a:p>
+        </p:txBody>
       </p:sp>
     </p:spTree>
   </p:cSld>
-  <p:clrMapOvr>
-    <a:masterClrMapping/>
-  </p:clrMapOvr>
 </p:notes>
 </file>
 
-<file path=ppt/notesSlides/notesSlide3.xml><?xml version="1.0" encoding="utf-8"?>
-<p:notes xmlns:a="http://schemas.openxmlformats.org/drawingml/2006/main" xmlns:p="http://schemas.openxmlformats.org/presentationml/2006/main" xmlns:r="http://schemas.openxmlformats.org/officeDocument/2006/relationships">
+<file path=ppt/notesSlides/notesSlide4.xml><?xml version="1.0" encoding="utf-8"?>
+<p:notes xmlns:a="http://schemas.openxmlformats.org/drawingml/2006/main" xmlns:r="http://schemas.openxmlformats.org/officeDocument/2006/relationships" xmlns:p="http://schemas.openxmlformats.org/presentationml/2006/main">
   <p:cSld>
     <p:spTree>
       <p:nvGrpSpPr>
@@ -697,10 +756,10 @@
         <p:nvSpPr>
           <p:cNvPr id="2" name="Slide Image Placeholder 1"/>
           <p:cNvSpPr>
-            <a:spLocks noGrp="1"/>
-          </p:cNvSpPr>
-          <p:nvPr>
-            <p:ph type="sldImg" idx="2"/>
+            <a:spLocks noGrp="1" noRot="1" noChangeAspect="1"/>
+          </p:cNvSpPr>
+          <p:nvPr>
+            <p:ph type="sldImg"/>
           </p:nvPr>
         </p:nvSpPr>
         <p:spPr/>
@@ -712,16 +771,20 @@
             <a:spLocks noGrp="1"/>
           </p:cNvSpPr>
           <p:nvPr>
-            <p:ph type="body" idx="3" sz="quarter"/>
-          </p:nvPr>
-        </p:nvSpPr>
-        <p:spPr/>
-        <p:txBody>
-          <a:bodyPr/>
-          <a:lstStyle/>
-          <a:p>
-            <a:r>
-              <a:t>Design: three stimulus categories — vaccination, acute infection and injury — each with matched mouse and human blood transcriptomes. DMD (mdx) is our biological negative control. Everything is harmonised: limma with empirical Bayes, covariate adjustment, and iterative downsampling of human subjects to n=5 over 200 iterations to remove pseudo-significance.</a:t>
+            <p:ph type="body" idx="1"/>
+          </p:nvPr>
+        </p:nvSpPr>
+        <p:spPr/>
+        <p:txBody>
+          <a:bodyPr/>
+          <a:lstStyle/>
+          <a:p>
+            <a:pPr lvl="0" indent="0" marL="0">
+              <a:buNone/>
+            </a:pPr>
+            <a:r>
+              <a:rPr/>
+              <a:t>Second result: translatability scales with the strength of the perturbation. Acute bacterial infection and severe injury engage conserved core mammalian programs (rho 0.41–0.59), whereas single-dose subunit/inactivated vaccines stay near baseline (rho −0.32 to 0.27). And timing rarely matches chronologically: mouse 2–6 h aligns with the human days 1–3 window.</a:t>
             </a:r>
           </a:p>
         </p:txBody>
@@ -733,21 +796,29 @@
             <a:spLocks noGrp="1"/>
           </p:cNvSpPr>
           <p:nvPr>
-            <p:ph type="sldNum" idx="5" sz="quarter"/>
-          </p:nvPr>
-        </p:nvSpPr>
-        <p:spPr/>
+            <p:ph type="sldNum" sz="quarter" idx="10"/>
+          </p:nvPr>
+        </p:nvSpPr>
+        <p:spPr/>
+        <p:txBody>
+          <a:bodyPr/>
+          <a:lstStyle/>
+          <a:p>
+            <a:fld id="{18BDFEC3-8487-43E8-A154-7C12CBC1FFF2}" type="slidenum">
+              <a:rPr lang="en-US"/>
+              <a:t>7</a:t>
+            </a:fld>
+            <a:endParaRPr lang="en-US"/>
+          </a:p>
+        </p:txBody>
       </p:sp>
     </p:spTree>
   </p:cSld>
-  <p:clrMapOvr>
-    <a:masterClrMapping/>
-  </p:clrMapOvr>
 </p:notes>
 </file>
 
-<file path=ppt/notesSlides/notesSlide4.xml><?xml version="1.0" encoding="utf-8"?>
-<p:notes xmlns:a="http://schemas.openxmlformats.org/drawingml/2006/main" xmlns:p="http://schemas.openxmlformats.org/presentationml/2006/main" xmlns:r="http://schemas.openxmlformats.org/officeDocument/2006/relationships">
+<file path=ppt/notesSlides/notesSlide5.xml><?xml version="1.0" encoding="utf-8"?>
+<p:notes xmlns:a="http://schemas.openxmlformats.org/drawingml/2006/main" xmlns:r="http://schemas.openxmlformats.org/officeDocument/2006/relationships" xmlns:p="http://schemas.openxmlformats.org/presentationml/2006/main">
   <p:cSld>
     <p:spTree>
       <p:nvGrpSpPr>
@@ -767,10 +838,10 @@
         <p:nvSpPr>
           <p:cNvPr id="2" name="Slide Image Placeholder 1"/>
           <p:cNvSpPr>
-            <a:spLocks noGrp="1"/>
-          </p:cNvSpPr>
-          <p:nvPr>
-            <p:ph type="sldImg" idx="2"/>
+            <a:spLocks noGrp="1" noRot="1" noChangeAspect="1"/>
+          </p:cNvSpPr>
+          <p:nvPr>
+            <p:ph type="sldImg"/>
           </p:nvPr>
         </p:nvSpPr>
         <p:spPr/>
@@ -782,16 +853,20 @@
             <a:spLocks noGrp="1"/>
           </p:cNvSpPr>
           <p:nvPr>
-            <p:ph type="body" idx="3" sz="quarter"/>
-          </p:nvPr>
-        </p:nvSpPr>
-        <p:spPr/>
-        <p:txBody>
-          <a:bodyPr/>
-          <a:lstStyle/>
-          <a:p>
-            <a:r>
-              <a:t>First result: granularity matters. Individual orthologous genes correlate only moderately, but when we collapse the transcriptome into Blood Transcription Modules the correlation jumps to 0.89–0.97 (trauma being the exception). Shared leading-edge genes account for 67.5–79% of mouse LEGs — the translational signal lives in the leading edge, not in all genes.</a:t>
+            <p:ph type="body" idx="1"/>
+          </p:nvPr>
+        </p:nvSpPr>
+        <p:spPr/>
+        <p:txBody>
+          <a:bodyPr/>
+          <a:lstStyle/>
+          <a:p>
+            <a:pPr lvl="0" indent="0" marL="0">
+              <a:buNone/>
+            </a:pPr>
+            <a:r>
+              <a:rPr/>
+              <a:t>Third result: prediction. Mouse signatures classify the direction of human gene regulation, but module-level models clearly beat gene-level ones — 0.84–0.98 ROC-AUC versus 0.64–0.74 — and both beat the DMD negative control (0.48–0.61). Downregulation is easier to predict than upregulation at early time points.</a:t>
             </a:r>
           </a:p>
         </p:txBody>
@@ -803,21 +878,29 @@
             <a:spLocks noGrp="1"/>
           </p:cNvSpPr>
           <p:nvPr>
-            <p:ph type="sldNum" idx="5" sz="quarter"/>
-          </p:nvPr>
-        </p:nvSpPr>
-        <p:spPr/>
+            <p:ph type="sldNum" sz="quarter" idx="10"/>
+          </p:nvPr>
+        </p:nvSpPr>
+        <p:spPr/>
+        <p:txBody>
+          <a:bodyPr/>
+          <a:lstStyle/>
+          <a:p>
+            <a:fld id="{18BDFEC3-8487-43E8-A154-7C12CBC1FFF2}" type="slidenum">
+              <a:rPr lang="en-US"/>
+              <a:t>8</a:t>
+            </a:fld>
+            <a:endParaRPr lang="en-US"/>
+          </a:p>
+        </p:txBody>
       </p:sp>
     </p:spTree>
   </p:cSld>
-  <p:clrMapOvr>
-    <a:masterClrMapping/>
-  </p:clrMapOvr>
 </p:notes>
 </file>
 
-<file path=ppt/notesSlides/notesSlide5.xml><?xml version="1.0" encoding="utf-8"?>
-<p:notes xmlns:a="http://schemas.openxmlformats.org/drawingml/2006/main" xmlns:p="http://schemas.openxmlformats.org/presentationml/2006/main" xmlns:r="http://schemas.openxmlformats.org/officeDocument/2006/relationships">
+<file path=ppt/notesSlides/notesSlide6.xml><?xml version="1.0" encoding="utf-8"?>
+<p:notes xmlns:a="http://schemas.openxmlformats.org/drawingml/2006/main" xmlns:r="http://schemas.openxmlformats.org/officeDocument/2006/relationships" xmlns:p="http://schemas.openxmlformats.org/presentationml/2006/main">
   <p:cSld>
     <p:spTree>
       <p:nvGrpSpPr>
@@ -837,10 +920,10 @@
         <p:nvSpPr>
           <p:cNvPr id="2" name="Slide Image Placeholder 1"/>
           <p:cNvSpPr>
-            <a:spLocks noGrp="1"/>
-          </p:cNvSpPr>
-          <p:nvPr>
-            <p:ph type="sldImg" idx="2"/>
+            <a:spLocks noGrp="1" noRot="1" noChangeAspect="1"/>
+          </p:cNvSpPr>
+          <p:nvPr>
+            <p:ph type="sldImg"/>
           </p:nvPr>
         </p:nvSpPr>
         <p:spPr/>
@@ -852,16 +935,20 @@
             <a:spLocks noGrp="1"/>
           </p:cNvSpPr>
           <p:nvPr>
-            <p:ph type="body" idx="3" sz="quarter"/>
-          </p:nvPr>
-        </p:nvSpPr>
-        <p:spPr/>
-        <p:txBody>
-          <a:bodyPr/>
-          <a:lstStyle/>
-          <a:p>
-            <a:r>
-              <a:t>Second result: translatability scales with the strength of the perturbation. Acute bacterial infection and severe injury engage conserved core mammalian programs (rho 0.41–0.59), whereas single-dose subunit/inactivated vaccines stay near baseline (rho −0.32 to 0.27). And timing rarely matches chronologically: mouse 2–6 h aligns with the human days 1–3 window — compare biologically equivalent, not identical, time points.</a:t>
+            <p:ph type="body" idx="1"/>
+          </p:nvPr>
+        </p:nvSpPr>
+        <p:spPr/>
+        <p:txBody>
+          <a:bodyPr/>
+          <a:lstStyle/>
+          <a:p>
+            <a:pPr lvl="0" indent="0" marL="0">
+              <a:buNone/>
+            </a:pPr>
+            <a:r>
+              <a:rPr/>
+              <a:t>Fourth result: why individual genes diverge. Coding-sequence constraint and trans-regulatory availability reduce expression divergence, while enhancer multiplicity and CRE turnover increase it. The association is small in magnitude but highly significant, and it is directional: sequence constraint ↔ stability; regulatory plasticity ↔ divergence.</a:t>
             </a:r>
           </a:p>
         </p:txBody>
@@ -873,21 +960,29 @@
             <a:spLocks noGrp="1"/>
           </p:cNvSpPr>
           <p:nvPr>
-            <p:ph type="sldNum" idx="5" sz="quarter"/>
-          </p:nvPr>
-        </p:nvSpPr>
-        <p:spPr/>
+            <p:ph type="sldNum" sz="quarter" idx="10"/>
+          </p:nvPr>
+        </p:nvSpPr>
+        <p:spPr/>
+        <p:txBody>
+          <a:bodyPr/>
+          <a:lstStyle/>
+          <a:p>
+            <a:fld id="{18BDFEC3-8487-43E8-A154-7C12CBC1FFF2}" type="slidenum">
+              <a:rPr lang="en-US"/>
+              <a:t>9</a:t>
+            </a:fld>
+            <a:endParaRPr lang="en-US"/>
+          </a:p>
+        </p:txBody>
       </p:sp>
     </p:spTree>
   </p:cSld>
-  <p:clrMapOvr>
-    <a:masterClrMapping/>
-  </p:clrMapOvr>
 </p:notes>
 </file>
 
-<file path=ppt/notesSlides/notesSlide6.xml><?xml version="1.0" encoding="utf-8"?>
-<p:notes xmlns:a="http://schemas.openxmlformats.org/drawingml/2006/main" xmlns:p="http://schemas.openxmlformats.org/presentationml/2006/main" xmlns:r="http://schemas.openxmlformats.org/officeDocument/2006/relationships">
+<file path=ppt/notesSlides/notesSlide7.xml><?xml version="1.0" encoding="utf-8"?>
+<p:notes xmlns:a="http://schemas.openxmlformats.org/drawingml/2006/main" xmlns:r="http://schemas.openxmlformats.org/officeDocument/2006/relationships" xmlns:p="http://schemas.openxmlformats.org/presentationml/2006/main">
   <p:cSld>
     <p:spTree>
       <p:nvGrpSpPr>
@@ -907,10 +1002,10 @@
         <p:nvSpPr>
           <p:cNvPr id="2" name="Slide Image Placeholder 1"/>
           <p:cNvSpPr>
-            <a:spLocks noGrp="1"/>
-          </p:cNvSpPr>
-          <p:nvPr>
-            <p:ph type="sldImg" idx="2"/>
+            <a:spLocks noGrp="1" noRot="1" noChangeAspect="1"/>
+          </p:cNvSpPr>
+          <p:nvPr>
+            <p:ph type="sldImg"/>
           </p:nvPr>
         </p:nvSpPr>
         <p:spPr/>
@@ -922,16 +1017,20 @@
             <a:spLocks noGrp="1"/>
           </p:cNvSpPr>
           <p:nvPr>
-            <p:ph type="body" idx="3" sz="quarter"/>
-          </p:nvPr>
-        </p:nvSpPr>
-        <p:spPr/>
-        <p:txBody>
-          <a:bodyPr/>
-          <a:lstStyle/>
-          <a:p>
-            <a:r>
-              <a:t>Third result: prediction. Mouse signatures classify the direction of human gene regulation, but module-level models clearly beat gene-level ones — 0.84–0.98 ROC-AUC versus 0.64–0.74 — and both beat the DMD negative control (0.48–0.61). Downregulation is easier to predict than upregulation at early time points.</a:t>
+            <p:ph type="body" idx="1"/>
+          </p:nvPr>
+        </p:nvSpPr>
+        <p:spPr/>
+        <p:txBody>
+          <a:bodyPr/>
+          <a:lstStyle/>
+          <a:p>
+            <a:pPr lvl="0" indent="0" marL="0">
+              <a:buNone/>
+            </a:pPr>
+            <a:r>
+              <a:rPr/>
+              <a:t>Fifth result: the multilayer model. Mouse rank and direction alone do not transfer at all — R² = 0.001 and ROC-AUC 0.511. Adding the biological layers raises the random forest to R² = 0.234 for human rank and 0.849 for directional concordance. Shared-LEG classification stays hard; the lasso is only marginally best there (0.617/0.627). Everything is evaluated by leave-one-condition-out cross-validation, so every gene is scored by a model that never saw its pathogen.</a:t>
             </a:r>
           </a:p>
         </p:txBody>
@@ -943,21 +1042,29 @@
             <a:spLocks noGrp="1"/>
           </p:cNvSpPr>
           <p:nvPr>
-            <p:ph type="sldNum" idx="5" sz="quarter"/>
-          </p:nvPr>
-        </p:nvSpPr>
-        <p:spPr/>
+            <p:ph type="sldNum" sz="quarter" idx="10"/>
+          </p:nvPr>
+        </p:nvSpPr>
+        <p:spPr/>
+        <p:txBody>
+          <a:bodyPr/>
+          <a:lstStyle/>
+          <a:p>
+            <a:fld id="{18BDFEC3-8487-43E8-A154-7C12CBC1FFF2}" type="slidenum">
+              <a:rPr lang="en-US"/>
+              <a:t>10</a:t>
+            </a:fld>
+            <a:endParaRPr lang="en-US"/>
+          </a:p>
+        </p:txBody>
       </p:sp>
     </p:spTree>
   </p:cSld>
-  <p:clrMapOvr>
-    <a:masterClrMapping/>
-  </p:clrMapOvr>
 </p:notes>
 </file>
 
-<file path=ppt/notesSlides/notesSlide7.xml><?xml version="1.0" encoding="utf-8"?>
-<p:notes xmlns:a="http://schemas.openxmlformats.org/drawingml/2006/main" xmlns:p="http://schemas.openxmlformats.org/presentationml/2006/main" xmlns:r="http://schemas.openxmlformats.org/officeDocument/2006/relationships">
+<file path=ppt/notesSlides/notesSlide8.xml><?xml version="1.0" encoding="utf-8"?>
+<p:notes xmlns:a="http://schemas.openxmlformats.org/drawingml/2006/main" xmlns:r="http://schemas.openxmlformats.org/officeDocument/2006/relationships" xmlns:p="http://schemas.openxmlformats.org/presentationml/2006/main">
   <p:cSld>
     <p:spTree>
       <p:nvGrpSpPr>
@@ -977,10 +1084,10 @@
         <p:nvSpPr>
           <p:cNvPr id="2" name="Slide Image Placeholder 1"/>
           <p:cNvSpPr>
-            <a:spLocks noGrp="1"/>
-          </p:cNvSpPr>
-          <p:nvPr>
-            <p:ph type="sldImg" idx="2"/>
+            <a:spLocks noGrp="1" noRot="1" noChangeAspect="1"/>
+          </p:cNvSpPr>
+          <p:nvPr>
+            <p:ph type="sldImg"/>
           </p:nvPr>
         </p:nvSpPr>
         <p:spPr/>
@@ -992,16 +1099,20 @@
             <a:spLocks noGrp="1"/>
           </p:cNvSpPr>
           <p:nvPr>
-            <p:ph type="body" idx="3" sz="quarter"/>
-          </p:nvPr>
-        </p:nvSpPr>
-        <p:spPr/>
-        <p:txBody>
-          <a:bodyPr/>
-          <a:lstStyle/>
-          <a:p>
-            <a:r>
-              <a:t>Fourth result: why individual genes diverge. Coding-sequence constraint and trans-regulatory availability reduce expression divergence, while enhancer multiplicity and CRE turnover increase it. The association is small in magnitude but highly significant, and it is directional: sequence constraint ↔ stability; regulatory plasticity ↔ divergence.</a:t>
+            <p:ph type="body" idx="1"/>
+          </p:nvPr>
+        </p:nvSpPr>
+        <p:spPr/>
+        <p:txBody>
+          <a:bodyPr/>
+          <a:lstStyle/>
+          <a:p>
+            <a:pPr lvl="0" indent="0" marL="0">
+              <a:buNone/>
+            </a:pPr>
+            <a:r>
+              <a:rPr/>
+              <a:t>Take-aways: translatability is not a fixed property of the mouse; it is a function of granularity, stimulus intensity and temporal alignment. The model outputs four complementary scores that can be used to prioritise genes. Be honest about the limitations: small murine cohorts, two inbred strains, single-dose vaccines, blood only, and one-to-one orthologs only.</a:t>
             </a:r>
           </a:p>
         </p:txBody>
@@ -1013,21 +1124,29 @@
             <a:spLocks noGrp="1"/>
           </p:cNvSpPr>
           <p:nvPr>
-            <p:ph type="sldNum" idx="5" sz="quarter"/>
-          </p:nvPr>
-        </p:nvSpPr>
-        <p:spPr/>
+            <p:ph type="sldNum" sz="quarter" idx="10"/>
+          </p:nvPr>
+        </p:nvSpPr>
+        <p:spPr/>
+        <p:txBody>
+          <a:bodyPr/>
+          <a:lstStyle/>
+          <a:p>
+            <a:fld id="{18BDFEC3-8487-43E8-A154-7C12CBC1FFF2}" type="slidenum">
+              <a:rPr lang="en-US"/>
+              <a:t>12</a:t>
+            </a:fld>
+            <a:endParaRPr lang="en-US"/>
+          </a:p>
+        </p:txBody>
       </p:sp>
     </p:spTree>
   </p:cSld>
-  <p:clrMapOvr>
-    <a:masterClrMapping/>
-  </p:clrMapOvr>
 </p:notes>
 </file>
 
-<file path=ppt/notesSlides/notesSlide8.xml><?xml version="1.0" encoding="utf-8"?>
-<p:notes xmlns:a="http://schemas.openxmlformats.org/drawingml/2006/main" xmlns:p="http://schemas.openxmlformats.org/presentationml/2006/main" xmlns:r="http://schemas.openxmlformats.org/officeDocument/2006/relationships">
+<file path=ppt/notesSlides/notesSlide9.xml><?xml version="1.0" encoding="utf-8"?>
+<p:notes xmlns:a="http://schemas.openxmlformats.org/drawingml/2006/main" xmlns:r="http://schemas.openxmlformats.org/officeDocument/2006/relationships" xmlns:p="http://schemas.openxmlformats.org/presentationml/2006/main">
   <p:cSld>
     <p:spTree>
       <p:nvGrpSpPr>
@@ -1047,10 +1166,10 @@
         <p:nvSpPr>
           <p:cNvPr id="2" name="Slide Image Placeholder 1"/>
           <p:cNvSpPr>
-            <a:spLocks noGrp="1"/>
-          </p:cNvSpPr>
-          <p:nvPr>
-            <p:ph type="sldImg" idx="2"/>
+            <a:spLocks noGrp="1" noRot="1" noChangeAspect="1"/>
+          </p:cNvSpPr>
+          <p:nvPr>
+            <p:ph type="sldImg"/>
           </p:nvPr>
         </p:nvSpPr>
         <p:spPr/>
@@ -1062,16 +1181,20 @@
             <a:spLocks noGrp="1"/>
           </p:cNvSpPr>
           <p:nvPr>
-            <p:ph type="body" idx="3" sz="quarter"/>
-          </p:nvPr>
-        </p:nvSpPr>
-        <p:spPr/>
-        <p:txBody>
-          <a:bodyPr/>
-          <a:lstStyle/>
-          <a:p>
-            <a:r>
-              <a:t>Fifth result: the multilayer model. Mouse rank and direction alone do not transfer at all — R² = 0.001 and ROC-AUC 0.511. Adding the biological layers raises the random forest to R² = 0.234 for human rank and 0.849 for directional concordance. Shared-LEG classification stays hard; the lasso is only marginally best there (0.617/0.627). Everything is evaluated by leave-one-condition-out cross-validation, so every gene is scored by a model that never saw its pathogen.</a:t>
+            <p:ph type="body" idx="1"/>
+          </p:nvPr>
+        </p:nvSpPr>
+        <p:spPr/>
+        <p:txBody>
+          <a:bodyPr/>
+          <a:lstStyle/>
+          <a:p>
+            <a:pPr lvl="0" indent="0" marL="0">
+              <a:buNone/>
+            </a:pPr>
+            <a:r>
+              <a:rPr/>
+              <a:t>Close by pointing to the deliverables: the full open-source pipeline, the project site that documents the methodology and the notebook map, and the step-by-step notebook that applies the trained models to a new mouse dataset — runnable in the browser via Binder. Everything is open so the community can audit and retrain.</a:t>
             </a:r>
           </a:p>
         </p:txBody>
@@ -1083,86 +1206,24 @@
             <a:spLocks noGrp="1"/>
           </p:cNvSpPr>
           <p:nvPr>
-            <p:ph type="sldNum" idx="5" sz="quarter"/>
-          </p:nvPr>
-        </p:nvSpPr>
-        <p:spPr/>
+            <p:ph type="sldNum" sz="quarter" idx="10"/>
+          </p:nvPr>
+        </p:nvSpPr>
+        <p:spPr/>
+        <p:txBody>
+          <a:bodyPr/>
+          <a:lstStyle/>
+          <a:p>
+            <a:fld id="{18BDFEC3-8487-43E8-A154-7C12CBC1FFF2}" type="slidenum">
+              <a:rPr lang="en-US"/>
+              <a:t>15</a:t>
+            </a:fld>
+            <a:endParaRPr lang="en-US"/>
+          </a:p>
+        </p:txBody>
       </p:sp>
     </p:spTree>
   </p:cSld>
-  <p:clrMapOvr>
-    <a:masterClrMapping/>
-  </p:clrMapOvr>
-</p:notes>
-</file>
-
-<file path=ppt/notesSlides/notesSlide9.xml><?xml version="1.0" encoding="utf-8"?>
-<p:notes xmlns:a="http://schemas.openxmlformats.org/drawingml/2006/main" xmlns:p="http://schemas.openxmlformats.org/presentationml/2006/main" xmlns:r="http://schemas.openxmlformats.org/officeDocument/2006/relationships">
-  <p:cSld>
-    <p:spTree>
-      <p:nvGrpSpPr>
-        <p:cNvPr id="1" name=""/>
-        <p:cNvGrpSpPr/>
-        <p:nvPr/>
-      </p:nvGrpSpPr>
-      <p:grpSpPr>
-        <a:xfrm>
-          <a:off x="0" y="0"/>
-          <a:ext cx="0" cy="0"/>
-          <a:chOff x="0" y="0"/>
-          <a:chExt cx="0" cy="0"/>
-        </a:xfrm>
-      </p:grpSpPr>
-      <p:sp>
-        <p:nvSpPr>
-          <p:cNvPr id="2" name="Slide Image Placeholder 1"/>
-          <p:cNvSpPr>
-            <a:spLocks noGrp="1"/>
-          </p:cNvSpPr>
-          <p:nvPr>
-            <p:ph type="sldImg" idx="2"/>
-          </p:nvPr>
-        </p:nvSpPr>
-        <p:spPr/>
-      </p:sp>
-      <p:sp>
-        <p:nvSpPr>
-          <p:cNvPr id="3" name="Notes Placeholder 2"/>
-          <p:cNvSpPr>
-            <a:spLocks noGrp="1"/>
-          </p:cNvSpPr>
-          <p:nvPr>
-            <p:ph type="body" idx="3" sz="quarter"/>
-          </p:nvPr>
-        </p:nvSpPr>
-        <p:spPr/>
-        <p:txBody>
-          <a:bodyPr/>
-          <a:lstStyle/>
-          <a:p>
-            <a:r>
-              <a:t>Take-aways: translatability is not a fixed property of the mouse; it is a function of granularity, stimulus intensity and temporal alignment. The model outputs four complementary scores that can be used to prioritise genes. Be honest about the limitations: small murine cohorts, two inbred strains, single-dose vaccines, blood only, and one-to-one orthologs only.</a:t>
-            </a:r>
-          </a:p>
-        </p:txBody>
-      </p:sp>
-      <p:sp>
-        <p:nvSpPr>
-          <p:cNvPr id="4" name="Slide Number Placeholder 3"/>
-          <p:cNvSpPr>
-            <a:spLocks noGrp="1"/>
-          </p:cNvSpPr>
-          <p:nvPr>
-            <p:ph type="sldNum" idx="5" sz="quarter"/>
-          </p:nvPr>
-        </p:nvSpPr>
-        <p:spPr/>
-      </p:sp>
-    </p:spTree>
-  </p:cSld>
-  <p:clrMapOvr>
-    <a:masterClrMapping/>
-  </p:clrMapOvr>
 </p:notes>
 </file>
 
@@ -1195,8 +1256,8 @@
         </p:nvSpPr>
         <p:spPr>
           <a:xfrm>
-            <a:off x="685800" y="2130425"/>
-            <a:ext cx="7772400" cy="1470025"/>
+            <a:off x="685800" y="1597819"/>
+            <a:ext cx="7772400" cy="1102519"/>
           </a:xfrm>
         </p:spPr>
         <p:txBody>
@@ -1204,10 +1265,9 @@
           <a:lstStyle/>
           <a:p>
             <a:r>
-              <a:rPr lang="en-US" smtClean="0"/>
+              <a:rPr lang="en-US"/>
               <a:t>Click to edit Master title style</a:t>
             </a:r>
-            <a:endParaRPr lang="en-US"/>
           </a:p>
         </p:txBody>
       </p:sp>
@@ -1223,8 +1283,8 @@
         </p:nvSpPr>
         <p:spPr>
           <a:xfrm>
-            <a:off x="1371600" y="3886200"/>
-            <a:ext cx="6400800" cy="1752600"/>
+            <a:off x="1371600" y="2914650"/>
+            <a:ext cx="6400800" cy="1314450"/>
           </a:xfrm>
         </p:spPr>
         <p:txBody>
@@ -1240,7 +1300,7 @@
                 </a:solidFill>
               </a:defRPr>
             </a:lvl1pPr>
-            <a:lvl2pPr marL="457200" indent="0" algn="ctr">
+            <a:lvl2pPr marL="342900" indent="0" algn="ctr">
               <a:buNone/>
               <a:defRPr>
                 <a:solidFill>
@@ -1250,7 +1310,7 @@
                 </a:solidFill>
               </a:defRPr>
             </a:lvl2pPr>
-            <a:lvl3pPr marL="914400" indent="0" algn="ctr">
+            <a:lvl3pPr marL="685800" indent="0" algn="ctr">
               <a:buNone/>
               <a:defRPr>
                 <a:solidFill>
@@ -1260,7 +1320,7 @@
                 </a:solidFill>
               </a:defRPr>
             </a:lvl3pPr>
-            <a:lvl4pPr marL="1371600" indent="0" algn="ctr">
+            <a:lvl4pPr marL="1028700" indent="0" algn="ctr">
               <a:buNone/>
               <a:defRPr>
                 <a:solidFill>
@@ -1270,7 +1330,7 @@
                 </a:solidFill>
               </a:defRPr>
             </a:lvl4pPr>
-            <a:lvl5pPr marL="1828800" indent="0" algn="ctr">
+            <a:lvl5pPr marL="1371600" indent="0" algn="ctr">
               <a:buNone/>
               <a:defRPr>
                 <a:solidFill>
@@ -1280,7 +1340,7 @@
                 </a:solidFill>
               </a:defRPr>
             </a:lvl5pPr>
-            <a:lvl6pPr marL="2286000" indent="0" algn="ctr">
+            <a:lvl6pPr marL="1714500" indent="0" algn="ctr">
               <a:buNone/>
               <a:defRPr>
                 <a:solidFill>
@@ -1290,7 +1350,7 @@
                 </a:solidFill>
               </a:defRPr>
             </a:lvl6pPr>
-            <a:lvl7pPr marL="2743200" indent="0" algn="ctr">
+            <a:lvl7pPr marL="2057400" indent="0" algn="ctr">
               <a:buNone/>
               <a:defRPr>
                 <a:solidFill>
@@ -1300,7 +1360,7 @@
                 </a:solidFill>
               </a:defRPr>
             </a:lvl7pPr>
-            <a:lvl8pPr marL="3200400" indent="0" algn="ctr">
+            <a:lvl8pPr marL="2400300" indent="0" algn="ctr">
               <a:buNone/>
               <a:defRPr>
                 <a:solidFill>
@@ -1310,7 +1370,7 @@
                 </a:solidFill>
               </a:defRPr>
             </a:lvl8pPr>
-            <a:lvl9pPr marL="3657600" indent="0" algn="ctr">
+            <a:lvl9pPr marL="2743200" indent="0" algn="ctr">
               <a:buNone/>
               <a:defRPr>
                 <a:solidFill>
@@ -1323,31 +1383,30 @@
           </a:lstStyle>
           <a:p>
             <a:r>
+              <a:rPr lang="en-US"/>
+              <a:t>Click to edit Master subtitle style</a:t>
+            </a:r>
+          </a:p>
+        </p:txBody>
+      </p:sp>
+      <p:sp>
+        <p:nvSpPr>
+          <p:cNvPr id="4" name="Date Placeholder 3"/>
+          <p:cNvSpPr>
+            <a:spLocks noGrp="1"/>
+          </p:cNvSpPr>
+          <p:nvPr>
+            <p:ph type="dt" sz="half" idx="10"/>
+          </p:nvPr>
+        </p:nvSpPr>
+        <p:spPr/>
+        <p:txBody>
+          <a:bodyPr/>
+          <a:lstStyle/>
+          <a:p>
+            <a:fld id="{241EB5C9-1307-BA42-ABA2-0BC069CD8E7F}" type="datetimeFigureOut">
               <a:rPr lang="en-US" smtClean="0"/>
-              <a:t>Click to edit Master subtitle style</a:t>
-            </a:r>
-            <a:endParaRPr lang="en-US"/>
-          </a:p>
-        </p:txBody>
-      </p:sp>
-      <p:sp>
-        <p:nvSpPr>
-          <p:cNvPr id="4" name="Date Placeholder 3"/>
-          <p:cNvSpPr>
-            <a:spLocks noGrp="1"/>
-          </p:cNvSpPr>
-          <p:nvPr>
-            <p:ph type="dt" sz="half" idx="10"/>
-          </p:nvPr>
-        </p:nvSpPr>
-        <p:spPr/>
-        <p:txBody>
-          <a:bodyPr/>
-          <a:lstStyle/>
-          <a:p>
-            <a:fld id="{5BCAD085-E8A6-8845-BD4E-CB4CCA059FC4}" type="datetimeFigureOut">
-              <a:rPr lang="en-US" smtClean="0"/>
-              <a:t>1/27/13</a:t>
+              <a:t>1/2/22</a:t>
             </a:fld>
             <a:endParaRPr lang="en-US"/>
           </a:p>
@@ -1387,7 +1446,7 @@
           <a:bodyPr/>
           <a:lstStyle/>
           <a:p>
-            <a:fld id="{C1FF6DA9-008F-8B48-92A6-B652298478BF}" type="slidenum">
+            <a:fld id="{C5EF2332-01BF-834F-8236-50238282D533}" type="slidenum">
               <a:rPr lang="en-US" smtClean="0"/>
               <a:t>‹#›</a:t>
             </a:fld>
@@ -1398,7 +1457,7 @@
     </p:spTree>
     <p:extLst>
       <p:ext uri="{BB962C8B-B14F-4D97-AF65-F5344CB8AC3E}">
-        <p14:creationId xmlns:p14="http://schemas.microsoft.com/office/powerpoint/2010/main" val="3168075583"/>
+        <p14:creationId xmlns:p14="http://schemas.microsoft.com/office/powerpoint/2010/main" val="1444357513"/>
       </p:ext>
     </p:extLst>
   </p:cSld>
@@ -1441,83 +1500,81 @@
           <a:lstStyle/>
           <a:p>
             <a:r>
+              <a:rPr lang="en-US"/>
+              <a:t>Click to edit Master title style</a:t>
+            </a:r>
+          </a:p>
+        </p:txBody>
+      </p:sp>
+      <p:sp>
+        <p:nvSpPr>
+          <p:cNvPr id="3" name="Vertical Text Placeholder 2"/>
+          <p:cNvSpPr>
+            <a:spLocks noGrp="1"/>
+          </p:cNvSpPr>
+          <p:nvPr>
+            <p:ph type="body" orient="vert" idx="1"/>
+          </p:nvPr>
+        </p:nvSpPr>
+        <p:spPr/>
+        <p:txBody>
+          <a:bodyPr vert="eaVert"/>
+          <a:lstStyle/>
+          <a:p>
+            <a:pPr lvl="0"/>
+            <a:r>
+              <a:rPr lang="en-US"/>
+              <a:t>Click to edit Master text styles</a:t>
+            </a:r>
+          </a:p>
+          <a:p>
+            <a:pPr lvl="1"/>
+            <a:r>
+              <a:rPr lang="en-US"/>
+              <a:t>Second level</a:t>
+            </a:r>
+          </a:p>
+          <a:p>
+            <a:pPr lvl="2"/>
+            <a:r>
+              <a:rPr lang="en-US"/>
+              <a:t>Third level</a:t>
+            </a:r>
+          </a:p>
+          <a:p>
+            <a:pPr lvl="3"/>
+            <a:r>
+              <a:rPr lang="en-US"/>
+              <a:t>Fourth level</a:t>
+            </a:r>
+          </a:p>
+          <a:p>
+            <a:pPr lvl="4"/>
+            <a:r>
+              <a:rPr lang="en-US"/>
+              <a:t>Fifth level</a:t>
+            </a:r>
+          </a:p>
+        </p:txBody>
+      </p:sp>
+      <p:sp>
+        <p:nvSpPr>
+          <p:cNvPr id="4" name="Date Placeholder 3"/>
+          <p:cNvSpPr>
+            <a:spLocks noGrp="1"/>
+          </p:cNvSpPr>
+          <p:nvPr>
+            <p:ph type="dt" sz="half" idx="10"/>
+          </p:nvPr>
+        </p:nvSpPr>
+        <p:spPr/>
+        <p:txBody>
+          <a:bodyPr/>
+          <a:lstStyle/>
+          <a:p>
+            <a:fld id="{241EB5C9-1307-BA42-ABA2-0BC069CD8E7F}" type="datetimeFigureOut">
               <a:rPr lang="en-US" smtClean="0"/>
-              <a:t>Click to edit Master title style</a:t>
-            </a:r>
-            <a:endParaRPr lang="en-US"/>
-          </a:p>
-        </p:txBody>
-      </p:sp>
-      <p:sp>
-        <p:nvSpPr>
-          <p:cNvPr id="3" name="Vertical Text Placeholder 2"/>
-          <p:cNvSpPr>
-            <a:spLocks noGrp="1"/>
-          </p:cNvSpPr>
-          <p:nvPr>
-            <p:ph type="body" orient="vert" idx="1"/>
-          </p:nvPr>
-        </p:nvSpPr>
-        <p:spPr/>
-        <p:txBody>
-          <a:bodyPr vert="eaVert"/>
-          <a:lstStyle/>
-          <a:p>
-            <a:pPr lvl="0"/>
-            <a:r>
-              <a:rPr lang="en-US" smtClean="0"/>
-              <a:t>Click to edit Master text styles</a:t>
-            </a:r>
-          </a:p>
-          <a:p>
-            <a:pPr lvl="1"/>
-            <a:r>
-              <a:rPr lang="en-US" smtClean="0"/>
-              <a:t>Second level</a:t>
-            </a:r>
-          </a:p>
-          <a:p>
-            <a:pPr lvl="2"/>
-            <a:r>
-              <a:rPr lang="en-US" smtClean="0"/>
-              <a:t>Third level</a:t>
-            </a:r>
-          </a:p>
-          <a:p>
-            <a:pPr lvl="3"/>
-            <a:r>
-              <a:rPr lang="en-US" smtClean="0"/>
-              <a:t>Fourth level</a:t>
-            </a:r>
-          </a:p>
-          <a:p>
-            <a:pPr lvl="4"/>
-            <a:r>
-              <a:rPr lang="en-US" smtClean="0"/>
-              <a:t>Fifth level</a:t>
-            </a:r>
-            <a:endParaRPr lang="en-US"/>
-          </a:p>
-        </p:txBody>
-      </p:sp>
-      <p:sp>
-        <p:nvSpPr>
-          <p:cNvPr id="4" name="Date Placeholder 3"/>
-          <p:cNvSpPr>
-            <a:spLocks noGrp="1"/>
-          </p:cNvSpPr>
-          <p:nvPr>
-            <p:ph type="dt" sz="half" idx="10"/>
-          </p:nvPr>
-        </p:nvSpPr>
-        <p:spPr/>
-        <p:txBody>
-          <a:bodyPr/>
-          <a:lstStyle/>
-          <a:p>
-            <a:fld id="{5BCAD085-E8A6-8845-BD4E-CB4CCA059FC4}" type="datetimeFigureOut">
-              <a:rPr lang="en-US" smtClean="0"/>
-              <a:t>1/27/13</a:t>
+              <a:t>1/2/22</a:t>
             </a:fld>
             <a:endParaRPr lang="en-US"/>
           </a:p>
@@ -1557,7 +1614,7 @@
           <a:bodyPr/>
           <a:lstStyle/>
           <a:p>
-            <a:fld id="{C1FF6DA9-008F-8B48-92A6-B652298478BF}" type="slidenum">
+            <a:fld id="{C5EF2332-01BF-834F-8236-50238282D533}" type="slidenum">
               <a:rPr lang="en-US" smtClean="0"/>
               <a:t>‹#›</a:t>
             </a:fld>
@@ -1568,7 +1625,7 @@
     </p:spTree>
     <p:extLst>
       <p:ext uri="{BB962C8B-B14F-4D97-AF65-F5344CB8AC3E}">
-        <p14:creationId xmlns:p14="http://schemas.microsoft.com/office/powerpoint/2010/main" val="2910927964"/>
+        <p14:creationId xmlns:p14="http://schemas.microsoft.com/office/powerpoint/2010/main" val="313914798"/>
       </p:ext>
     </p:extLst>
   </p:cSld>
@@ -1607,8 +1664,8 @@
         </p:nvSpPr>
         <p:spPr>
           <a:xfrm>
-            <a:off x="6629400" y="274638"/>
-            <a:ext cx="2057400" cy="5851525"/>
+            <a:off x="6629400" y="205979"/>
+            <a:ext cx="2057400" cy="4388644"/>
           </a:xfrm>
         </p:spPr>
         <p:txBody>
@@ -1616,10 +1673,9 @@
           <a:lstStyle/>
           <a:p>
             <a:r>
-              <a:rPr lang="en-US" smtClean="0"/>
+              <a:rPr lang="en-US"/>
               <a:t>Click to edit Master title style</a:t>
             </a:r>
-            <a:endParaRPr lang="en-US"/>
           </a:p>
         </p:txBody>
       </p:sp>
@@ -1635,8 +1691,8 @@
         </p:nvSpPr>
         <p:spPr>
           <a:xfrm>
-            <a:off x="457200" y="274638"/>
-            <a:ext cx="6019800" cy="5851525"/>
+            <a:off x="457200" y="205979"/>
+            <a:ext cx="6019800" cy="4388644"/>
           </a:xfrm>
         </p:spPr>
         <p:txBody>
@@ -1645,59 +1701,58 @@
           <a:p>
             <a:pPr lvl="0"/>
             <a:r>
+              <a:rPr lang="en-US"/>
+              <a:t>Click to edit Master text styles</a:t>
+            </a:r>
+          </a:p>
+          <a:p>
+            <a:pPr lvl="1"/>
+            <a:r>
+              <a:rPr lang="en-US"/>
+              <a:t>Second level</a:t>
+            </a:r>
+          </a:p>
+          <a:p>
+            <a:pPr lvl="2"/>
+            <a:r>
+              <a:rPr lang="en-US"/>
+              <a:t>Third level</a:t>
+            </a:r>
+          </a:p>
+          <a:p>
+            <a:pPr lvl="3"/>
+            <a:r>
+              <a:rPr lang="en-US"/>
+              <a:t>Fourth level</a:t>
+            </a:r>
+          </a:p>
+          <a:p>
+            <a:pPr lvl="4"/>
+            <a:r>
+              <a:rPr lang="en-US"/>
+              <a:t>Fifth level</a:t>
+            </a:r>
+          </a:p>
+        </p:txBody>
+      </p:sp>
+      <p:sp>
+        <p:nvSpPr>
+          <p:cNvPr id="4" name="Date Placeholder 3"/>
+          <p:cNvSpPr>
+            <a:spLocks noGrp="1"/>
+          </p:cNvSpPr>
+          <p:nvPr>
+            <p:ph type="dt" sz="half" idx="10"/>
+          </p:nvPr>
+        </p:nvSpPr>
+        <p:spPr/>
+        <p:txBody>
+          <a:bodyPr/>
+          <a:lstStyle/>
+          <a:p>
+            <a:fld id="{241EB5C9-1307-BA42-ABA2-0BC069CD8E7F}" type="datetimeFigureOut">
               <a:rPr lang="en-US" smtClean="0"/>
-              <a:t>Click to edit Master text styles</a:t>
-            </a:r>
-          </a:p>
-          <a:p>
-            <a:pPr lvl="1"/>
-            <a:r>
-              <a:rPr lang="en-US" smtClean="0"/>
-              <a:t>Second level</a:t>
-            </a:r>
-          </a:p>
-          <a:p>
-            <a:pPr lvl="2"/>
-            <a:r>
-              <a:rPr lang="en-US" smtClean="0"/>
-              <a:t>Third level</a:t>
-            </a:r>
-          </a:p>
-          <a:p>
-            <a:pPr lvl="3"/>
-            <a:r>
-              <a:rPr lang="en-US" smtClean="0"/>
-              <a:t>Fourth level</a:t>
-            </a:r>
-          </a:p>
-          <a:p>
-            <a:pPr lvl="4"/>
-            <a:r>
-              <a:rPr lang="en-US" smtClean="0"/>
-              <a:t>Fifth level</a:t>
-            </a:r>
-            <a:endParaRPr lang="en-US"/>
-          </a:p>
-        </p:txBody>
-      </p:sp>
-      <p:sp>
-        <p:nvSpPr>
-          <p:cNvPr id="4" name="Date Placeholder 3"/>
-          <p:cNvSpPr>
-            <a:spLocks noGrp="1"/>
-          </p:cNvSpPr>
-          <p:nvPr>
-            <p:ph type="dt" sz="half" idx="10"/>
-          </p:nvPr>
-        </p:nvSpPr>
-        <p:spPr/>
-        <p:txBody>
-          <a:bodyPr/>
-          <a:lstStyle/>
-          <a:p>
-            <a:fld id="{5BCAD085-E8A6-8845-BD4E-CB4CCA059FC4}" type="datetimeFigureOut">
-              <a:rPr lang="en-US" smtClean="0"/>
-              <a:t>1/27/13</a:t>
+              <a:t>1/2/22</a:t>
             </a:fld>
             <a:endParaRPr lang="en-US"/>
           </a:p>
@@ -1737,7 +1792,7 @@
           <a:bodyPr/>
           <a:lstStyle/>
           <a:p>
-            <a:fld id="{C1FF6DA9-008F-8B48-92A6-B652298478BF}" type="slidenum">
+            <a:fld id="{C5EF2332-01BF-834F-8236-50238282D533}" type="slidenum">
               <a:rPr lang="en-US" smtClean="0"/>
               <a:t>‹#›</a:t>
             </a:fld>
@@ -1748,7 +1803,7 @@
     </p:spTree>
     <p:extLst>
       <p:ext uri="{BB962C8B-B14F-4D97-AF65-F5344CB8AC3E}">
-        <p14:creationId xmlns:p14="http://schemas.microsoft.com/office/powerpoint/2010/main" val="3612223792"/>
+        <p14:creationId xmlns:p14="http://schemas.microsoft.com/office/powerpoint/2010/main" val="2581529045"/>
       </p:ext>
     </p:extLst>
   </p:cSld>
@@ -1791,83 +1846,81 @@
           <a:lstStyle/>
           <a:p>
             <a:r>
+              <a:rPr lang="en-US"/>
+              <a:t>Click to edit Master title style</a:t>
+            </a:r>
+          </a:p>
+        </p:txBody>
+      </p:sp>
+      <p:sp>
+        <p:nvSpPr>
+          <p:cNvPr id="3" name="Content Placeholder 2"/>
+          <p:cNvSpPr>
+            <a:spLocks noGrp="1"/>
+          </p:cNvSpPr>
+          <p:nvPr>
+            <p:ph idx="1"/>
+          </p:nvPr>
+        </p:nvSpPr>
+        <p:spPr/>
+        <p:txBody>
+          <a:bodyPr/>
+          <a:lstStyle/>
+          <a:p>
+            <a:pPr lvl="0"/>
+            <a:r>
+              <a:rPr lang="en-US"/>
+              <a:t>Click to edit Master text styles</a:t>
+            </a:r>
+          </a:p>
+          <a:p>
+            <a:pPr lvl="1"/>
+            <a:r>
+              <a:rPr lang="en-US"/>
+              <a:t>Second level</a:t>
+            </a:r>
+          </a:p>
+          <a:p>
+            <a:pPr lvl="2"/>
+            <a:r>
+              <a:rPr lang="en-US"/>
+              <a:t>Third level</a:t>
+            </a:r>
+          </a:p>
+          <a:p>
+            <a:pPr lvl="3"/>
+            <a:r>
+              <a:rPr lang="en-US"/>
+              <a:t>Fourth level</a:t>
+            </a:r>
+          </a:p>
+          <a:p>
+            <a:pPr lvl="4"/>
+            <a:r>
+              <a:rPr lang="en-US"/>
+              <a:t>Fifth level</a:t>
+            </a:r>
+          </a:p>
+        </p:txBody>
+      </p:sp>
+      <p:sp>
+        <p:nvSpPr>
+          <p:cNvPr id="4" name="Date Placeholder 3"/>
+          <p:cNvSpPr>
+            <a:spLocks noGrp="1"/>
+          </p:cNvSpPr>
+          <p:nvPr>
+            <p:ph type="dt" sz="half" idx="10"/>
+          </p:nvPr>
+        </p:nvSpPr>
+        <p:spPr/>
+        <p:txBody>
+          <a:bodyPr/>
+          <a:lstStyle/>
+          <a:p>
+            <a:fld id="{241EB5C9-1307-BA42-ABA2-0BC069CD8E7F}" type="datetimeFigureOut">
               <a:rPr lang="en-US" smtClean="0"/>
-              <a:t>Click to edit Master title style</a:t>
-            </a:r>
-            <a:endParaRPr lang="en-US"/>
-          </a:p>
-        </p:txBody>
-      </p:sp>
-      <p:sp>
-        <p:nvSpPr>
-          <p:cNvPr id="3" name="Content Placeholder 2"/>
-          <p:cNvSpPr>
-            <a:spLocks noGrp="1"/>
-          </p:cNvSpPr>
-          <p:nvPr>
-            <p:ph idx="1"/>
-          </p:nvPr>
-        </p:nvSpPr>
-        <p:spPr/>
-        <p:txBody>
-          <a:bodyPr/>
-          <a:lstStyle/>
-          <a:p>
-            <a:pPr lvl="0"/>
-            <a:r>
-              <a:rPr lang="en-US" smtClean="0"/>
-              <a:t>Click to edit Master text styles</a:t>
-            </a:r>
-          </a:p>
-          <a:p>
-            <a:pPr lvl="1"/>
-            <a:r>
-              <a:rPr lang="en-US" smtClean="0"/>
-              <a:t>Second level</a:t>
-            </a:r>
-          </a:p>
-          <a:p>
-            <a:pPr lvl="2"/>
-            <a:r>
-              <a:rPr lang="en-US" smtClean="0"/>
-              <a:t>Third level</a:t>
-            </a:r>
-          </a:p>
-          <a:p>
-            <a:pPr lvl="3"/>
-            <a:r>
-              <a:rPr lang="en-US" smtClean="0"/>
-              <a:t>Fourth level</a:t>
-            </a:r>
-          </a:p>
-          <a:p>
-            <a:pPr lvl="4"/>
-            <a:r>
-              <a:rPr lang="en-US" smtClean="0"/>
-              <a:t>Fifth level</a:t>
-            </a:r>
-            <a:endParaRPr lang="en-US"/>
-          </a:p>
-        </p:txBody>
-      </p:sp>
-      <p:sp>
-        <p:nvSpPr>
-          <p:cNvPr id="4" name="Date Placeholder 3"/>
-          <p:cNvSpPr>
-            <a:spLocks noGrp="1"/>
-          </p:cNvSpPr>
-          <p:nvPr>
-            <p:ph type="dt" sz="half" idx="10"/>
-          </p:nvPr>
-        </p:nvSpPr>
-        <p:spPr/>
-        <p:txBody>
-          <a:bodyPr/>
-          <a:lstStyle/>
-          <a:p>
-            <a:fld id="{5BCAD085-E8A6-8845-BD4E-CB4CCA059FC4}" type="datetimeFigureOut">
-              <a:rPr lang="en-US" smtClean="0"/>
-              <a:t>1/27/13</a:t>
+              <a:t>1/2/22</a:t>
             </a:fld>
             <a:endParaRPr lang="en-US"/>
           </a:p>
@@ -1907,7 +1960,7 @@
           <a:bodyPr/>
           <a:lstStyle/>
           <a:p>
-            <a:fld id="{C1FF6DA9-008F-8B48-92A6-B652298478BF}" type="slidenum">
+            <a:fld id="{C5EF2332-01BF-834F-8236-50238282D533}" type="slidenum">
               <a:rPr lang="en-US" smtClean="0"/>
               <a:t>‹#›</a:t>
             </a:fld>
@@ -1918,7 +1971,7 @@
     </p:spTree>
     <p:extLst>
       <p:ext uri="{BB962C8B-B14F-4D97-AF65-F5344CB8AC3E}">
-        <p14:creationId xmlns:p14="http://schemas.microsoft.com/office/powerpoint/2010/main" val="2614314258"/>
+        <p14:creationId xmlns:p14="http://schemas.microsoft.com/office/powerpoint/2010/main" val="338346009"/>
       </p:ext>
     </p:extLst>
   </p:cSld>
@@ -1957,23 +2010,22 @@
         </p:nvSpPr>
         <p:spPr>
           <a:xfrm>
-            <a:off x="722313" y="4406900"/>
-            <a:ext cx="7772400" cy="1362075"/>
+            <a:off x="722313" y="3305176"/>
+            <a:ext cx="7772400" cy="1021556"/>
           </a:xfrm>
         </p:spPr>
         <p:txBody>
           <a:bodyPr anchor="t"/>
           <a:lstStyle>
             <a:lvl1pPr algn="l">
-              <a:defRPr sz="4000" b="1" cap="all"/>
+              <a:defRPr sz="3000" b="1" cap="all"/>
             </a:lvl1pPr>
           </a:lstStyle>
           <a:p>
             <a:r>
-              <a:rPr lang="en-US" smtClean="0"/>
+              <a:rPr lang="en-US"/>
               <a:t>Click to edit Master title style</a:t>
             </a:r>
-            <a:endParaRPr lang="en-US"/>
           </a:p>
         </p:txBody>
       </p:sp>
@@ -1989,8 +2041,8 @@
         </p:nvSpPr>
         <p:spPr>
           <a:xfrm>
-            <a:off x="722313" y="2906713"/>
-            <a:ext cx="7772400" cy="1500187"/>
+            <a:off x="722313" y="2180035"/>
+            <a:ext cx="7772400" cy="1125140"/>
           </a:xfrm>
         </p:spPr>
         <p:txBody>
@@ -1998,7 +2050,7 @@
           <a:lstStyle>
             <a:lvl1pPr marL="0" indent="0">
               <a:buNone/>
-              <a:defRPr sz="2000">
+              <a:defRPr sz="1500">
                 <a:solidFill>
                   <a:schemeClr val="tx1">
                     <a:tint val="75000"/>
@@ -2006,9 +2058,9 @@
                 </a:solidFill>
               </a:defRPr>
             </a:lvl1pPr>
-            <a:lvl2pPr marL="457200" indent="0">
-              <a:buNone/>
-              <a:defRPr sz="1800">
+            <a:lvl2pPr marL="342900" indent="0">
+              <a:buNone/>
+              <a:defRPr sz="1350">
                 <a:solidFill>
                   <a:schemeClr val="tx1">
                     <a:tint val="75000"/>
@@ -2016,9 +2068,9 @@
                 </a:solidFill>
               </a:defRPr>
             </a:lvl2pPr>
-            <a:lvl3pPr marL="914400" indent="0">
-              <a:buNone/>
-              <a:defRPr sz="1600">
+            <a:lvl3pPr marL="685800" indent="0">
+              <a:buNone/>
+              <a:defRPr sz="1200">
                 <a:solidFill>
                   <a:schemeClr val="tx1">
                     <a:tint val="75000"/>
@@ -2026,9 +2078,9 @@
                 </a:solidFill>
               </a:defRPr>
             </a:lvl3pPr>
-            <a:lvl4pPr marL="1371600" indent="0">
-              <a:buNone/>
-              <a:defRPr sz="1400">
+            <a:lvl4pPr marL="1028700" indent="0">
+              <a:buNone/>
+              <a:defRPr sz="1050">
                 <a:solidFill>
                   <a:schemeClr val="tx1">
                     <a:tint val="75000"/>
@@ -2036,9 +2088,9 @@
                 </a:solidFill>
               </a:defRPr>
             </a:lvl4pPr>
-            <a:lvl5pPr marL="1828800" indent="0">
-              <a:buNone/>
-              <a:defRPr sz="1400">
+            <a:lvl5pPr marL="1371600" indent="0">
+              <a:buNone/>
+              <a:defRPr sz="1050">
                 <a:solidFill>
                   <a:schemeClr val="tx1">
                     <a:tint val="75000"/>
@@ -2046,9 +2098,9 @@
                 </a:solidFill>
               </a:defRPr>
             </a:lvl5pPr>
-            <a:lvl6pPr marL="2286000" indent="0">
-              <a:buNone/>
-              <a:defRPr sz="1400">
+            <a:lvl6pPr marL="1714500" indent="0">
+              <a:buNone/>
+              <a:defRPr sz="1050">
                 <a:solidFill>
                   <a:schemeClr val="tx1">
                     <a:tint val="75000"/>
@@ -2056,9 +2108,9 @@
                 </a:solidFill>
               </a:defRPr>
             </a:lvl6pPr>
-            <a:lvl7pPr marL="2743200" indent="0">
-              <a:buNone/>
-              <a:defRPr sz="1400">
+            <a:lvl7pPr marL="2057400" indent="0">
+              <a:buNone/>
+              <a:defRPr sz="1050">
                 <a:solidFill>
                   <a:schemeClr val="tx1">
                     <a:tint val="75000"/>
@@ -2066,9 +2118,9 @@
                 </a:solidFill>
               </a:defRPr>
             </a:lvl7pPr>
-            <a:lvl8pPr marL="3200400" indent="0">
-              <a:buNone/>
-              <a:defRPr sz="1400">
+            <a:lvl8pPr marL="2400300" indent="0">
+              <a:buNone/>
+              <a:defRPr sz="1050">
                 <a:solidFill>
                   <a:schemeClr val="tx1">
                     <a:tint val="75000"/>
@@ -2076,9 +2128,9 @@
                 </a:solidFill>
               </a:defRPr>
             </a:lvl8pPr>
-            <a:lvl9pPr marL="3657600" indent="0">
-              <a:buNone/>
-              <a:defRPr sz="1400">
+            <a:lvl9pPr marL="2743200" indent="0">
+              <a:buNone/>
+              <a:defRPr sz="1050">
                 <a:solidFill>
                   <a:schemeClr val="tx1">
                     <a:tint val="75000"/>
@@ -2090,30 +2142,30 @@
           <a:p>
             <a:pPr lvl="0"/>
             <a:r>
+              <a:rPr lang="en-US"/>
+              <a:t>Click to edit Master text styles</a:t>
+            </a:r>
+          </a:p>
+        </p:txBody>
+      </p:sp>
+      <p:sp>
+        <p:nvSpPr>
+          <p:cNvPr id="4" name="Date Placeholder 3"/>
+          <p:cNvSpPr>
+            <a:spLocks noGrp="1"/>
+          </p:cNvSpPr>
+          <p:nvPr>
+            <p:ph type="dt" sz="half" idx="10"/>
+          </p:nvPr>
+        </p:nvSpPr>
+        <p:spPr/>
+        <p:txBody>
+          <a:bodyPr/>
+          <a:lstStyle/>
+          <a:p>
+            <a:fld id="{241EB5C9-1307-BA42-ABA2-0BC069CD8E7F}" type="datetimeFigureOut">
               <a:rPr lang="en-US" smtClean="0"/>
-              <a:t>Click to edit Master text styles</a:t>
-            </a:r>
-          </a:p>
-        </p:txBody>
-      </p:sp>
-      <p:sp>
-        <p:nvSpPr>
-          <p:cNvPr id="4" name="Date Placeholder 3"/>
-          <p:cNvSpPr>
-            <a:spLocks noGrp="1"/>
-          </p:cNvSpPr>
-          <p:nvPr>
-            <p:ph type="dt" sz="half" idx="10"/>
-          </p:nvPr>
-        </p:nvSpPr>
-        <p:spPr/>
-        <p:txBody>
-          <a:bodyPr/>
-          <a:lstStyle/>
-          <a:p>
-            <a:fld id="{5BCAD085-E8A6-8845-BD4E-CB4CCA059FC4}" type="datetimeFigureOut">
-              <a:rPr lang="en-US" smtClean="0"/>
-              <a:t>1/27/13</a:t>
+              <a:t>1/2/22</a:t>
             </a:fld>
             <a:endParaRPr lang="en-US"/>
           </a:p>
@@ -2153,7 +2205,7 @@
           <a:bodyPr/>
           <a:lstStyle/>
           <a:p>
-            <a:fld id="{C1FF6DA9-008F-8B48-92A6-B652298478BF}" type="slidenum">
+            <a:fld id="{C5EF2332-01BF-834F-8236-50238282D533}" type="slidenum">
               <a:rPr lang="en-US" smtClean="0"/>
               <a:t>‹#›</a:t>
             </a:fld>
@@ -2164,7 +2216,7 @@
     </p:spTree>
     <p:extLst>
       <p:ext uri="{BB962C8B-B14F-4D97-AF65-F5344CB8AC3E}">
-        <p14:creationId xmlns:p14="http://schemas.microsoft.com/office/powerpoint/2010/main" val="960648375"/>
+        <p14:creationId xmlns:p14="http://schemas.microsoft.com/office/powerpoint/2010/main" val="1073069076"/>
       </p:ext>
     </p:extLst>
   </p:cSld>
@@ -2207,10 +2259,9 @@
           <a:lstStyle/>
           <a:p>
             <a:r>
-              <a:rPr lang="en-US" smtClean="0"/>
+              <a:rPr lang="en-US"/>
               <a:t>Click to edit Master title style</a:t>
             </a:r>
-            <a:endParaRPr lang="en-US"/>
           </a:p>
         </p:txBody>
       </p:sp>
@@ -2226,76 +2277,75 @@
         </p:nvSpPr>
         <p:spPr>
           <a:xfrm>
-            <a:off x="457200" y="1600200"/>
-            <a:ext cx="4038600" cy="4525963"/>
+            <a:off x="457200" y="1200151"/>
+            <a:ext cx="4038600" cy="3394472"/>
           </a:xfrm>
         </p:spPr>
         <p:txBody>
           <a:bodyPr/>
           <a:lstStyle>
             <a:lvl1pPr>
-              <a:defRPr sz="2800"/>
+              <a:defRPr sz="2100"/>
             </a:lvl1pPr>
             <a:lvl2pPr>
-              <a:defRPr sz="2400"/>
+              <a:defRPr sz="1800"/>
             </a:lvl2pPr>
             <a:lvl3pPr>
-              <a:defRPr sz="2000"/>
+              <a:defRPr sz="1500"/>
             </a:lvl3pPr>
             <a:lvl4pPr>
-              <a:defRPr sz="1800"/>
+              <a:defRPr sz="1350"/>
             </a:lvl4pPr>
             <a:lvl5pPr>
-              <a:defRPr sz="1800"/>
+              <a:defRPr sz="1350"/>
             </a:lvl5pPr>
             <a:lvl6pPr>
-              <a:defRPr sz="1800"/>
+              <a:defRPr sz="1350"/>
             </a:lvl6pPr>
             <a:lvl7pPr>
-              <a:defRPr sz="1800"/>
+              <a:defRPr sz="1350"/>
             </a:lvl7pPr>
             <a:lvl8pPr>
-              <a:defRPr sz="1800"/>
+              <a:defRPr sz="1350"/>
             </a:lvl8pPr>
             <a:lvl9pPr>
-              <a:defRPr sz="1800"/>
+              <a:defRPr sz="1350"/>
             </a:lvl9pPr>
           </a:lstStyle>
           <a:p>
             <a:pPr lvl="0"/>
             <a:r>
-              <a:rPr lang="en-US" smtClean="0"/>
+              <a:rPr lang="en-US"/>
               <a:t>Click to edit Master text styles</a:t>
             </a:r>
           </a:p>
           <a:p>
             <a:pPr lvl="1"/>
             <a:r>
-              <a:rPr lang="en-US" smtClean="0"/>
+              <a:rPr lang="en-US"/>
               <a:t>Second level</a:t>
             </a:r>
           </a:p>
           <a:p>
             <a:pPr lvl="2"/>
             <a:r>
-              <a:rPr lang="en-US" smtClean="0"/>
+              <a:rPr lang="en-US"/>
               <a:t>Third level</a:t>
             </a:r>
           </a:p>
           <a:p>
             <a:pPr lvl="3"/>
             <a:r>
-              <a:rPr lang="en-US" smtClean="0"/>
+              <a:rPr lang="en-US"/>
               <a:t>Fourth level</a:t>
             </a:r>
           </a:p>
           <a:p>
             <a:pPr lvl="4"/>
             <a:r>
-              <a:rPr lang="en-US" smtClean="0"/>
+              <a:rPr lang="en-US"/>
               <a:t>Fifth level</a:t>
             </a:r>
-            <a:endParaRPr lang="en-US"/>
           </a:p>
         </p:txBody>
       </p:sp>
@@ -2311,97 +2361,96 @@
         </p:nvSpPr>
         <p:spPr>
           <a:xfrm>
-            <a:off x="4648200" y="1600200"/>
-            <a:ext cx="4038600" cy="4525963"/>
+            <a:off x="4648200" y="1200151"/>
+            <a:ext cx="4038600" cy="3394472"/>
           </a:xfrm>
         </p:spPr>
         <p:txBody>
           <a:bodyPr/>
           <a:lstStyle>
             <a:lvl1pPr>
-              <a:defRPr sz="2800"/>
+              <a:defRPr sz="2100"/>
             </a:lvl1pPr>
             <a:lvl2pPr>
-              <a:defRPr sz="2400"/>
+              <a:defRPr sz="1800"/>
             </a:lvl2pPr>
             <a:lvl3pPr>
-              <a:defRPr sz="2000"/>
+              <a:defRPr sz="1500"/>
             </a:lvl3pPr>
             <a:lvl4pPr>
-              <a:defRPr sz="1800"/>
+              <a:defRPr sz="1350"/>
             </a:lvl4pPr>
             <a:lvl5pPr>
-              <a:defRPr sz="1800"/>
+              <a:defRPr sz="1350"/>
             </a:lvl5pPr>
             <a:lvl6pPr>
-              <a:defRPr sz="1800"/>
+              <a:defRPr sz="1350"/>
             </a:lvl6pPr>
             <a:lvl7pPr>
-              <a:defRPr sz="1800"/>
+              <a:defRPr sz="1350"/>
             </a:lvl7pPr>
             <a:lvl8pPr>
-              <a:defRPr sz="1800"/>
+              <a:defRPr sz="1350"/>
             </a:lvl8pPr>
             <a:lvl9pPr>
-              <a:defRPr sz="1800"/>
+              <a:defRPr sz="1350"/>
             </a:lvl9pPr>
           </a:lstStyle>
           <a:p>
             <a:pPr lvl="0"/>
             <a:r>
+              <a:rPr lang="en-US"/>
+              <a:t>Click to edit Master text styles</a:t>
+            </a:r>
+          </a:p>
+          <a:p>
+            <a:pPr lvl="1"/>
+            <a:r>
+              <a:rPr lang="en-US"/>
+              <a:t>Second level</a:t>
+            </a:r>
+          </a:p>
+          <a:p>
+            <a:pPr lvl="2"/>
+            <a:r>
+              <a:rPr lang="en-US"/>
+              <a:t>Third level</a:t>
+            </a:r>
+          </a:p>
+          <a:p>
+            <a:pPr lvl="3"/>
+            <a:r>
+              <a:rPr lang="en-US"/>
+              <a:t>Fourth level</a:t>
+            </a:r>
+          </a:p>
+          <a:p>
+            <a:pPr lvl="4"/>
+            <a:r>
+              <a:rPr lang="en-US"/>
+              <a:t>Fifth level</a:t>
+            </a:r>
+          </a:p>
+        </p:txBody>
+      </p:sp>
+      <p:sp>
+        <p:nvSpPr>
+          <p:cNvPr id="5" name="Date Placeholder 4"/>
+          <p:cNvSpPr>
+            <a:spLocks noGrp="1"/>
+          </p:cNvSpPr>
+          <p:nvPr>
+            <p:ph type="dt" sz="half" idx="10"/>
+          </p:nvPr>
+        </p:nvSpPr>
+        <p:spPr/>
+        <p:txBody>
+          <a:bodyPr/>
+          <a:lstStyle/>
+          <a:p>
+            <a:fld id="{241EB5C9-1307-BA42-ABA2-0BC069CD8E7F}" type="datetimeFigureOut">
               <a:rPr lang="en-US" smtClean="0"/>
-              <a:t>Click to edit Master text styles</a:t>
-            </a:r>
-          </a:p>
-          <a:p>
-            <a:pPr lvl="1"/>
-            <a:r>
-              <a:rPr lang="en-US" smtClean="0"/>
-              <a:t>Second level</a:t>
-            </a:r>
-          </a:p>
-          <a:p>
-            <a:pPr lvl="2"/>
-            <a:r>
-              <a:rPr lang="en-US" smtClean="0"/>
-              <a:t>Third level</a:t>
-            </a:r>
-          </a:p>
-          <a:p>
-            <a:pPr lvl="3"/>
-            <a:r>
-              <a:rPr lang="en-US" smtClean="0"/>
-              <a:t>Fourth level</a:t>
-            </a:r>
-          </a:p>
-          <a:p>
-            <a:pPr lvl="4"/>
-            <a:r>
-              <a:rPr lang="en-US" smtClean="0"/>
-              <a:t>Fifth level</a:t>
-            </a:r>
-            <a:endParaRPr lang="en-US"/>
-          </a:p>
-        </p:txBody>
-      </p:sp>
-      <p:sp>
-        <p:nvSpPr>
-          <p:cNvPr id="5" name="Date Placeholder 4"/>
-          <p:cNvSpPr>
-            <a:spLocks noGrp="1"/>
-          </p:cNvSpPr>
-          <p:nvPr>
-            <p:ph type="dt" sz="half" idx="10"/>
-          </p:nvPr>
-        </p:nvSpPr>
-        <p:spPr/>
-        <p:txBody>
-          <a:bodyPr/>
-          <a:lstStyle/>
-          <a:p>
-            <a:fld id="{5BCAD085-E8A6-8845-BD4E-CB4CCA059FC4}" type="datetimeFigureOut">
-              <a:rPr lang="en-US" smtClean="0"/>
-              <a:t>1/27/13</a:t>
+              <a:t>1/2/22</a:t>
             </a:fld>
             <a:endParaRPr lang="en-US"/>
           </a:p>
@@ -2441,7 +2490,7 @@
           <a:bodyPr/>
           <a:lstStyle/>
           <a:p>
-            <a:fld id="{C1FF6DA9-008F-8B48-92A6-B652298478BF}" type="slidenum">
+            <a:fld id="{C5EF2332-01BF-834F-8236-50238282D533}" type="slidenum">
               <a:rPr lang="en-US" smtClean="0"/>
               <a:t>‹#›</a:t>
             </a:fld>
@@ -2452,7 +2501,7 @@
     </p:spTree>
     <p:extLst>
       <p:ext uri="{BB962C8B-B14F-4D97-AF65-F5344CB8AC3E}">
-        <p14:creationId xmlns:p14="http://schemas.microsoft.com/office/powerpoint/2010/main" val="2782244947"/>
+        <p14:creationId xmlns:p14="http://schemas.microsoft.com/office/powerpoint/2010/main" val="2619886245"/>
       </p:ext>
     </p:extLst>
   </p:cSld>
@@ -2499,10 +2548,9 @@
           </a:lstStyle>
           <a:p>
             <a:r>
-              <a:rPr lang="en-US" smtClean="0"/>
+              <a:rPr lang="en-US"/>
               <a:t>Click to edit Master title style</a:t>
             </a:r>
-            <a:endParaRPr lang="en-US"/>
           </a:p>
         </p:txBody>
       </p:sp>
@@ -2518,8 +2566,8 @@
         </p:nvSpPr>
         <p:spPr>
           <a:xfrm>
-            <a:off x="457200" y="1535113"/>
-            <a:ext cx="4040188" cy="639762"/>
+            <a:off x="457200" y="1151335"/>
+            <a:ext cx="4040188" cy="479822"/>
           </a:xfrm>
         </p:spPr>
         <p:txBody>
@@ -2527,45 +2575,45 @@
           <a:lstStyle>
             <a:lvl1pPr marL="0" indent="0">
               <a:buNone/>
-              <a:defRPr sz="2400" b="1"/>
+              <a:defRPr sz="1800" b="1"/>
             </a:lvl1pPr>
-            <a:lvl2pPr marL="457200" indent="0">
-              <a:buNone/>
-              <a:defRPr sz="2000" b="1"/>
+            <a:lvl2pPr marL="342900" indent="0">
+              <a:buNone/>
+              <a:defRPr sz="1500" b="1"/>
             </a:lvl2pPr>
-            <a:lvl3pPr marL="914400" indent="0">
-              <a:buNone/>
-              <a:defRPr sz="1800" b="1"/>
+            <a:lvl3pPr marL="685800" indent="0">
+              <a:buNone/>
+              <a:defRPr sz="1350" b="1"/>
             </a:lvl3pPr>
-            <a:lvl4pPr marL="1371600" indent="0">
-              <a:buNone/>
-              <a:defRPr sz="1600" b="1"/>
+            <a:lvl4pPr marL="1028700" indent="0">
+              <a:buNone/>
+              <a:defRPr sz="1200" b="1"/>
             </a:lvl4pPr>
-            <a:lvl5pPr marL="1828800" indent="0">
-              <a:buNone/>
-              <a:defRPr sz="1600" b="1"/>
+            <a:lvl5pPr marL="1371600" indent="0">
+              <a:buNone/>
+              <a:defRPr sz="1200" b="1"/>
             </a:lvl5pPr>
-            <a:lvl6pPr marL="2286000" indent="0">
-              <a:buNone/>
-              <a:defRPr sz="1600" b="1"/>
+            <a:lvl6pPr marL="1714500" indent="0">
+              <a:buNone/>
+              <a:defRPr sz="1200" b="1"/>
             </a:lvl6pPr>
-            <a:lvl7pPr marL="2743200" indent="0">
-              <a:buNone/>
-              <a:defRPr sz="1600" b="1"/>
+            <a:lvl7pPr marL="2057400" indent="0">
+              <a:buNone/>
+              <a:defRPr sz="1200" b="1"/>
             </a:lvl7pPr>
-            <a:lvl8pPr marL="3200400" indent="0">
-              <a:buNone/>
-              <a:defRPr sz="1600" b="1"/>
+            <a:lvl8pPr marL="2400300" indent="0">
+              <a:buNone/>
+              <a:defRPr sz="1200" b="1"/>
             </a:lvl8pPr>
-            <a:lvl9pPr marL="3657600" indent="0">
-              <a:buNone/>
-              <a:defRPr sz="1600" b="1"/>
+            <a:lvl9pPr marL="2743200" indent="0">
+              <a:buNone/>
+              <a:defRPr sz="1200" b="1"/>
             </a:lvl9pPr>
           </a:lstStyle>
           <a:p>
             <a:pPr lvl="0"/>
             <a:r>
-              <a:rPr lang="en-US" smtClean="0"/>
+              <a:rPr lang="en-US"/>
               <a:t>Click to edit Master text styles</a:t>
             </a:r>
           </a:p>
@@ -2583,76 +2631,75 @@
         </p:nvSpPr>
         <p:spPr>
           <a:xfrm>
-            <a:off x="457200" y="2174875"/>
-            <a:ext cx="4040188" cy="3951288"/>
+            <a:off x="457200" y="1631156"/>
+            <a:ext cx="4040188" cy="2963466"/>
           </a:xfrm>
         </p:spPr>
         <p:txBody>
           <a:bodyPr/>
           <a:lstStyle>
             <a:lvl1pPr>
-              <a:defRPr sz="2400"/>
+              <a:defRPr sz="1800"/>
             </a:lvl1pPr>
             <a:lvl2pPr>
-              <a:defRPr sz="2000"/>
+              <a:defRPr sz="1500"/>
             </a:lvl2pPr>
             <a:lvl3pPr>
-              <a:defRPr sz="1800"/>
+              <a:defRPr sz="1350"/>
             </a:lvl3pPr>
             <a:lvl4pPr>
-              <a:defRPr sz="1600"/>
+              <a:defRPr sz="1200"/>
             </a:lvl4pPr>
             <a:lvl5pPr>
-              <a:defRPr sz="1600"/>
+              <a:defRPr sz="1200"/>
             </a:lvl5pPr>
             <a:lvl6pPr>
-              <a:defRPr sz="1600"/>
+              <a:defRPr sz="1200"/>
             </a:lvl6pPr>
             <a:lvl7pPr>
-              <a:defRPr sz="1600"/>
+              <a:defRPr sz="1200"/>
             </a:lvl7pPr>
             <a:lvl8pPr>
-              <a:defRPr sz="1600"/>
+              <a:defRPr sz="1200"/>
             </a:lvl8pPr>
             <a:lvl9pPr>
-              <a:defRPr sz="1600"/>
+              <a:defRPr sz="1200"/>
             </a:lvl9pPr>
           </a:lstStyle>
           <a:p>
             <a:pPr lvl="0"/>
             <a:r>
-              <a:rPr lang="en-US" smtClean="0"/>
+              <a:rPr lang="en-US"/>
               <a:t>Click to edit Master text styles</a:t>
             </a:r>
           </a:p>
           <a:p>
             <a:pPr lvl="1"/>
             <a:r>
-              <a:rPr lang="en-US" smtClean="0"/>
+              <a:rPr lang="en-US"/>
               <a:t>Second level</a:t>
             </a:r>
           </a:p>
           <a:p>
             <a:pPr lvl="2"/>
             <a:r>
-              <a:rPr lang="en-US" smtClean="0"/>
+              <a:rPr lang="en-US"/>
               <a:t>Third level</a:t>
             </a:r>
           </a:p>
           <a:p>
             <a:pPr lvl="3"/>
             <a:r>
-              <a:rPr lang="en-US" smtClean="0"/>
+              <a:rPr lang="en-US"/>
               <a:t>Fourth level</a:t>
             </a:r>
           </a:p>
           <a:p>
             <a:pPr lvl="4"/>
             <a:r>
-              <a:rPr lang="en-US" smtClean="0"/>
+              <a:rPr lang="en-US"/>
               <a:t>Fifth level</a:t>
             </a:r>
-            <a:endParaRPr lang="en-US"/>
           </a:p>
         </p:txBody>
       </p:sp>
@@ -2668,8 +2715,8 @@
         </p:nvSpPr>
         <p:spPr>
           <a:xfrm>
-            <a:off x="4645025" y="1535113"/>
-            <a:ext cx="4041775" cy="639762"/>
+            <a:off x="4645026" y="1151335"/>
+            <a:ext cx="4041775" cy="479822"/>
           </a:xfrm>
         </p:spPr>
         <p:txBody>
@@ -2677,45 +2724,45 @@
           <a:lstStyle>
             <a:lvl1pPr marL="0" indent="0">
               <a:buNone/>
-              <a:defRPr sz="2400" b="1"/>
+              <a:defRPr sz="1800" b="1"/>
             </a:lvl1pPr>
-            <a:lvl2pPr marL="457200" indent="0">
-              <a:buNone/>
-              <a:defRPr sz="2000" b="1"/>
+            <a:lvl2pPr marL="342900" indent="0">
+              <a:buNone/>
+              <a:defRPr sz="1500" b="1"/>
             </a:lvl2pPr>
-            <a:lvl3pPr marL="914400" indent="0">
-              <a:buNone/>
-              <a:defRPr sz="1800" b="1"/>
+            <a:lvl3pPr marL="685800" indent="0">
+              <a:buNone/>
+              <a:defRPr sz="1350" b="1"/>
             </a:lvl3pPr>
-            <a:lvl4pPr marL="1371600" indent="0">
-              <a:buNone/>
-              <a:defRPr sz="1600" b="1"/>
+            <a:lvl4pPr marL="1028700" indent="0">
+              <a:buNone/>
+              <a:defRPr sz="1200" b="1"/>
             </a:lvl4pPr>
-            <a:lvl5pPr marL="1828800" indent="0">
-              <a:buNone/>
-              <a:defRPr sz="1600" b="1"/>
+            <a:lvl5pPr marL="1371600" indent="0">
+              <a:buNone/>
+              <a:defRPr sz="1200" b="1"/>
             </a:lvl5pPr>
-            <a:lvl6pPr marL="2286000" indent="0">
-              <a:buNone/>
-              <a:defRPr sz="1600" b="1"/>
+            <a:lvl6pPr marL="1714500" indent="0">
+              <a:buNone/>
+              <a:defRPr sz="1200" b="1"/>
             </a:lvl6pPr>
-            <a:lvl7pPr marL="2743200" indent="0">
-              <a:buNone/>
-              <a:defRPr sz="1600" b="1"/>
+            <a:lvl7pPr marL="2057400" indent="0">
+              <a:buNone/>
+              <a:defRPr sz="1200" b="1"/>
             </a:lvl7pPr>
-            <a:lvl8pPr marL="3200400" indent="0">
-              <a:buNone/>
-              <a:defRPr sz="1600" b="1"/>
+            <a:lvl8pPr marL="2400300" indent="0">
+              <a:buNone/>
+              <a:defRPr sz="1200" b="1"/>
             </a:lvl8pPr>
-            <a:lvl9pPr marL="3657600" indent="0">
-              <a:buNone/>
-              <a:defRPr sz="1600" b="1"/>
+            <a:lvl9pPr marL="2743200" indent="0">
+              <a:buNone/>
+              <a:defRPr sz="1200" b="1"/>
             </a:lvl9pPr>
           </a:lstStyle>
           <a:p>
             <a:pPr lvl="0"/>
             <a:r>
-              <a:rPr lang="en-US" smtClean="0"/>
+              <a:rPr lang="en-US"/>
               <a:t>Click to edit Master text styles</a:t>
             </a:r>
           </a:p>
@@ -2733,97 +2780,96 @@
         </p:nvSpPr>
         <p:spPr>
           <a:xfrm>
-            <a:off x="4645025" y="2174875"/>
-            <a:ext cx="4041775" cy="3951288"/>
+            <a:off x="4645026" y="1631156"/>
+            <a:ext cx="4041775" cy="2963466"/>
           </a:xfrm>
         </p:spPr>
         <p:txBody>
           <a:bodyPr/>
           <a:lstStyle>
             <a:lvl1pPr>
-              <a:defRPr sz="2400"/>
+              <a:defRPr sz="1800"/>
             </a:lvl1pPr>
             <a:lvl2pPr>
-              <a:defRPr sz="2000"/>
+              <a:defRPr sz="1500"/>
             </a:lvl2pPr>
             <a:lvl3pPr>
-              <a:defRPr sz="1800"/>
+              <a:defRPr sz="1350"/>
             </a:lvl3pPr>
             <a:lvl4pPr>
-              <a:defRPr sz="1600"/>
+              <a:defRPr sz="1200"/>
             </a:lvl4pPr>
             <a:lvl5pPr>
-              <a:defRPr sz="1600"/>
+              <a:defRPr sz="1200"/>
             </a:lvl5pPr>
             <a:lvl6pPr>
-              <a:defRPr sz="1600"/>
+              <a:defRPr sz="1200"/>
             </a:lvl6pPr>
             <a:lvl7pPr>
-              <a:defRPr sz="1600"/>
+              <a:defRPr sz="1200"/>
             </a:lvl7pPr>
             <a:lvl8pPr>
-              <a:defRPr sz="1600"/>
+              <a:defRPr sz="1200"/>
             </a:lvl8pPr>
             <a:lvl9pPr>
-              <a:defRPr sz="1600"/>
+              <a:defRPr sz="1200"/>
             </a:lvl9pPr>
           </a:lstStyle>
           <a:p>
             <a:pPr lvl="0"/>
             <a:r>
+              <a:rPr lang="en-US"/>
+              <a:t>Click to edit Master text styles</a:t>
+            </a:r>
+          </a:p>
+          <a:p>
+            <a:pPr lvl="1"/>
+            <a:r>
+              <a:rPr lang="en-US"/>
+              <a:t>Second level</a:t>
+            </a:r>
+          </a:p>
+          <a:p>
+            <a:pPr lvl="2"/>
+            <a:r>
+              <a:rPr lang="en-US"/>
+              <a:t>Third level</a:t>
+            </a:r>
+          </a:p>
+          <a:p>
+            <a:pPr lvl="3"/>
+            <a:r>
+              <a:rPr lang="en-US"/>
+              <a:t>Fourth level</a:t>
+            </a:r>
+          </a:p>
+          <a:p>
+            <a:pPr lvl="4"/>
+            <a:r>
+              <a:rPr lang="en-US"/>
+              <a:t>Fifth level</a:t>
+            </a:r>
+          </a:p>
+        </p:txBody>
+      </p:sp>
+      <p:sp>
+        <p:nvSpPr>
+          <p:cNvPr id="7" name="Date Placeholder 6"/>
+          <p:cNvSpPr>
+            <a:spLocks noGrp="1"/>
+          </p:cNvSpPr>
+          <p:nvPr>
+            <p:ph type="dt" sz="half" idx="10"/>
+          </p:nvPr>
+        </p:nvSpPr>
+        <p:spPr/>
+        <p:txBody>
+          <a:bodyPr/>
+          <a:lstStyle/>
+          <a:p>
+            <a:fld id="{241EB5C9-1307-BA42-ABA2-0BC069CD8E7F}" type="datetimeFigureOut">
               <a:rPr lang="en-US" smtClean="0"/>
-              <a:t>Click to edit Master text styles</a:t>
-            </a:r>
-          </a:p>
-          <a:p>
-            <a:pPr lvl="1"/>
-            <a:r>
-              <a:rPr lang="en-US" smtClean="0"/>
-              <a:t>Second level</a:t>
-            </a:r>
-          </a:p>
-          <a:p>
-            <a:pPr lvl="2"/>
-            <a:r>
-              <a:rPr lang="en-US" smtClean="0"/>
-              <a:t>Third level</a:t>
-            </a:r>
-          </a:p>
-          <a:p>
-            <a:pPr lvl="3"/>
-            <a:r>
-              <a:rPr lang="en-US" smtClean="0"/>
-              <a:t>Fourth level</a:t>
-            </a:r>
-          </a:p>
-          <a:p>
-            <a:pPr lvl="4"/>
-            <a:r>
-              <a:rPr lang="en-US" smtClean="0"/>
-              <a:t>Fifth level</a:t>
-            </a:r>
-            <a:endParaRPr lang="en-US"/>
-          </a:p>
-        </p:txBody>
-      </p:sp>
-      <p:sp>
-        <p:nvSpPr>
-          <p:cNvPr id="7" name="Date Placeholder 6"/>
-          <p:cNvSpPr>
-            <a:spLocks noGrp="1"/>
-          </p:cNvSpPr>
-          <p:nvPr>
-            <p:ph type="dt" sz="half" idx="10"/>
-          </p:nvPr>
-        </p:nvSpPr>
-        <p:spPr/>
-        <p:txBody>
-          <a:bodyPr/>
-          <a:lstStyle/>
-          <a:p>
-            <a:fld id="{5BCAD085-E8A6-8845-BD4E-CB4CCA059FC4}" type="datetimeFigureOut">
-              <a:rPr lang="en-US" smtClean="0"/>
-              <a:t>1/27/13</a:t>
+              <a:t>1/2/22</a:t>
             </a:fld>
             <a:endParaRPr lang="en-US"/>
           </a:p>
@@ -2863,7 +2909,7 @@
           <a:bodyPr/>
           <a:lstStyle/>
           <a:p>
-            <a:fld id="{C1FF6DA9-008F-8B48-92A6-B652298478BF}" type="slidenum">
+            <a:fld id="{C5EF2332-01BF-834F-8236-50238282D533}" type="slidenum">
               <a:rPr lang="en-US" smtClean="0"/>
               <a:t>‹#›</a:t>
             </a:fld>
@@ -2874,7 +2920,7 @@
     </p:spTree>
     <p:extLst>
       <p:ext uri="{BB962C8B-B14F-4D97-AF65-F5344CB8AC3E}">
-        <p14:creationId xmlns:p14="http://schemas.microsoft.com/office/powerpoint/2010/main" val="990158736"/>
+        <p14:creationId xmlns:p14="http://schemas.microsoft.com/office/powerpoint/2010/main" val="2535793967"/>
       </p:ext>
     </p:extLst>
   </p:cSld>
@@ -2917,31 +2963,30 @@
           <a:lstStyle/>
           <a:p>
             <a:r>
+              <a:rPr lang="en-US"/>
+              <a:t>Click to edit Master title style</a:t>
+            </a:r>
+          </a:p>
+        </p:txBody>
+      </p:sp>
+      <p:sp>
+        <p:nvSpPr>
+          <p:cNvPr id="3" name="Date Placeholder 2"/>
+          <p:cNvSpPr>
+            <a:spLocks noGrp="1"/>
+          </p:cNvSpPr>
+          <p:nvPr>
+            <p:ph type="dt" sz="half" idx="10"/>
+          </p:nvPr>
+        </p:nvSpPr>
+        <p:spPr/>
+        <p:txBody>
+          <a:bodyPr/>
+          <a:lstStyle/>
+          <a:p>
+            <a:fld id="{241EB5C9-1307-BA42-ABA2-0BC069CD8E7F}" type="datetimeFigureOut">
               <a:rPr lang="en-US" smtClean="0"/>
-              <a:t>Click to edit Master title style</a:t>
-            </a:r>
-            <a:endParaRPr lang="en-US"/>
-          </a:p>
-        </p:txBody>
-      </p:sp>
-      <p:sp>
-        <p:nvSpPr>
-          <p:cNvPr id="3" name="Date Placeholder 2"/>
-          <p:cNvSpPr>
-            <a:spLocks noGrp="1"/>
-          </p:cNvSpPr>
-          <p:nvPr>
-            <p:ph type="dt" sz="half" idx="10"/>
-          </p:nvPr>
-        </p:nvSpPr>
-        <p:spPr/>
-        <p:txBody>
-          <a:bodyPr/>
-          <a:lstStyle/>
-          <a:p>
-            <a:fld id="{5BCAD085-E8A6-8845-BD4E-CB4CCA059FC4}" type="datetimeFigureOut">
-              <a:rPr lang="en-US" smtClean="0"/>
-              <a:t>1/27/13</a:t>
+              <a:t>1/2/22</a:t>
             </a:fld>
             <a:endParaRPr lang="en-US"/>
           </a:p>
@@ -2981,7 +3026,7 @@
           <a:bodyPr/>
           <a:lstStyle/>
           <a:p>
-            <a:fld id="{C1FF6DA9-008F-8B48-92A6-B652298478BF}" type="slidenum">
+            <a:fld id="{C5EF2332-01BF-834F-8236-50238282D533}" type="slidenum">
               <a:rPr lang="en-US" smtClean="0"/>
               <a:t>‹#›</a:t>
             </a:fld>
@@ -2992,7 +3037,7 @@
     </p:spTree>
     <p:extLst>
       <p:ext uri="{BB962C8B-B14F-4D97-AF65-F5344CB8AC3E}">
-        <p14:creationId xmlns:p14="http://schemas.microsoft.com/office/powerpoint/2010/main" val="727027711"/>
+        <p14:creationId xmlns:p14="http://schemas.microsoft.com/office/powerpoint/2010/main" val="3472721253"/>
       </p:ext>
     </p:extLst>
   </p:cSld>
@@ -3034,9 +3079,9 @@
           <a:bodyPr/>
           <a:lstStyle/>
           <a:p>
-            <a:fld id="{5BCAD085-E8A6-8845-BD4E-CB4CCA059FC4}" type="datetimeFigureOut">
+            <a:fld id="{241EB5C9-1307-BA42-ABA2-0BC069CD8E7F}" type="datetimeFigureOut">
               <a:rPr lang="en-US" smtClean="0"/>
-              <a:t>1/27/13</a:t>
+              <a:t>1/2/22</a:t>
             </a:fld>
             <a:endParaRPr lang="en-US"/>
           </a:p>
@@ -3076,7 +3121,7 @@
           <a:bodyPr/>
           <a:lstStyle/>
           <a:p>
-            <a:fld id="{C1FF6DA9-008F-8B48-92A6-B652298478BF}" type="slidenum">
+            <a:fld id="{C5EF2332-01BF-834F-8236-50238282D533}" type="slidenum">
               <a:rPr lang="en-US" smtClean="0"/>
               <a:t>‹#›</a:t>
             </a:fld>
@@ -3087,7 +3132,7 @@
     </p:spTree>
     <p:extLst>
       <p:ext uri="{BB962C8B-B14F-4D97-AF65-F5344CB8AC3E}">
-        <p14:creationId xmlns:p14="http://schemas.microsoft.com/office/powerpoint/2010/main" val="1212999818"/>
+        <p14:creationId xmlns:p14="http://schemas.microsoft.com/office/powerpoint/2010/main" val="2130901097"/>
       </p:ext>
     </p:extLst>
   </p:cSld>
@@ -3126,23 +3171,22 @@
         </p:nvSpPr>
         <p:spPr>
           <a:xfrm>
-            <a:off x="457200" y="273050"/>
-            <a:ext cx="3008313" cy="1162050"/>
+            <a:off x="457201" y="204787"/>
+            <a:ext cx="3008313" cy="871538"/>
           </a:xfrm>
         </p:spPr>
         <p:txBody>
           <a:bodyPr anchor="b"/>
           <a:lstStyle>
             <a:lvl1pPr algn="l">
-              <a:defRPr sz="2000" b="1"/>
+              <a:defRPr sz="1500" b="1"/>
             </a:lvl1pPr>
           </a:lstStyle>
           <a:p>
             <a:r>
-              <a:rPr lang="en-US" smtClean="0"/>
+              <a:rPr lang="en-US"/>
               <a:t>Click to edit Master title style</a:t>
             </a:r>
-            <a:endParaRPr lang="en-US"/>
           </a:p>
         </p:txBody>
       </p:sp>
@@ -3158,76 +3202,75 @@
         </p:nvSpPr>
         <p:spPr>
           <a:xfrm>
-            <a:off x="3575050" y="273050"/>
-            <a:ext cx="5111750" cy="5853113"/>
+            <a:off x="3575050" y="204788"/>
+            <a:ext cx="5111750" cy="4389835"/>
           </a:xfrm>
         </p:spPr>
         <p:txBody>
           <a:bodyPr/>
           <a:lstStyle>
             <a:lvl1pPr>
-              <a:defRPr sz="3200"/>
+              <a:defRPr sz="2400"/>
             </a:lvl1pPr>
             <a:lvl2pPr>
-              <a:defRPr sz="2800"/>
+              <a:defRPr sz="2100"/>
             </a:lvl2pPr>
             <a:lvl3pPr>
-              <a:defRPr sz="2400"/>
+              <a:defRPr sz="1800"/>
             </a:lvl3pPr>
             <a:lvl4pPr>
-              <a:defRPr sz="2000"/>
+              <a:defRPr sz="1500"/>
             </a:lvl4pPr>
             <a:lvl5pPr>
-              <a:defRPr sz="2000"/>
+              <a:defRPr sz="1500"/>
             </a:lvl5pPr>
             <a:lvl6pPr>
-              <a:defRPr sz="2000"/>
+              <a:defRPr sz="1500"/>
             </a:lvl6pPr>
             <a:lvl7pPr>
-              <a:defRPr sz="2000"/>
+              <a:defRPr sz="1500"/>
             </a:lvl7pPr>
             <a:lvl8pPr>
-              <a:defRPr sz="2000"/>
+              <a:defRPr sz="1500"/>
             </a:lvl8pPr>
             <a:lvl9pPr>
-              <a:defRPr sz="2000"/>
+              <a:defRPr sz="1500"/>
             </a:lvl9pPr>
           </a:lstStyle>
           <a:p>
             <a:pPr lvl="0"/>
             <a:r>
-              <a:rPr lang="en-US" smtClean="0"/>
+              <a:rPr lang="en-US"/>
               <a:t>Click to edit Master text styles</a:t>
             </a:r>
           </a:p>
           <a:p>
             <a:pPr lvl="1"/>
             <a:r>
-              <a:rPr lang="en-US" smtClean="0"/>
+              <a:rPr lang="en-US"/>
               <a:t>Second level</a:t>
             </a:r>
           </a:p>
           <a:p>
             <a:pPr lvl="2"/>
             <a:r>
-              <a:rPr lang="en-US" smtClean="0"/>
+              <a:rPr lang="en-US"/>
               <a:t>Third level</a:t>
             </a:r>
           </a:p>
           <a:p>
             <a:pPr lvl="3"/>
             <a:r>
-              <a:rPr lang="en-US" smtClean="0"/>
+              <a:rPr lang="en-US"/>
               <a:t>Fourth level</a:t>
             </a:r>
           </a:p>
           <a:p>
             <a:pPr lvl="4"/>
             <a:r>
-              <a:rPr lang="en-US" smtClean="0"/>
+              <a:rPr lang="en-US"/>
               <a:t>Fifth level</a:t>
             </a:r>
-            <a:endParaRPr lang="en-US"/>
           </a:p>
         </p:txBody>
       </p:sp>
@@ -3243,8 +3286,8 @@
         </p:nvSpPr>
         <p:spPr>
           <a:xfrm>
-            <a:off x="457200" y="1435100"/>
-            <a:ext cx="3008313" cy="4691063"/>
+            <a:off x="457201" y="1076326"/>
+            <a:ext cx="3008313" cy="3518297"/>
           </a:xfrm>
         </p:spPr>
         <p:txBody>
@@ -3252,68 +3295,68 @@
           <a:lstStyle>
             <a:lvl1pPr marL="0" indent="0">
               <a:buNone/>
-              <a:defRPr sz="1400"/>
+              <a:defRPr sz="1050"/>
             </a:lvl1pPr>
-            <a:lvl2pPr marL="457200" indent="0">
-              <a:buNone/>
-              <a:defRPr sz="1200"/>
+            <a:lvl2pPr marL="342900" indent="0">
+              <a:buNone/>
+              <a:defRPr sz="900"/>
             </a:lvl2pPr>
-            <a:lvl3pPr marL="914400" indent="0">
-              <a:buNone/>
-              <a:defRPr sz="1000"/>
+            <a:lvl3pPr marL="685800" indent="0">
+              <a:buNone/>
+              <a:defRPr sz="750"/>
             </a:lvl3pPr>
-            <a:lvl4pPr marL="1371600" indent="0">
-              <a:buNone/>
-              <a:defRPr sz="900"/>
+            <a:lvl4pPr marL="1028700" indent="0">
+              <a:buNone/>
+              <a:defRPr sz="675"/>
             </a:lvl4pPr>
-            <a:lvl5pPr marL="1828800" indent="0">
-              <a:buNone/>
-              <a:defRPr sz="900"/>
+            <a:lvl5pPr marL="1371600" indent="0">
+              <a:buNone/>
+              <a:defRPr sz="675"/>
             </a:lvl5pPr>
-            <a:lvl6pPr marL="2286000" indent="0">
-              <a:buNone/>
-              <a:defRPr sz="900"/>
+            <a:lvl6pPr marL="1714500" indent="0">
+              <a:buNone/>
+              <a:defRPr sz="675"/>
             </a:lvl6pPr>
-            <a:lvl7pPr marL="2743200" indent="0">
-              <a:buNone/>
-              <a:defRPr sz="900"/>
+            <a:lvl7pPr marL="2057400" indent="0">
+              <a:buNone/>
+              <a:defRPr sz="675"/>
             </a:lvl7pPr>
-            <a:lvl8pPr marL="3200400" indent="0">
-              <a:buNone/>
-              <a:defRPr sz="900"/>
+            <a:lvl8pPr marL="2400300" indent="0">
+              <a:buNone/>
+              <a:defRPr sz="675"/>
             </a:lvl8pPr>
-            <a:lvl9pPr marL="3657600" indent="0">
-              <a:buNone/>
-              <a:defRPr sz="900"/>
+            <a:lvl9pPr marL="2743200" indent="0">
+              <a:buNone/>
+              <a:defRPr sz="675"/>
             </a:lvl9pPr>
           </a:lstStyle>
           <a:p>
             <a:pPr lvl="0"/>
             <a:r>
+              <a:rPr lang="en-US"/>
+              <a:t>Click to edit Master text styles</a:t>
+            </a:r>
+          </a:p>
+        </p:txBody>
+      </p:sp>
+      <p:sp>
+        <p:nvSpPr>
+          <p:cNvPr id="5" name="Date Placeholder 4"/>
+          <p:cNvSpPr>
+            <a:spLocks noGrp="1"/>
+          </p:cNvSpPr>
+          <p:nvPr>
+            <p:ph type="dt" sz="half" idx="10"/>
+          </p:nvPr>
+        </p:nvSpPr>
+        <p:spPr/>
+        <p:txBody>
+          <a:bodyPr/>
+          <a:lstStyle/>
+          <a:p>
+            <a:fld id="{241EB5C9-1307-BA42-ABA2-0BC069CD8E7F}" type="datetimeFigureOut">
               <a:rPr lang="en-US" smtClean="0"/>
-              <a:t>Click to edit Master text styles</a:t>
-            </a:r>
-          </a:p>
-        </p:txBody>
-      </p:sp>
-      <p:sp>
-        <p:nvSpPr>
-          <p:cNvPr id="5" name="Date Placeholder 4"/>
-          <p:cNvSpPr>
-            <a:spLocks noGrp="1"/>
-          </p:cNvSpPr>
-          <p:nvPr>
-            <p:ph type="dt" sz="half" idx="10"/>
-          </p:nvPr>
-        </p:nvSpPr>
-        <p:spPr/>
-        <p:txBody>
-          <a:bodyPr/>
-          <a:lstStyle/>
-          <a:p>
-            <a:fld id="{5BCAD085-E8A6-8845-BD4E-CB4CCA059FC4}" type="datetimeFigureOut">
-              <a:rPr lang="en-US" smtClean="0"/>
-              <a:t>1/27/13</a:t>
+              <a:t>1/2/22</a:t>
             </a:fld>
             <a:endParaRPr lang="en-US"/>
           </a:p>
@@ -3353,7 +3396,7 @@
           <a:bodyPr/>
           <a:lstStyle/>
           <a:p>
-            <a:fld id="{C1FF6DA9-008F-8B48-92A6-B652298478BF}" type="slidenum">
+            <a:fld id="{C5EF2332-01BF-834F-8236-50238282D533}" type="slidenum">
               <a:rPr lang="en-US" smtClean="0"/>
               <a:t>‹#›</a:t>
             </a:fld>
@@ -3364,7 +3407,7 @@
     </p:spTree>
     <p:extLst>
       <p:ext uri="{BB962C8B-B14F-4D97-AF65-F5344CB8AC3E}">
-        <p14:creationId xmlns:p14="http://schemas.microsoft.com/office/powerpoint/2010/main" val="1840726560"/>
+        <p14:creationId xmlns:p14="http://schemas.microsoft.com/office/powerpoint/2010/main" val="3540895647"/>
       </p:ext>
     </p:extLst>
   </p:cSld>
@@ -3403,23 +3446,22 @@
         </p:nvSpPr>
         <p:spPr>
           <a:xfrm>
-            <a:off x="1792288" y="4800600"/>
-            <a:ext cx="5486400" cy="566738"/>
+            <a:off x="1792288" y="3600450"/>
+            <a:ext cx="5486400" cy="425054"/>
           </a:xfrm>
         </p:spPr>
         <p:txBody>
           <a:bodyPr anchor="b"/>
           <a:lstStyle>
             <a:lvl1pPr algn="l">
-              <a:defRPr sz="2000" b="1"/>
+              <a:defRPr sz="1500" b="1"/>
             </a:lvl1pPr>
           </a:lstStyle>
           <a:p>
             <a:r>
-              <a:rPr lang="en-US" smtClean="0"/>
+              <a:rPr lang="en-US"/>
               <a:t>Click to edit Master title style</a:t>
             </a:r>
-            <a:endParaRPr lang="en-US"/>
           </a:p>
         </p:txBody>
       </p:sp>
@@ -3435,8 +3477,8 @@
         </p:nvSpPr>
         <p:spPr>
           <a:xfrm>
-            <a:off x="1792288" y="612775"/>
-            <a:ext cx="5486400" cy="4114800"/>
+            <a:off x="1792288" y="459581"/>
+            <a:ext cx="5486400" cy="3086100"/>
           </a:xfrm>
         </p:spPr>
         <p:txBody>
@@ -3444,39 +3486,39 @@
           <a:lstStyle>
             <a:lvl1pPr marL="0" indent="0">
               <a:buNone/>
-              <a:defRPr sz="3200"/>
+              <a:defRPr sz="2400"/>
             </a:lvl1pPr>
-            <a:lvl2pPr marL="457200" indent="0">
-              <a:buNone/>
-              <a:defRPr sz="2800"/>
+            <a:lvl2pPr marL="342900" indent="0">
+              <a:buNone/>
+              <a:defRPr sz="2100"/>
             </a:lvl2pPr>
-            <a:lvl3pPr marL="914400" indent="0">
-              <a:buNone/>
-              <a:defRPr sz="2400"/>
+            <a:lvl3pPr marL="685800" indent="0">
+              <a:buNone/>
+              <a:defRPr sz="1800"/>
             </a:lvl3pPr>
-            <a:lvl4pPr marL="1371600" indent="0">
-              <a:buNone/>
-              <a:defRPr sz="2000"/>
+            <a:lvl4pPr marL="1028700" indent="0">
+              <a:buNone/>
+              <a:defRPr sz="1500"/>
             </a:lvl4pPr>
-            <a:lvl5pPr marL="1828800" indent="0">
-              <a:buNone/>
-              <a:defRPr sz="2000"/>
+            <a:lvl5pPr marL="1371600" indent="0">
+              <a:buNone/>
+              <a:defRPr sz="1500"/>
             </a:lvl5pPr>
-            <a:lvl6pPr marL="2286000" indent="0">
-              <a:buNone/>
-              <a:defRPr sz="2000"/>
+            <a:lvl6pPr marL="1714500" indent="0">
+              <a:buNone/>
+              <a:defRPr sz="1500"/>
             </a:lvl6pPr>
-            <a:lvl7pPr marL="2743200" indent="0">
-              <a:buNone/>
-              <a:defRPr sz="2000"/>
+            <a:lvl7pPr marL="2057400" indent="0">
+              <a:buNone/>
+              <a:defRPr sz="1500"/>
             </a:lvl7pPr>
-            <a:lvl8pPr marL="3200400" indent="0">
-              <a:buNone/>
-              <a:defRPr sz="2000"/>
+            <a:lvl8pPr marL="2400300" indent="0">
+              <a:buNone/>
+              <a:defRPr sz="1500"/>
             </a:lvl8pPr>
-            <a:lvl9pPr marL="3657600" indent="0">
-              <a:buNone/>
-              <a:defRPr sz="2000"/>
+            <a:lvl9pPr marL="2743200" indent="0">
+              <a:buNone/>
+              <a:defRPr sz="1500"/>
             </a:lvl9pPr>
           </a:lstStyle>
           <a:p>
@@ -3496,8 +3538,8 @@
         </p:nvSpPr>
         <p:spPr>
           <a:xfrm>
-            <a:off x="1792288" y="5367338"/>
-            <a:ext cx="5486400" cy="804862"/>
+            <a:off x="1792288" y="4025503"/>
+            <a:ext cx="5486400" cy="603647"/>
           </a:xfrm>
         </p:spPr>
         <p:txBody>
@@ -3505,68 +3547,68 @@
           <a:lstStyle>
             <a:lvl1pPr marL="0" indent="0">
               <a:buNone/>
-              <a:defRPr sz="1400"/>
+              <a:defRPr sz="1050"/>
             </a:lvl1pPr>
-            <a:lvl2pPr marL="457200" indent="0">
-              <a:buNone/>
-              <a:defRPr sz="1200"/>
+            <a:lvl2pPr marL="342900" indent="0">
+              <a:buNone/>
+              <a:defRPr sz="900"/>
             </a:lvl2pPr>
-            <a:lvl3pPr marL="914400" indent="0">
-              <a:buNone/>
-              <a:defRPr sz="1000"/>
+            <a:lvl3pPr marL="685800" indent="0">
+              <a:buNone/>
+              <a:defRPr sz="750"/>
             </a:lvl3pPr>
-            <a:lvl4pPr marL="1371600" indent="0">
-              <a:buNone/>
-              <a:defRPr sz="900"/>
+            <a:lvl4pPr marL="1028700" indent="0">
+              <a:buNone/>
+              <a:defRPr sz="675"/>
             </a:lvl4pPr>
-            <a:lvl5pPr marL="1828800" indent="0">
-              <a:buNone/>
-              <a:defRPr sz="900"/>
+            <a:lvl5pPr marL="1371600" indent="0">
+              <a:buNone/>
+              <a:defRPr sz="675"/>
             </a:lvl5pPr>
-            <a:lvl6pPr marL="2286000" indent="0">
-              <a:buNone/>
-              <a:defRPr sz="900"/>
+            <a:lvl6pPr marL="1714500" indent="0">
+              <a:buNone/>
+              <a:defRPr sz="675"/>
             </a:lvl6pPr>
-            <a:lvl7pPr marL="2743200" indent="0">
-              <a:buNone/>
-              <a:defRPr sz="900"/>
+            <a:lvl7pPr marL="2057400" indent="0">
+              <a:buNone/>
+              <a:defRPr sz="675"/>
             </a:lvl7pPr>
-            <a:lvl8pPr marL="3200400" indent="0">
-              <a:buNone/>
-              <a:defRPr sz="900"/>
+            <a:lvl8pPr marL="2400300" indent="0">
+              <a:buNone/>
+              <a:defRPr sz="675"/>
             </a:lvl8pPr>
-            <a:lvl9pPr marL="3657600" indent="0">
-              <a:buNone/>
-              <a:defRPr sz="900"/>
+            <a:lvl9pPr marL="2743200" indent="0">
+              <a:buNone/>
+              <a:defRPr sz="675"/>
             </a:lvl9pPr>
           </a:lstStyle>
           <a:p>
             <a:pPr lvl="0"/>
             <a:r>
+              <a:rPr lang="en-US"/>
+              <a:t>Click to edit Master text styles</a:t>
+            </a:r>
+          </a:p>
+        </p:txBody>
+      </p:sp>
+      <p:sp>
+        <p:nvSpPr>
+          <p:cNvPr id="5" name="Date Placeholder 4"/>
+          <p:cNvSpPr>
+            <a:spLocks noGrp="1"/>
+          </p:cNvSpPr>
+          <p:nvPr>
+            <p:ph type="dt" sz="half" idx="10"/>
+          </p:nvPr>
+        </p:nvSpPr>
+        <p:spPr/>
+        <p:txBody>
+          <a:bodyPr/>
+          <a:lstStyle/>
+          <a:p>
+            <a:fld id="{241EB5C9-1307-BA42-ABA2-0BC069CD8E7F}" type="datetimeFigureOut">
               <a:rPr lang="en-US" smtClean="0"/>
-              <a:t>Click to edit Master text styles</a:t>
-            </a:r>
-          </a:p>
-        </p:txBody>
-      </p:sp>
-      <p:sp>
-        <p:nvSpPr>
-          <p:cNvPr id="5" name="Date Placeholder 4"/>
-          <p:cNvSpPr>
-            <a:spLocks noGrp="1"/>
-          </p:cNvSpPr>
-          <p:nvPr>
-            <p:ph type="dt" sz="half" idx="10"/>
-          </p:nvPr>
-        </p:nvSpPr>
-        <p:spPr/>
-        <p:txBody>
-          <a:bodyPr/>
-          <a:lstStyle/>
-          <a:p>
-            <a:fld id="{5BCAD085-E8A6-8845-BD4E-CB4CCA059FC4}" type="datetimeFigureOut">
-              <a:rPr lang="en-US" smtClean="0"/>
-              <a:t>1/27/13</a:t>
+              <a:t>1/2/22</a:t>
             </a:fld>
             <a:endParaRPr lang="en-US"/>
           </a:p>
@@ -3606,7 +3648,7 @@
           <a:bodyPr/>
           <a:lstStyle/>
           <a:p>
-            <a:fld id="{C1FF6DA9-008F-8B48-92A6-B652298478BF}" type="slidenum">
+            <a:fld id="{C5EF2332-01BF-834F-8236-50238282D533}" type="slidenum">
               <a:rPr lang="en-US" smtClean="0"/>
               <a:t>‹#›</a:t>
             </a:fld>
@@ -3617,7 +3659,7 @@
     </p:spTree>
     <p:extLst>
       <p:ext uri="{BB962C8B-B14F-4D97-AF65-F5344CB8AC3E}">
-        <p14:creationId xmlns:p14="http://schemas.microsoft.com/office/powerpoint/2010/main" val="3889236939"/>
+        <p14:creationId xmlns:p14="http://schemas.microsoft.com/office/powerpoint/2010/main" val="3566899855"/>
       </p:ext>
     </p:extLst>
   </p:cSld>
@@ -3628,7 +3670,7 @@
 </file>
 
 <file path=ppt/slideMasters/slideMaster1.xml><?xml version="1.0" encoding="utf-8"?>
-<p:sldMaster xmlns:a="http://schemas.openxmlformats.org/drawingml/2006/main" xmlns:r="http://schemas.openxmlformats.org/officeDocument/2006/relationships" xmlns:p="http://schemas.openxmlformats.org/presentationml/2006/main">
+<p:sldMaster xmlns:a="http://schemas.openxmlformats.org/drawingml/2006/main" xmlns:p="http://schemas.openxmlformats.org/presentationml/2006/main" xmlns:r="http://schemas.openxmlformats.org/officeDocument/2006/relationships">
   <p:cSld>
     <p:bg>
       <p:bgRef idx="1001">
@@ -3661,24 +3703,23 @@
         </p:nvSpPr>
         <p:spPr>
           <a:xfrm>
-            <a:off x="457200" y="274638"/>
-            <a:ext cx="8229600" cy="1143000"/>
+            <a:off x="457200" y="205979"/>
+            <a:ext cx="8229600" cy="857250"/>
           </a:xfrm>
           <a:prstGeom prst="rect">
             <a:avLst/>
           </a:prstGeom>
         </p:spPr>
         <p:txBody>
-          <a:bodyPr vert="horz" lIns="91440" tIns="45720" rIns="91440" bIns="45720" rtlCol="0" anchor="ctr">
+          <a:bodyPr anchor="ctr" bIns="45720" lIns="91440" rIns="91440" rtlCol="0" tIns="45720" vert="horz">
             <a:normAutofit/>
           </a:bodyPr>
           <a:lstStyle/>
           <a:p>
             <a:r>
-              <a:rPr lang="en-US" smtClean="0"/>
+              <a:rPr lang="en-US"/>
               <a:t>Click to edit Master title style</a:t>
             </a:r>
-            <a:endParaRPr lang="en-US"/>
           </a:p>
         </p:txBody>
       </p:sp>
@@ -3689,58 +3730,57 @@
             <a:spLocks noGrp="1"/>
           </p:cNvSpPr>
           <p:nvPr>
-            <p:ph type="body" idx="1"/>
+            <p:ph idx="1" type="body"/>
           </p:nvPr>
         </p:nvSpPr>
         <p:spPr>
           <a:xfrm>
-            <a:off x="457200" y="1600200"/>
-            <a:ext cx="8229600" cy="4525963"/>
+            <a:off x="457200" y="1200151"/>
+            <a:ext cx="8229600" cy="3394472"/>
           </a:xfrm>
           <a:prstGeom prst="rect">
             <a:avLst/>
           </a:prstGeom>
         </p:spPr>
         <p:txBody>
-          <a:bodyPr vert="horz" lIns="91440" tIns="45720" rIns="91440" bIns="45720" rtlCol="0">
+          <a:bodyPr bIns="45720" lIns="91440" rIns="91440" rtlCol="0" tIns="45720" vert="horz">
             <a:normAutofit/>
           </a:bodyPr>
           <a:lstStyle/>
           <a:p>
             <a:pPr lvl="0"/>
             <a:r>
-              <a:rPr lang="en-US" smtClean="0"/>
+              <a:rPr lang="en-US"/>
               <a:t>Click to edit Master text styles</a:t>
             </a:r>
           </a:p>
           <a:p>
             <a:pPr lvl="1"/>
             <a:r>
-              <a:rPr lang="en-US" smtClean="0"/>
+              <a:rPr lang="en-US"/>
               <a:t>Second level</a:t>
             </a:r>
           </a:p>
           <a:p>
             <a:pPr lvl="2"/>
             <a:r>
-              <a:rPr lang="en-US" smtClean="0"/>
+              <a:rPr lang="en-US"/>
               <a:t>Third level</a:t>
             </a:r>
           </a:p>
           <a:p>
             <a:pPr lvl="3"/>
             <a:r>
-              <a:rPr lang="en-US" smtClean="0"/>
+              <a:rPr lang="en-US"/>
               <a:t>Fourth level</a:t>
             </a:r>
           </a:p>
           <a:p>
             <a:pPr lvl="4"/>
             <a:r>
-              <a:rPr lang="en-US" smtClean="0"/>
+              <a:rPr lang="en-US"/>
               <a:t>Fifth level</a:t>
             </a:r>
-            <a:endParaRPr lang="en-US"/>
           </a:p>
         </p:txBody>
       </p:sp>
@@ -3751,23 +3791,23 @@
             <a:spLocks noGrp="1"/>
           </p:cNvSpPr>
           <p:nvPr>
-            <p:ph type="dt" sz="half" idx="2"/>
+            <p:ph idx="2" sz="half" type="dt"/>
           </p:nvPr>
         </p:nvSpPr>
         <p:spPr>
           <a:xfrm>
-            <a:off x="457200" y="6356350"/>
-            <a:ext cx="2133600" cy="365125"/>
+            <a:off x="457200" y="4767263"/>
+            <a:ext cx="2133600" cy="273844"/>
           </a:xfrm>
           <a:prstGeom prst="rect">
             <a:avLst/>
           </a:prstGeom>
         </p:spPr>
         <p:txBody>
-          <a:bodyPr vert="horz" lIns="91440" tIns="45720" rIns="91440" bIns="45720" rtlCol="0" anchor="ctr"/>
+          <a:bodyPr anchor="ctr" bIns="45720" lIns="91440" rIns="91440" rtlCol="0" tIns="45720" vert="horz"/>
           <a:lstStyle>
             <a:lvl1pPr algn="l">
-              <a:defRPr sz="1200">
+              <a:defRPr sz="900">
                 <a:solidFill>
                   <a:schemeClr val="tx1">
                     <a:tint val="75000"/>
@@ -3777,9 +3817,9 @@
             </a:lvl1pPr>
           </a:lstStyle>
           <a:p>
-            <a:fld id="{5BCAD085-E8A6-8845-BD4E-CB4CCA059FC4}" type="datetimeFigureOut">
+            <a:fld id="{241EB5C9-1307-BA42-ABA2-0BC069CD8E7F}" type="datetimeFigureOut">
               <a:rPr lang="en-US" smtClean="0"/>
-              <a:t>1/27/13</a:t>
+              <a:t>1/2/22</a:t>
             </a:fld>
             <a:endParaRPr lang="en-US"/>
           </a:p>
@@ -3792,23 +3832,23 @@
             <a:spLocks noGrp="1"/>
           </p:cNvSpPr>
           <p:nvPr>
-            <p:ph type="ftr" sz="quarter" idx="3"/>
+            <p:ph idx="3" sz="quarter" type="ftr"/>
           </p:nvPr>
         </p:nvSpPr>
         <p:spPr>
           <a:xfrm>
-            <a:off x="3124200" y="6356350"/>
-            <a:ext cx="2895600" cy="365125"/>
+            <a:off x="3124200" y="4767263"/>
+            <a:ext cx="2895600" cy="273844"/>
           </a:xfrm>
           <a:prstGeom prst="rect">
             <a:avLst/>
           </a:prstGeom>
         </p:spPr>
         <p:txBody>
-          <a:bodyPr vert="horz" lIns="91440" tIns="45720" rIns="91440" bIns="45720" rtlCol="0" anchor="ctr"/>
+          <a:bodyPr anchor="ctr" bIns="45720" lIns="91440" rIns="91440" rtlCol="0" tIns="45720" vert="horz"/>
           <a:lstStyle>
             <a:lvl1pPr algn="ctr">
-              <a:defRPr sz="1200">
+              <a:defRPr sz="900">
                 <a:solidFill>
                   <a:schemeClr val="tx1">
                     <a:tint val="75000"/>
@@ -3829,23 +3869,23 @@
             <a:spLocks noGrp="1"/>
           </p:cNvSpPr>
           <p:nvPr>
-            <p:ph type="sldNum" sz="quarter" idx="4"/>
+            <p:ph idx="4" sz="quarter" type="sldNum"/>
           </p:nvPr>
         </p:nvSpPr>
         <p:spPr>
           <a:xfrm>
-            <a:off x="6553200" y="6356350"/>
-            <a:ext cx="2133600" cy="365125"/>
+            <a:off x="6553200" y="4767263"/>
+            <a:ext cx="2133600" cy="273844"/>
           </a:xfrm>
           <a:prstGeom prst="rect">
             <a:avLst/>
           </a:prstGeom>
         </p:spPr>
         <p:txBody>
-          <a:bodyPr vert="horz" lIns="91440" tIns="45720" rIns="91440" bIns="45720" rtlCol="0" anchor="ctr"/>
+          <a:bodyPr anchor="ctr" bIns="45720" lIns="91440" rIns="91440" rtlCol="0" tIns="45720" vert="horz"/>
           <a:lstStyle>
             <a:lvl1pPr algn="r">
-              <a:defRPr sz="1200">
+              <a:defRPr sz="900">
                 <a:solidFill>
                   <a:schemeClr val="tx1">
                     <a:tint val="75000"/>
@@ -3855,7 +3895,7 @@
             </a:lvl1pPr>
           </a:lstStyle>
           <a:p>
-            <a:fld id="{C1FF6DA9-008F-8B48-92A6-B652298478BF}" type="slidenum">
+            <a:fld id="{C5EF2332-01BF-834F-8236-50238282D533}" type="slidenum">
               <a:rPr lang="en-US" smtClean="0"/>
               <a:t>‹#›</a:t>
             </a:fld>
@@ -3866,11 +3906,11 @@
     </p:spTree>
     <p:extLst>
       <p:ext uri="{BB962C8B-B14F-4D97-AF65-F5344CB8AC3E}">
-        <p14:creationId xmlns:p14="http://schemas.microsoft.com/office/powerpoint/2010/main" val="2209977519"/>
+        <p14:creationId xmlns:p14="http://schemas.microsoft.com/office/powerpoint/2010/main" val="3676200875"/>
       </p:ext>
     </p:extLst>
   </p:cSld>
-  <p:clrMap bg1="lt1" tx1="dk1" bg2="lt2" tx2="dk2" accent1="accent1" accent2="accent2" accent3="accent3" accent4="accent4" accent5="accent5" accent6="accent6" hlink="hlink" folHlink="folHlink"/>
+  <p:clrMap accent1="accent1" accent2="accent2" accent3="accent3" accent4="accent4" accent5="accent5" accent6="accent6" bg1="lt1" bg2="lt2" folHlink="folHlink" hlink="hlink" tx1="dk1" tx2="dk2"/>
   <p:sldLayoutIdLst>
     <p:sldLayoutId id="2147483649" r:id="rId1"/>
     <p:sldLayoutId id="2147483650" r:id="rId2"/>
@@ -3886,12 +3926,12 @@
   </p:sldLayoutIdLst>
   <p:txStyles>
     <p:titleStyle>
-      <a:lvl1pPr algn="ctr" defTabSz="457200" rtl="0" eaLnBrk="1" latinLnBrk="0" hangingPunct="1">
+      <a:lvl1pPr algn="ctr" defTabSz="342900" eaLnBrk="1" hangingPunct="1" latinLnBrk="0" rtl="0">
         <a:spcBef>
           <a:spcPct val="0"/>
         </a:spcBef>
         <a:buNone/>
-        <a:defRPr sz="4400" kern="1200">
+        <a:defRPr kern="1200" sz="3300">
           <a:solidFill>
             <a:schemeClr val="tx1"/>
           </a:solidFill>
@@ -3902,13 +3942,13 @@
       </a:lvl1pPr>
     </p:titleStyle>
     <p:bodyStyle>
-      <a:lvl1pPr marL="342900" indent="-342900" algn="l" defTabSz="457200" rtl="0" eaLnBrk="1" latinLnBrk="0" hangingPunct="1">
+      <a:lvl1pPr algn="l" defTabSz="342900" eaLnBrk="1" hangingPunct="1" indent="-342900" latinLnBrk="0" marL="342900" rtl="0">
         <a:spcBef>
           <a:spcPct val="20000"/>
         </a:spcBef>
         <a:buFont typeface="Arial"/>
         <a:buChar char="•"/>
-        <a:defRPr sz="3200" kern="1200">
+        <a:defRPr kern="1200" sz="2400">
           <a:solidFill>
             <a:schemeClr val="tx1"/>
           </a:solidFill>
@@ -3917,13 +3957,13 @@
           <a:cs typeface="+mn-cs"/>
         </a:defRPr>
       </a:lvl1pPr>
-      <a:lvl2pPr marL="742950" indent="-285750" algn="l" defTabSz="457200" rtl="0" eaLnBrk="1" latinLnBrk="0" hangingPunct="1">
+      <a:lvl2pPr algn="l" defTabSz="342900" eaLnBrk="1" hangingPunct="1" indent="-342900" latinLnBrk="0" marL="685800" rtl="0">
         <a:spcBef>
           <a:spcPct val="20000"/>
         </a:spcBef>
         <a:buFont typeface="Arial"/>
         <a:buChar char="–"/>
-        <a:defRPr sz="2800" kern="1200">
+        <a:defRPr kern="1200" sz="2100">
           <a:solidFill>
             <a:schemeClr val="tx1"/>
           </a:solidFill>
@@ -3932,13 +3972,13 @@
           <a:cs typeface="+mn-cs"/>
         </a:defRPr>
       </a:lvl2pPr>
-      <a:lvl3pPr marL="1143000" indent="-228600" algn="l" defTabSz="457200" rtl="0" eaLnBrk="1" latinLnBrk="0" hangingPunct="1">
+      <a:lvl3pPr algn="l" defTabSz="342900" eaLnBrk="1" hangingPunct="1" indent="-342900" latinLnBrk="0" marL="1028700" rtl="0">
         <a:spcBef>
           <a:spcPct val="20000"/>
         </a:spcBef>
         <a:buFont typeface="Arial"/>
         <a:buChar char="•"/>
-        <a:defRPr sz="2400" kern="1200">
+        <a:defRPr kern="1200" sz="1800">
           <a:solidFill>
             <a:schemeClr val="tx1"/>
           </a:solidFill>
@@ -3947,13 +3987,13 @@
           <a:cs typeface="+mn-cs"/>
         </a:defRPr>
       </a:lvl3pPr>
-      <a:lvl4pPr marL="1600200" indent="-228600" algn="l" defTabSz="457200" rtl="0" eaLnBrk="1" latinLnBrk="0" hangingPunct="1">
+      <a:lvl4pPr algn="l" defTabSz="342900" eaLnBrk="1" hangingPunct="1" indent="-342900" latinLnBrk="0" marL="1371600" rtl="0">
         <a:spcBef>
           <a:spcPct val="20000"/>
         </a:spcBef>
         <a:buFont typeface="Arial"/>
         <a:buChar char="–"/>
-        <a:defRPr sz="2000" kern="1200">
+        <a:defRPr kern="1200" sz="1500">
           <a:solidFill>
             <a:schemeClr val="tx1"/>
           </a:solidFill>
@@ -3962,13 +4002,13 @@
           <a:cs typeface="+mn-cs"/>
         </a:defRPr>
       </a:lvl4pPr>
-      <a:lvl5pPr marL="2057400" indent="-228600" algn="l" defTabSz="457200" rtl="0" eaLnBrk="1" latinLnBrk="0" hangingPunct="1">
+      <a:lvl5pPr algn="l" defTabSz="342900" eaLnBrk="1" hangingPunct="1" indent="-342900" latinLnBrk="0" marL="1714500" rtl="0">
         <a:spcBef>
           <a:spcPct val="20000"/>
         </a:spcBef>
         <a:buFont typeface="Arial"/>
         <a:buChar char="»"/>
-        <a:defRPr sz="2000" kern="1200">
+        <a:defRPr kern="1200" sz="1500">
           <a:solidFill>
             <a:schemeClr val="tx1"/>
           </a:solidFill>
@@ -3977,13 +4017,13 @@
           <a:cs typeface="+mn-cs"/>
         </a:defRPr>
       </a:lvl5pPr>
-      <a:lvl6pPr marL="2514600" indent="-228600" algn="l" defTabSz="457200" rtl="0" eaLnBrk="1" latinLnBrk="0" hangingPunct="1">
+      <a:lvl6pPr algn="l" defTabSz="342900" eaLnBrk="1" hangingPunct="1" indent="-342900" latinLnBrk="0" marL="2057400" rtl="0">
         <a:spcBef>
           <a:spcPct val="20000"/>
         </a:spcBef>
         <a:buFont typeface="Arial"/>
         <a:buChar char="•"/>
-        <a:defRPr sz="2000" kern="1200">
+        <a:defRPr kern="1200" sz="1500">
           <a:solidFill>
             <a:schemeClr val="tx1"/>
           </a:solidFill>
@@ -3992,13 +4032,13 @@
           <a:cs typeface="+mn-cs"/>
         </a:defRPr>
       </a:lvl6pPr>
-      <a:lvl7pPr marL="2971800" indent="-228600" algn="l" defTabSz="457200" rtl="0" eaLnBrk="1" latinLnBrk="0" hangingPunct="1">
+      <a:lvl7pPr algn="l" defTabSz="342900" eaLnBrk="1" hangingPunct="1" indent="-342900" latinLnBrk="0" marL="2400300" rtl="0">
         <a:spcBef>
           <a:spcPct val="20000"/>
         </a:spcBef>
         <a:buFont typeface="Arial"/>
         <a:buChar char="•"/>
-        <a:defRPr sz="2000" kern="1200">
+        <a:defRPr kern="1200" sz="1500">
           <a:solidFill>
             <a:schemeClr val="tx1"/>
           </a:solidFill>
@@ -4007,13 +4047,13 @@
           <a:cs typeface="+mn-cs"/>
         </a:defRPr>
       </a:lvl7pPr>
-      <a:lvl8pPr marL="3429000" indent="-228600" algn="l" defTabSz="457200" rtl="0" eaLnBrk="1" latinLnBrk="0" hangingPunct="1">
+      <a:lvl8pPr algn="l" defTabSz="342900" eaLnBrk="1" hangingPunct="1" indent="-342900" latinLnBrk="0" marL="2743200" rtl="0">
         <a:spcBef>
           <a:spcPct val="20000"/>
         </a:spcBef>
         <a:buFont typeface="Arial"/>
         <a:buChar char="•"/>
-        <a:defRPr sz="2000" kern="1200">
+        <a:defRPr kern="1200" sz="1500">
           <a:solidFill>
             <a:schemeClr val="tx1"/>
           </a:solidFill>
@@ -4022,13 +4062,13 @@
           <a:cs typeface="+mn-cs"/>
         </a:defRPr>
       </a:lvl8pPr>
-      <a:lvl9pPr marL="3886200" indent="-228600" algn="l" defTabSz="457200" rtl="0" eaLnBrk="1" latinLnBrk="0" hangingPunct="1">
+      <a:lvl9pPr algn="l" defTabSz="342900" eaLnBrk="1" hangingPunct="1" indent="-342900" latinLnBrk="0" marL="3086100" rtl="0">
         <a:spcBef>
           <a:spcPct val="20000"/>
         </a:spcBef>
         <a:buFont typeface="Arial"/>
         <a:buChar char="•"/>
-        <a:defRPr sz="2000" kern="1200">
+        <a:defRPr kern="1200" sz="1500">
           <a:solidFill>
             <a:schemeClr val="tx1"/>
           </a:solidFill>
@@ -4042,8 +4082,8 @@
       <a:defPPr>
         <a:defRPr lang="en-US"/>
       </a:defPPr>
-      <a:lvl1pPr marL="0" algn="l" defTabSz="457200" rtl="0" eaLnBrk="1" latinLnBrk="0" hangingPunct="1">
-        <a:defRPr sz="1800" kern="1200">
+      <a:lvl1pPr algn="l" defTabSz="342900" eaLnBrk="1" hangingPunct="1" latinLnBrk="0" marL="0" rtl="0">
+        <a:defRPr kern="1200" sz="1350">
           <a:solidFill>
             <a:schemeClr val="tx1"/>
           </a:solidFill>
@@ -4052,8 +4092,8 @@
           <a:cs typeface="+mn-cs"/>
         </a:defRPr>
       </a:lvl1pPr>
-      <a:lvl2pPr marL="457200" algn="l" defTabSz="457200" rtl="0" eaLnBrk="1" latinLnBrk="0" hangingPunct="1">
-        <a:defRPr sz="1800" kern="1200">
+      <a:lvl2pPr algn="l" defTabSz="342900" eaLnBrk="1" hangingPunct="1" latinLnBrk="0" marL="342900" rtl="0">
+        <a:defRPr kern="1200" sz="1350">
           <a:solidFill>
             <a:schemeClr val="tx1"/>
           </a:solidFill>
@@ -4062,8 +4102,8 @@
           <a:cs typeface="+mn-cs"/>
         </a:defRPr>
       </a:lvl2pPr>
-      <a:lvl3pPr marL="914400" algn="l" defTabSz="457200" rtl="0" eaLnBrk="1" latinLnBrk="0" hangingPunct="1">
-        <a:defRPr sz="1800" kern="1200">
+      <a:lvl3pPr algn="l" defTabSz="342900" eaLnBrk="1" hangingPunct="1" latinLnBrk="0" marL="685800" rtl="0">
+        <a:defRPr kern="1200" sz="1350">
           <a:solidFill>
             <a:schemeClr val="tx1"/>
           </a:solidFill>
@@ -4072,8 +4112,8 @@
           <a:cs typeface="+mn-cs"/>
         </a:defRPr>
       </a:lvl3pPr>
-      <a:lvl4pPr marL="1371600" algn="l" defTabSz="457200" rtl="0" eaLnBrk="1" latinLnBrk="0" hangingPunct="1">
-        <a:defRPr sz="1800" kern="1200">
+      <a:lvl4pPr algn="l" defTabSz="342900" eaLnBrk="1" hangingPunct="1" latinLnBrk="0" marL="1028700" rtl="0">
+        <a:defRPr kern="1200" sz="1350">
           <a:solidFill>
             <a:schemeClr val="tx1"/>
           </a:solidFill>
@@ -4082,8 +4122,8 @@
           <a:cs typeface="+mn-cs"/>
         </a:defRPr>
       </a:lvl4pPr>
-      <a:lvl5pPr marL="1828800" algn="l" defTabSz="457200" rtl="0" eaLnBrk="1" latinLnBrk="0" hangingPunct="1">
-        <a:defRPr sz="1800" kern="1200">
+      <a:lvl5pPr algn="l" defTabSz="342900" eaLnBrk="1" hangingPunct="1" latinLnBrk="0" marL="1371600" rtl="0">
+        <a:defRPr kern="1200" sz="1350">
           <a:solidFill>
             <a:schemeClr val="tx1"/>
           </a:solidFill>
@@ -4092,8 +4132,8 @@
           <a:cs typeface="+mn-cs"/>
         </a:defRPr>
       </a:lvl5pPr>
-      <a:lvl6pPr marL="2286000" algn="l" defTabSz="457200" rtl="0" eaLnBrk="1" latinLnBrk="0" hangingPunct="1">
-        <a:defRPr sz="1800" kern="1200">
+      <a:lvl6pPr algn="l" defTabSz="342900" eaLnBrk="1" hangingPunct="1" latinLnBrk="0" marL="1714500" rtl="0">
+        <a:defRPr kern="1200" sz="1350">
           <a:solidFill>
             <a:schemeClr val="tx1"/>
           </a:solidFill>
@@ -4102,8 +4142,8 @@
           <a:cs typeface="+mn-cs"/>
         </a:defRPr>
       </a:lvl6pPr>
-      <a:lvl7pPr marL="2743200" algn="l" defTabSz="457200" rtl="0" eaLnBrk="1" latinLnBrk="0" hangingPunct="1">
-        <a:defRPr sz="1800" kern="1200">
+      <a:lvl7pPr algn="l" defTabSz="342900" eaLnBrk="1" hangingPunct="1" latinLnBrk="0" marL="2057400" rtl="0">
+        <a:defRPr kern="1200" sz="1350">
           <a:solidFill>
             <a:schemeClr val="tx1"/>
           </a:solidFill>
@@ -4112,8 +4152,8 @@
           <a:cs typeface="+mn-cs"/>
         </a:defRPr>
       </a:lvl7pPr>
-      <a:lvl8pPr marL="3200400" algn="l" defTabSz="457200" rtl="0" eaLnBrk="1" latinLnBrk="0" hangingPunct="1">
-        <a:defRPr sz="1800" kern="1200">
+      <a:lvl8pPr algn="l" defTabSz="342900" eaLnBrk="1" hangingPunct="1" latinLnBrk="0" marL="2400300" rtl="0">
+        <a:defRPr kern="1200" sz="1350">
           <a:solidFill>
             <a:schemeClr val="tx1"/>
           </a:solidFill>
@@ -4122,8 +4162,8 @@
           <a:cs typeface="+mn-cs"/>
         </a:defRPr>
       </a:lvl8pPr>
-      <a:lvl9pPr marL="3657600" algn="l" defTabSz="457200" rtl="0" eaLnBrk="1" latinLnBrk="0" hangingPunct="1">
-        <a:defRPr sz="1800" kern="1200">
+      <a:lvl9pPr algn="l" defTabSz="342900" eaLnBrk="1" hangingPunct="1" latinLnBrk="0" marL="2743200" rtl="0">
+        <a:defRPr kern="1200" sz="1350">
           <a:solidFill>
             <a:schemeClr val="tx1"/>
           </a:solidFill>
@@ -4138,7 +4178,7 @@
 </file>
 
 <file path=ppt/slides/slide1.xml><?xml version="1.0" encoding="utf-8"?>
-<p:sld xmlns:a="http://schemas.openxmlformats.org/drawingml/2006/main" xmlns:p="http://schemas.openxmlformats.org/presentationml/2006/main" xmlns:r="http://schemas.openxmlformats.org/officeDocument/2006/relationships">
+<p:sld xmlns:a="http://schemas.openxmlformats.org/drawingml/2006/main" xmlns:r="http://schemas.openxmlformats.org/officeDocument/2006/relationships" xmlns:p="http://schemas.openxmlformats.org/presentationml/2006/main">
   <p:cSld>
     <p:spTree>
       <p:nvGrpSpPr>
@@ -4146,41 +4186,94 @@
         <p:cNvGrpSpPr/>
         <p:nvPr/>
       </p:nvGrpSpPr>
-      <p:grpSpPr/>
-      <p:pic>
-        <p:nvPicPr>
-          <p:cNvPr id="2" name="Picture 1" descr="shot-1.png"/>
-          <p:cNvPicPr>
-            <a:picLocks noChangeAspect="1"/>
-          </p:cNvPicPr>
-          <p:nvPr/>
-        </p:nvPicPr>
-        <p:blipFill>
-          <a:blip r:embed="rId2"/>
-          <a:stretch>
-            <a:fillRect/>
-          </a:stretch>
-        </p:blipFill>
-        <p:spPr>
-          <a:xfrm>
-            <a:off x="0" y="0"/>
-            <a:ext cx="12191695" cy="6858000"/>
-          </a:xfrm>
-          <a:prstGeom prst="rect">
-            <a:avLst/>
-          </a:prstGeom>
-        </p:spPr>
-      </p:pic>
+      <p:grpSpPr>
+        <a:xfrm>
+          <a:off x="0" y="0"/>
+          <a:ext cx="0" cy="0"/>
+          <a:chOff x="0" y="0"/>
+          <a:chExt cx="0" cy="0"/>
+        </a:xfrm>
+      </p:grpSpPr>
+      <p:sp>
+        <p:nvSpPr>
+          <p:cNvPr id="2" name="Title 1"/>
+          <p:cNvSpPr>
+            <a:spLocks noGrp="1"/>
+          </p:cNvSpPr>
+          <p:nvPr>
+            <p:ph type="title"/>
+          </p:nvPr>
+        </p:nvSpPr>
+        <p:spPr/>
+        <p:txBody>
+          <a:bodyPr/>
+          <a:lstStyle/>
+          <a:p>
+            <a:pPr lvl="0" indent="0" marL="0">
+              <a:buNone/>
+            </a:pPr>
+            <a:r>
+              <a:rPr/>
+              <a:t>From mice to humans</a:t>
+            </a:r>
+          </a:p>
+        </p:txBody>
+      </p:sp>
+      <p:sp>
+        <p:nvSpPr>
+          <p:cNvPr id="3" name="Content Placeholder 2"/>
+          <p:cNvSpPr>
+            <a:spLocks noGrp="1"/>
+          </p:cNvSpPr>
+          <p:nvPr>
+            <p:ph idx="1"/>
+          </p:nvPr>
+        </p:nvSpPr>
+        <p:spPr/>
+        <p:txBody>
+          <a:bodyPr/>
+          <a:lstStyle/>
+          <a:p>
+            <a:pPr lvl="0" indent="0" marL="0">
+              <a:buNone/>
+            </a:pPr>
+            <a:r>
+              <a:rPr/>
+              <a:t>A multi-omic predictive framework for translational immunology</a:t>
+            </a:r>
+          </a:p>
+          <a:p>
+            <a:pPr lvl="0" indent="0" marL="0">
+              <a:buNone/>
+            </a:pPr>
+            <a:r>
+              <a:rPr/>
+              <a:t>Wasim Aluísio Prates-Syed · Lira AA · Cortes N · Silva JDQ · Hamaguchi B · Carvalho E · Castillo-Chávez A · Durães-Carvalho R · Cabral-Marques O · Sabino EC · Krieger JE · Hagan T · Cabral-Miranda G</a:t>
+            </a:r>
+          </a:p>
+          <a:p>
+            <a:pPr lvl="0" indent="0" marL="0">
+              <a:buNone/>
+            </a:pPr>
+            <a:r>
+              <a:rPr/>
+              <a:t>Laboratory of Genetics and Molecular Cardiology, InCor — FMUSPSeptember 2026</a:t>
+            </a:r>
+          </a:p>
+          <a:p>
+            <a:pPr lvl="0" indent="0" marL="0">
+              <a:buNone/>
+            </a:pPr>
+          </a:p>
+        </p:txBody>
+      </p:sp>
     </p:spTree>
   </p:cSld>
-  <p:clrMapOvr>
-    <a:masterClrMapping/>
-  </p:clrMapOvr>
 </p:sld>
 </file>
 
 <file path=ppt/slides/slide10.xml><?xml version="1.0" encoding="utf-8"?>
-<p:sld xmlns:a="http://schemas.openxmlformats.org/drawingml/2006/main" xmlns:p="http://schemas.openxmlformats.org/presentationml/2006/main" xmlns:r="http://schemas.openxmlformats.org/officeDocument/2006/relationships">
+<p:sld xmlns:a="http://schemas.openxmlformats.org/drawingml/2006/main" xmlns:r="http://schemas.openxmlformats.org/officeDocument/2006/relationships" xmlns:p="http://schemas.openxmlformats.org/presentationml/2006/main">
   <p:cSld>
     <p:spTree>
       <p:nvGrpSpPr>
@@ -4188,41 +4281,187 @@
         <p:cNvGrpSpPr/>
         <p:nvPr/>
       </p:nvGrpSpPr>
-      <p:grpSpPr/>
-      <p:pic>
-        <p:nvPicPr>
-          <p:cNvPr id="2" name="Picture 1" descr="shot-10.png"/>
-          <p:cNvPicPr>
-            <a:picLocks noChangeAspect="1"/>
-          </p:cNvPicPr>
-          <p:nvPr/>
-        </p:nvPicPr>
-        <p:blipFill>
-          <a:blip r:embed="rId2"/>
-          <a:stretch>
-            <a:fillRect/>
-          </a:stretch>
-        </p:blipFill>
-        <p:spPr>
-          <a:xfrm>
-            <a:off x="0" y="0"/>
-            <a:ext cx="12191695" cy="6858000"/>
-          </a:xfrm>
-          <a:prstGeom prst="rect">
-            <a:avLst/>
-          </a:prstGeom>
-        </p:spPr>
-      </p:pic>
+      <p:grpSpPr>
+        <a:xfrm>
+          <a:off x="0" y="0"/>
+          <a:ext cx="0" cy="0"/>
+          <a:chOff x="0" y="0"/>
+          <a:chExt cx="0" cy="0"/>
+        </a:xfrm>
+      </p:grpSpPr>
+      <p:sp>
+        <p:nvSpPr>
+          <p:cNvPr id="2" name="Title 1"/>
+          <p:cNvSpPr>
+            <a:spLocks noGrp="1"/>
+          </p:cNvSpPr>
+          <p:nvPr>
+            <p:ph type="title"/>
+          </p:nvPr>
+        </p:nvSpPr>
+        <p:spPr/>
+        <p:txBody>
+          <a:bodyPr/>
+          <a:lstStyle/>
+          <a:p>
+            <a:pPr lvl="0" indent="0" marL="0">
+              <a:buNone/>
+            </a:pPr>
+            <a:r>
+              <a:rPr/>
+              <a:t>07 · Result — multilayer modelling</a:t>
+            </a:r>
+          </a:p>
+        </p:txBody>
+      </p:sp>
+      <p:sp>
+        <p:nvSpPr>
+          <p:cNvPr id="3" name="Content Placeholder 2"/>
+          <p:cNvSpPr>
+            <a:spLocks noGrp="1"/>
+          </p:cNvSpPr>
+          <p:nvPr>
+            <p:ph idx="1" sz="half"/>
+          </p:nvPr>
+        </p:nvSpPr>
+        <p:spPr/>
+        <p:txBody>
+          <a:bodyPr/>
+          <a:lstStyle/>
+          <a:p>
+            <a:pPr lvl="0" indent="0" marL="0">
+              <a:buNone/>
+            </a:pPr>
+            <a:r>
+              <a:rPr/>
+              <a:t>Layers turn near-chance transfer into </a:t>
+            </a:r>
+            <a:r>
+              <a:rPr i="1"/>
+              <a:t>useful</a:t>
+            </a:r>
+            <a:r>
+              <a:rPr/>
+              <a:t> prediction</a:t>
+            </a:r>
+          </a:p>
+          <a:p>
+            <a:pPr lvl="0"/>
+            <a:r>
+              <a:rPr/>
+              <a:t>Mouse rank alone: </a:t>
+            </a:r>
+            <a:r>
+              <a:rPr b="1"/>
+              <a:t>R² = 0.001</a:t>
+            </a:r>
+            <a:r>
+              <a:rPr/>
+              <a:t> · mouse direction alone: </a:t>
+            </a:r>
+            <a:r>
+              <a:rPr b="1"/>
+              <a:t>ROC-AUC 0.511</a:t>
+            </a:r>
+            <a:r>
+              <a:rPr/>
+              <a:t> — no transfer.</a:t>
+            </a:r>
+          </a:p>
+          <a:p>
+            <a:pPr lvl="0"/>
+            <a:r>
+              <a:rPr/>
+              <a:t>evolution, TF, CRE and BTM layers → random forest </a:t>
+            </a:r>
+            <a:r>
+              <a:rPr b="1"/>
+              <a:t>R² = 0.234</a:t>
+            </a:r>
+            <a:r>
+              <a:rPr/>
+              <a:t> for human rank and </a:t>
+            </a:r>
+            <a:r>
+              <a:rPr b="1"/>
+              <a:t>ROC-AUC = 0.849</a:t>
+            </a:r>
+            <a:r>
+              <a:rPr/>
+              <a:t> for direction.</a:t>
+            </a:r>
+          </a:p>
+          <a:p>
+            <a:pPr lvl="0"/>
+            <a:r>
+              <a:rPr/>
+              <a:t>Shared vs mouse-only LEGs stay hard: lasso best by a whisker (</a:t>
+            </a:r>
+            <a:r>
+              <a:rPr b="1"/>
+              <a:t>0.617</a:t>
+            </a:r>
+            <a:r>
+              <a:rPr/>
+              <a:t> predictive / </a:t>
+            </a:r>
+            <a:r>
+              <a:rPr b="1"/>
+              <a:t>0.627</a:t>
+            </a:r>
+            <a:r>
+              <a:rPr/>
+              <a:t> explanatory).</a:t>
+            </a:r>
+          </a:p>
+          <a:p>
+            <a:pPr lvl="0" indent="0" marL="0">
+              <a:buNone/>
+            </a:pPr>
+            <a:r>
+              <a:rPr/>
+              <a:t>LOCO-CV (4 folds) · nested layers: DGE Baseline → Full + BTM 4 algorithms: linear/logistic · lasso · random forest · neural network</a:t>
+            </a:r>
+          </a:p>
+        </p:txBody>
+      </p:sp>
+      <p:sp>
+        <p:nvSpPr>
+          <p:cNvPr id="4" name="Content Placeholder 3"/>
+          <p:cNvSpPr>
+            <a:spLocks noGrp="1"/>
+          </p:cNvSpPr>
+          <p:nvPr>
+            <p:ph idx="2" sz="half"/>
+          </p:nvPr>
+        </p:nvSpPr>
+        <p:spPr/>
+        <p:txBody>
+          <a:bodyPr/>
+          <a:lstStyle/>
+          <a:p>
+            <a:pPr lvl="0" indent="0" marL="0">
+              <a:buNone/>
+            </a:pPr>
+          </a:p>
+          <a:p>
+            <a:pPr lvl="0" indent="0" marL="0">
+              <a:buNone/>
+            </a:pPr>
+            <a:r>
+              <a:rPr/>
+              <a:t>Fig. 7 — multilayer modelling: (a) layer integration workflow, (b) shared-LEG classification, (c) directional concordance and (d) human rank regression, across algorithms and feature layers.</a:t>
+            </a:r>
+          </a:p>
+        </p:txBody>
+      </p:sp>
     </p:spTree>
   </p:cSld>
-  <p:clrMapOvr>
-    <a:masterClrMapping/>
-  </p:clrMapOvr>
 </p:sld>
 </file>
 
-<file path=ppt/slides/slide2.xml><?xml version="1.0" encoding="utf-8"?>
-<p:sld xmlns:a="http://schemas.openxmlformats.org/drawingml/2006/main" xmlns:p="http://schemas.openxmlformats.org/presentationml/2006/main" xmlns:r="http://schemas.openxmlformats.org/officeDocument/2006/relationships">
+<file path=ppt/slides/slide11.xml><?xml version="1.0" encoding="utf-8"?>
+<p:sld xmlns:a="http://schemas.openxmlformats.org/drawingml/2006/main" xmlns:r="http://schemas.openxmlformats.org/officeDocument/2006/relationships" xmlns:p="http://schemas.openxmlformats.org/presentationml/2006/main">
   <p:cSld>
     <p:spTree>
       <p:nvGrpSpPr>
@@ -4230,41 +4469,91 @@
         <p:cNvGrpSpPr/>
         <p:nvPr/>
       </p:nvGrpSpPr>
-      <p:grpSpPr/>
-      <p:pic>
-        <p:nvPicPr>
-          <p:cNvPr id="2" name="Picture 1" descr="shot-2.png"/>
-          <p:cNvPicPr>
-            <a:picLocks noChangeAspect="1"/>
-          </p:cNvPicPr>
-          <p:nvPr/>
-        </p:nvPicPr>
-        <p:blipFill>
-          <a:blip r:embed="rId2"/>
-          <a:stretch>
-            <a:fillRect/>
-          </a:stretch>
-        </p:blipFill>
-        <p:spPr>
-          <a:xfrm>
-            <a:off x="0" y="0"/>
-            <a:ext cx="12191695" cy="6858000"/>
-          </a:xfrm>
-          <a:prstGeom prst="rect">
-            <a:avLst/>
-          </a:prstGeom>
-        </p:spPr>
-      </p:pic>
+      <p:grpSpPr>
+        <a:xfrm>
+          <a:off x="0" y="0"/>
+          <a:ext cx="0" cy="0"/>
+          <a:chOff x="0" y="0"/>
+          <a:chExt cx="0" cy="0"/>
+        </a:xfrm>
+      </p:grpSpPr>
+      <p:sp>
+        <p:nvSpPr>
+          <p:cNvPr id="2" name="Title 1"/>
+          <p:cNvSpPr>
+            <a:spLocks noGrp="1"/>
+          </p:cNvSpPr>
+          <p:nvPr>
+            <p:ph type="title"/>
+          </p:nvPr>
+        </p:nvSpPr>
+        <p:spPr/>
+        <p:txBody>
+          <a:bodyPr/>
+          <a:lstStyle/>
+          <a:p>
+            <a:pPr lvl="0" indent="0" marL="0">
+              <a:buNone/>
+            </a:pPr>
+            <a:r>
+              <a:rPr/>
+              <a:t>08 · Take-aways &amp; limitations</a:t>
+            </a:r>
+          </a:p>
+        </p:txBody>
+      </p:sp>
+      <p:sp>
+        <p:nvSpPr>
+          <p:cNvPr id="3" name="Content Placeholder 2"/>
+          <p:cNvSpPr>
+            <a:spLocks noGrp="1"/>
+          </p:cNvSpPr>
+          <p:nvPr>
+            <p:ph idx="1"/>
+          </p:nvPr>
+        </p:nvSpPr>
+        <p:spPr/>
+        <p:txBody>
+          <a:bodyPr/>
+          <a:lstStyle/>
+          <a:p>
+            <a:pPr lvl="0" indent="0" marL="0">
+              <a:buNone/>
+            </a:pPr>
+            <a:r>
+              <a:rPr/>
+              <a:t>Translatability is a function of </a:t>
+            </a:r>
+            <a:r>
+              <a:rPr i="1"/>
+              <a:t>granularity</a:t>
+            </a:r>
+            <a:r>
+              <a:rPr/>
+              <a:t>, </a:t>
+            </a:r>
+            <a:r>
+              <a:rPr i="1"/>
+              <a:t>intensity</a:t>
+            </a:r>
+            <a:r>
+              <a:rPr/>
+              <a:t> and </a:t>
+            </a:r>
+            <a:r>
+              <a:rPr i="1"/>
+              <a:t>timing</a:t>
+            </a:r>
+          </a:p>
+        </p:txBody>
+      </p:sp>
     </p:spTree>
   </p:cSld>
-  <p:clrMapOvr>
-    <a:masterClrMapping/>
-  </p:clrMapOvr>
 </p:sld>
 </file>
 
-<file path=ppt/slides/slide3.xml><?xml version="1.0" encoding="utf-8"?>
-<p:sld xmlns:a="http://schemas.openxmlformats.org/drawingml/2006/main" xmlns:p="http://schemas.openxmlformats.org/presentationml/2006/main" xmlns:r="http://schemas.openxmlformats.org/officeDocument/2006/relationships">
+<file path=ppt/slides/slide12.xml><?xml version="1.0" encoding="utf-8"?>
+<p:sld xmlns:a="http://schemas.openxmlformats.org/drawingml/2006/main" xmlns:r="http://schemas.openxmlformats.org/officeDocument/2006/relationships" xmlns:p="http://schemas.openxmlformats.org/presentationml/2006/main">
   <p:cSld>
     <p:spTree>
       <p:nvGrpSpPr>
@@ -4272,41 +4561,127 @@
         <p:cNvGrpSpPr/>
         <p:nvPr/>
       </p:nvGrpSpPr>
-      <p:grpSpPr/>
-      <p:pic>
-        <p:nvPicPr>
-          <p:cNvPr id="2" name="Picture 1" descr="shot-3.png"/>
-          <p:cNvPicPr>
-            <a:picLocks noChangeAspect="1"/>
-          </p:cNvPicPr>
-          <p:nvPr/>
-        </p:nvPicPr>
-        <p:blipFill>
-          <a:blip r:embed="rId2"/>
-          <a:stretch>
-            <a:fillRect/>
-          </a:stretch>
-        </p:blipFill>
-        <p:spPr>
-          <a:xfrm>
-            <a:off x="0" y="0"/>
-            <a:ext cx="12191695" cy="6858000"/>
-          </a:xfrm>
-          <a:prstGeom prst="rect">
-            <a:avLst/>
-          </a:prstGeom>
-        </p:spPr>
-      </p:pic>
+      <p:grpSpPr>
+        <a:xfrm>
+          <a:off x="0" y="0"/>
+          <a:ext cx="0" cy="0"/>
+          <a:chOff x="0" y="0"/>
+          <a:chExt cx="0" cy="0"/>
+        </a:xfrm>
+      </p:grpSpPr>
+      <p:sp>
+        <p:nvSpPr>
+          <p:cNvPr id="3" name="Content Placeholder 2"/>
+          <p:cNvSpPr>
+            <a:spLocks noGrp="1"/>
+          </p:cNvSpPr>
+          <p:nvPr>
+            <p:ph idx="1" sz="half"/>
+          </p:nvPr>
+        </p:nvSpPr>
+        <p:spPr/>
+        <p:txBody>
+          <a:bodyPr/>
+          <a:lstStyle/>
+          <a:p>
+            <a:pPr lvl="0" indent="0" marL="0">
+              <a:buNone/>
+            </a:pPr>
+            <a:r>
+              <a:rPr/>
+              <a:t>What the study establishes</a:t>
+            </a:r>
+          </a:p>
+          <a:p>
+            <a:pPr lvl="0"/>
+            <a:r>
+              <a:rPr/>
+              <a:t>Module-level analysis beats gene-level analysis for cross-species concordance.</a:t>
+            </a:r>
+          </a:p>
+          <a:p>
+            <a:pPr lvl="0"/>
+            <a:r>
+              <a:rPr/>
+              <a:t>Acute infection and injury translate; single-dose vaccination does not.</a:t>
+            </a:r>
+          </a:p>
+          <a:p>
+            <a:pPr lvl="0"/>
+            <a:r>
+              <a:rPr/>
+              <a:t>Evolutionary and regulatory layers carry a conserved signal beyond mouse DGE.</a:t>
+            </a:r>
+          </a:p>
+          <a:p>
+            <a:pPr lvl="0"/>
+            <a:r>
+              <a:rPr/>
+              <a:t>Four out-of-fold scores — score_shared, score_rank, score_direction, score_translational — prioritise candidate genes.</a:t>
+            </a:r>
+          </a:p>
+        </p:txBody>
+      </p:sp>
+      <p:sp>
+        <p:nvSpPr>
+          <p:cNvPr id="4" name="Content Placeholder 3"/>
+          <p:cNvSpPr>
+            <a:spLocks noGrp="1"/>
+          </p:cNvSpPr>
+          <p:nvPr>
+            <p:ph idx="2" sz="half"/>
+          </p:nvPr>
+        </p:nvSpPr>
+        <p:spPr/>
+        <p:txBody>
+          <a:bodyPr/>
+          <a:lstStyle/>
+          <a:p>
+            <a:pPr lvl="0" indent="0" marL="0">
+              <a:buNone/>
+            </a:pPr>
+            <a:r>
+              <a:rPr/>
+              <a:t>Limitations to keep in mind</a:t>
+            </a:r>
+          </a:p>
+          <a:p>
+            <a:pPr lvl="0"/>
+            <a:r>
+              <a:rPr/>
+              <a:t>Small murine cohorts; scarce harmonised metadata.</a:t>
+            </a:r>
+          </a:p>
+          <a:p>
+            <a:pPr lvl="0"/>
+            <a:r>
+              <a:rPr/>
+              <a:t>Two inbred strains only (C57BL/6, CB6F1) — strain choice shapes translatability.</a:t>
+            </a:r>
+          </a:p>
+          <a:p>
+            <a:pPr lvl="0"/>
+            <a:r>
+              <a:rPr/>
+              <a:t>Single-dose mouse vaccination vs. human prime-boost regimens.</a:t>
+            </a:r>
+          </a:p>
+          <a:p>
+            <a:pPr lvl="0"/>
+            <a:r>
+              <a:rPr/>
+              <a:t>Blood-based BTMs and one-to-one Ensembl orthologs — needs testing in other tissues and gene sets.</a:t>
+            </a:r>
+          </a:p>
+        </p:txBody>
+      </p:sp>
     </p:spTree>
   </p:cSld>
-  <p:clrMapOvr>
-    <a:masterClrMapping/>
-  </p:clrMapOvr>
 </p:sld>
 </file>
 
-<file path=ppt/slides/slide4.xml><?xml version="1.0" encoding="utf-8"?>
-<p:sld xmlns:a="http://schemas.openxmlformats.org/drawingml/2006/main" xmlns:p="http://schemas.openxmlformats.org/presentationml/2006/main" xmlns:r="http://schemas.openxmlformats.org/officeDocument/2006/relationships">
+<file path=ppt/slides/slide13.xml><?xml version="1.0" encoding="utf-8"?>
+<p:sld xmlns:a="http://schemas.openxmlformats.org/drawingml/2006/main" xmlns:r="http://schemas.openxmlformats.org/officeDocument/2006/relationships" xmlns:p="http://schemas.openxmlformats.org/presentationml/2006/main">
   <p:cSld>
     <p:spTree>
       <p:nvGrpSpPr>
@@ -4314,41 +4689,79 @@
         <p:cNvGrpSpPr/>
         <p:nvPr/>
       </p:nvGrpSpPr>
-      <p:grpSpPr/>
-      <p:pic>
-        <p:nvPicPr>
-          <p:cNvPr id="2" name="Picture 1" descr="shot-4.png"/>
-          <p:cNvPicPr>
-            <a:picLocks noChangeAspect="1"/>
-          </p:cNvPicPr>
-          <p:nvPr/>
-        </p:nvPicPr>
-        <p:blipFill>
-          <a:blip r:embed="rId2"/>
-          <a:stretch>
-            <a:fillRect/>
-          </a:stretch>
-        </p:blipFill>
-        <p:spPr>
-          <a:xfrm>
-            <a:off x="0" y="0"/>
-            <a:ext cx="12191695" cy="6858000"/>
-          </a:xfrm>
-          <a:prstGeom prst="rect">
-            <a:avLst/>
-          </a:prstGeom>
-        </p:spPr>
-      </p:pic>
+      <p:grpSpPr>
+        <a:xfrm>
+          <a:off x="0" y="0"/>
+          <a:ext cx="0" cy="0"/>
+          <a:chOff x="0" y="0"/>
+          <a:chExt cx="0" cy="0"/>
+        </a:xfrm>
+      </p:grpSpPr>
+      <p:sp>
+        <p:nvSpPr>
+          <p:cNvPr id="2" name="Title 1"/>
+          <p:cNvSpPr>
+            <a:spLocks noGrp="1"/>
+          </p:cNvSpPr>
+          <p:nvPr>
+            <p:ph type="title"/>
+          </p:nvPr>
+        </p:nvSpPr>
+        <p:spPr/>
+        <p:txBody>
+          <a:bodyPr/>
+          <a:lstStyle/>
+          <a:p>
+            <a:pPr lvl="0" indent="0" marL="0">
+              <a:buNone/>
+            </a:pPr>
+            <a:r>
+              <a:rPr/>
+              <a:t>09 · Availability</a:t>
+            </a:r>
+          </a:p>
+        </p:txBody>
+      </p:sp>
+      <p:sp>
+        <p:nvSpPr>
+          <p:cNvPr id="3" name="Content Placeholder 2"/>
+          <p:cNvSpPr>
+            <a:spLocks noGrp="1"/>
+          </p:cNvSpPr>
+          <p:nvPr>
+            <p:ph idx="1"/>
+          </p:nvPr>
+        </p:nvSpPr>
+        <p:spPr/>
+        <p:txBody>
+          <a:bodyPr/>
+          <a:lstStyle/>
+          <a:p>
+            <a:pPr lvl="0" indent="0" marL="0">
+              <a:buNone/>
+            </a:pPr>
+            <a:r>
+              <a:rPr/>
+              <a:t>Open code, trained models, and a notebook to </a:t>
+            </a:r>
+            <a:r>
+              <a:rPr i="1"/>
+              <a:t>apply</a:t>
+            </a:r>
+            <a:r>
+              <a:rPr/>
+              <a:t> them</a:t>
+            </a:r>
+          </a:p>
+        </p:txBody>
+      </p:sp>
     </p:spTree>
   </p:cSld>
-  <p:clrMapOvr>
-    <a:masterClrMapping/>
-  </p:clrMapOvr>
 </p:sld>
 </file>
 
-<file path=ppt/slides/slide5.xml><?xml version="1.0" encoding="utf-8"?>
-<p:sld xmlns:a="http://schemas.openxmlformats.org/drawingml/2006/main" xmlns:p="http://schemas.openxmlformats.org/presentationml/2006/main" xmlns:r="http://schemas.openxmlformats.org/officeDocument/2006/relationships">
+<file path=ppt/slides/slide14.xml><?xml version="1.0" encoding="utf-8"?>
+<p:sld xmlns:a="http://schemas.openxmlformats.org/drawingml/2006/main" xmlns:r="http://schemas.openxmlformats.org/officeDocument/2006/relationships" xmlns:p="http://schemas.openxmlformats.org/presentationml/2006/main">
   <p:cSld>
     <p:spTree>
       <p:nvGrpSpPr>
@@ -4356,41 +4769,135 @@
         <p:cNvGrpSpPr/>
         <p:nvPr/>
       </p:nvGrpSpPr>
-      <p:grpSpPr/>
-      <p:pic>
-        <p:nvPicPr>
-          <p:cNvPr id="2" name="Picture 1" descr="shot-5.png"/>
-          <p:cNvPicPr>
-            <a:picLocks noChangeAspect="1"/>
-          </p:cNvPicPr>
-          <p:nvPr/>
-        </p:nvPicPr>
-        <p:blipFill>
-          <a:blip r:embed="rId2"/>
-          <a:stretch>
-            <a:fillRect/>
-          </a:stretch>
-        </p:blipFill>
-        <p:spPr>
-          <a:xfrm>
-            <a:off x="0" y="0"/>
-            <a:ext cx="12191695" cy="6858000"/>
-          </a:xfrm>
-          <a:prstGeom prst="rect">
-            <a:avLst/>
-          </a:prstGeom>
-        </p:spPr>
-      </p:pic>
+      <p:grpSpPr>
+        <a:xfrm>
+          <a:off x="0" y="0"/>
+          <a:ext cx="0" cy="0"/>
+          <a:chOff x="0" y="0"/>
+          <a:chExt cx="0" cy="0"/>
+        </a:xfrm>
+      </p:grpSpPr>
+      <p:sp>
+        <p:nvSpPr>
+          <p:cNvPr id="3" name="Content Placeholder 2"/>
+          <p:cNvSpPr>
+            <a:spLocks noGrp="1"/>
+          </p:cNvSpPr>
+          <p:nvPr>
+            <p:ph idx="1" sz="half"/>
+          </p:nvPr>
+        </p:nvSpPr>
+        <p:spPr/>
+        <p:txBody>
+          <a:bodyPr/>
+          <a:lstStyle/>
+          <a:p>
+            <a:pPr lvl="0" indent="0" marL="0">
+              <a:buNone/>
+            </a:pPr>
+            <a:r>
+              <a:rPr/>
+              <a:t>Pipeline</a:t>
+            </a:r>
+          </a:p>
+          <a:p>
+            <a:pPr lvl="0" indent="0" marL="0">
+              <a:buNone/>
+            </a:pPr>
+            <a:r>
+              <a:rPr/>
+              <a:t>mousetohuman_multilayer</a:t>
+            </a:r>
+          </a:p>
+          <a:p>
+            <a:pPr lvl="0" indent="0" marL="0">
+              <a:buNone/>
+            </a:pPr>
+            <a:r>
+              <a:rPr/>
+              <a:t>Full R Markdown pipeline — curation, QC, limma DGE, GSEA, evolutionary and regulatory analyses, and the LOCO modelling script. Pinned with </a:t>
+            </a:r>
+            <a:r>
+              <a:rPr>
+                <a:latin typeface="Courier"/>
+              </a:rPr>
+              <a:t>renv</a:t>
+            </a:r>
+            <a:r>
+              <a:rPr/>
+              <a:t>.</a:t>
+            </a:r>
+          </a:p>
+          <a:p>
+            <a:pPr lvl="0" indent="0" marL="0">
+              <a:buNone/>
+            </a:pPr>
+            <a:r>
+              <a:rPr/>
+              <a:t>github.com/wapsyed/mousetohuman_multilayer</a:t>
+            </a:r>
+          </a:p>
+        </p:txBody>
+      </p:sp>
+      <p:sp>
+        <p:nvSpPr>
+          <p:cNvPr id="4" name="Content Placeholder 3"/>
+          <p:cNvSpPr>
+            <a:spLocks noGrp="1"/>
+          </p:cNvSpPr>
+          <p:nvPr>
+            <p:ph idx="2" sz="half"/>
+          </p:nvPr>
+        </p:nvSpPr>
+        <p:spPr/>
+        <p:txBody>
+          <a:bodyPr/>
+          <a:lstStyle/>
+          <a:p>
+            <a:pPr lvl="0" indent="0" marL="0">
+              <a:buNone/>
+            </a:pPr>
+            <a:r>
+              <a:rPr/>
+              <a:t>Documentation</a:t>
+            </a:r>
+          </a:p>
+          <a:p>
+            <a:pPr lvl="0" indent="0" marL="0">
+              <a:buNone/>
+            </a:pPr>
+            <a:r>
+              <a:rPr/>
+              <a:t>Project site</a:t>
+            </a:r>
+          </a:p>
+          <a:p>
+            <a:pPr lvl="0" indent="0" marL="0">
+              <a:buNone/>
+            </a:pPr>
+            <a:r>
+              <a:rPr/>
+              <a:t>Overview, complete methodology — including the multilayer modelling pipeline — and the notebook map, in one place.</a:t>
+            </a:r>
+          </a:p>
+          <a:p>
+            <a:pPr lvl="0" indent="0" marL="0">
+              <a:buNone/>
+            </a:pPr>
+            <a:r>
+              <a:rPr/>
+              <a:t>wapsyed.github.io/mousetohuman_multilayer</a:t>
+            </a:r>
+          </a:p>
+        </p:txBody>
+      </p:sp>
     </p:spTree>
   </p:cSld>
-  <p:clrMapOvr>
-    <a:masterClrMapping/>
-  </p:clrMapOvr>
 </p:sld>
 </file>
 
-<file path=ppt/slides/slide6.xml><?xml version="1.0" encoding="utf-8"?>
-<p:sld xmlns:a="http://schemas.openxmlformats.org/drawingml/2006/main" xmlns:p="http://schemas.openxmlformats.org/presentationml/2006/main" xmlns:r="http://schemas.openxmlformats.org/officeDocument/2006/relationships">
+<file path=ppt/slides/slide15.xml><?xml version="1.0" encoding="utf-8"?>
+<p:sld xmlns:a="http://schemas.openxmlformats.org/drawingml/2006/main" xmlns:r="http://schemas.openxmlformats.org/officeDocument/2006/relationships" xmlns:p="http://schemas.openxmlformats.org/presentationml/2006/main">
   <p:cSld>
     <p:spTree>
       <p:nvGrpSpPr>
@@ -4398,41 +4905,46 @@
         <p:cNvGrpSpPr/>
         <p:nvPr/>
       </p:nvGrpSpPr>
-      <p:grpSpPr/>
-      <p:pic>
-        <p:nvPicPr>
-          <p:cNvPr id="2" name="Picture 1" descr="shot-6.png"/>
-          <p:cNvPicPr>
-            <a:picLocks noChangeAspect="1"/>
-          </p:cNvPicPr>
-          <p:nvPr/>
-        </p:nvPicPr>
-        <p:blipFill>
-          <a:blip r:embed="rId2"/>
-          <a:stretch>
-            <a:fillRect/>
-          </a:stretch>
-        </p:blipFill>
-        <p:spPr>
-          <a:xfrm>
-            <a:off x="0" y="0"/>
-            <a:ext cx="12191695" cy="6858000"/>
-          </a:xfrm>
-          <a:prstGeom prst="rect">
-            <a:avLst/>
-          </a:prstGeom>
-        </p:spPr>
-      </p:pic>
+      <p:grpSpPr>
+        <a:xfrm>
+          <a:off x="0" y="0"/>
+          <a:ext cx="0" cy="0"/>
+          <a:chOff x="0" y="0"/>
+          <a:chExt cx="0" cy="0"/>
+        </a:xfrm>
+      </p:grpSpPr>
+      <p:sp>
+        <p:nvSpPr>
+          <p:cNvPr id="3" name="Content Placeholder 2"/>
+          <p:cNvSpPr>
+            <a:spLocks noGrp="1"/>
+          </p:cNvSpPr>
+          <p:nvPr>
+            <p:ph idx="1"/>
+          </p:nvPr>
+        </p:nvSpPr>
+        <p:spPr/>
+        <p:txBody>
+          <a:bodyPr/>
+          <a:lstStyle/>
+          <a:p>
+            <a:pPr lvl="0" indent="0" marL="0">
+              <a:buNone/>
+            </a:pPr>
+            <a:r>
+              <a:rPr/>
+              <a:t>Thank you — questions welcome.</a:t>
+            </a:r>
+          </a:p>
+        </p:txBody>
+      </p:sp>
     </p:spTree>
   </p:cSld>
-  <p:clrMapOvr>
-    <a:masterClrMapping/>
-  </p:clrMapOvr>
 </p:sld>
 </file>
 
-<file path=ppt/slides/slide7.xml><?xml version="1.0" encoding="utf-8"?>
-<p:sld xmlns:a="http://schemas.openxmlformats.org/drawingml/2006/main" xmlns:p="http://schemas.openxmlformats.org/presentationml/2006/main" xmlns:r="http://schemas.openxmlformats.org/officeDocument/2006/relationships">
+<file path=ppt/slides/slide2.xml><?xml version="1.0" encoding="utf-8"?>
+<p:sld xmlns:a="http://schemas.openxmlformats.org/drawingml/2006/main" xmlns:r="http://schemas.openxmlformats.org/officeDocument/2006/relationships" xmlns:p="http://schemas.openxmlformats.org/presentationml/2006/main">
   <p:cSld>
     <p:spTree>
       <p:nvGrpSpPr>
@@ -4440,41 +4952,142 @@
         <p:cNvGrpSpPr/>
         <p:nvPr/>
       </p:nvGrpSpPr>
-      <p:grpSpPr/>
-      <p:pic>
-        <p:nvPicPr>
-          <p:cNvPr id="2" name="Picture 1" descr="shot-7.png"/>
-          <p:cNvPicPr>
-            <a:picLocks noChangeAspect="1"/>
-          </p:cNvPicPr>
-          <p:nvPr/>
-        </p:nvPicPr>
-        <p:blipFill>
-          <a:blip r:embed="rId2"/>
-          <a:stretch>
-            <a:fillRect/>
-          </a:stretch>
-        </p:blipFill>
-        <p:spPr>
-          <a:xfrm>
-            <a:off x="0" y="0"/>
-            <a:ext cx="12191695" cy="6858000"/>
-          </a:xfrm>
-          <a:prstGeom prst="rect">
-            <a:avLst/>
-          </a:prstGeom>
-        </p:spPr>
-      </p:pic>
+      <p:grpSpPr>
+        <a:xfrm>
+          <a:off x="0" y="0"/>
+          <a:ext cx="0" cy="0"/>
+          <a:chOff x="0" y="0"/>
+          <a:chExt cx="0" cy="0"/>
+        </a:xfrm>
+      </p:grpSpPr>
+      <p:sp>
+        <p:nvSpPr>
+          <p:cNvPr id="2" name="Title 1"/>
+          <p:cNvSpPr>
+            <a:spLocks noGrp="1"/>
+          </p:cNvSpPr>
+          <p:nvPr>
+            <p:ph type="title"/>
+          </p:nvPr>
+        </p:nvSpPr>
+        <p:spPr/>
+        <p:txBody>
+          <a:bodyPr/>
+          <a:lstStyle/>
+          <a:p>
+            <a:pPr lvl="0" indent="0" marL="0">
+              <a:buNone/>
+            </a:pPr>
+            <a:r>
+              <a:rPr/>
+              <a:t>01 · The problem</a:t>
+            </a:r>
+          </a:p>
+        </p:txBody>
+      </p:sp>
+      <p:sp>
+        <p:nvSpPr>
+          <p:cNvPr id="3" name="Content Placeholder 2"/>
+          <p:cNvSpPr>
+            <a:spLocks noGrp="1"/>
+          </p:cNvSpPr>
+          <p:nvPr>
+            <p:ph idx="1"/>
+          </p:nvPr>
+        </p:nvSpPr>
+        <p:spPr/>
+        <p:txBody>
+          <a:bodyPr/>
+          <a:lstStyle/>
+          <a:p>
+            <a:pPr lvl="0" indent="0" marL="0">
+              <a:buNone/>
+            </a:pPr>
+            <a:r>
+              <a:rPr/>
+              <a:t>Mice are the workhorse — but how well do they </a:t>
+            </a:r>
+            <a:r>
+              <a:rPr i="1"/>
+              <a:t>actually</a:t>
+            </a:r>
+            <a:r>
+              <a:rPr/>
+              <a:t> predict human immunity?</a:t>
+            </a:r>
+          </a:p>
+          <a:p>
+            <a:pPr lvl="0"/>
+            <a:r>
+              <a:rPr/>
+              <a:t>Murine models underpin preclinical vaccine research, yet their translational value remains </a:t>
+            </a:r>
+            <a:r>
+              <a:rPr b="1"/>
+              <a:t>contested</a:t>
+            </a:r>
+            <a:r>
+              <a:rPr/>
+              <a:t>, contributing to clinical trial failures.</a:t>
+            </a:r>
+          </a:p>
+          <a:p>
+            <a:pPr lvl="0"/>
+            <a:r>
+              <a:rPr/>
+              <a:t>Prior cross-species comparisons were largely </a:t>
+            </a:r>
+            <a:r>
+              <a:rPr b="1"/>
+              <a:t>descriptive</a:t>
+            </a:r>
+            <a:r>
+              <a:rPr/>
+              <a:t>: gene-centric, linear, and disconnected from sequence evolution and cis-regulatory architecture.</a:t>
+            </a:r>
+          </a:p>
+          <a:p>
+            <a:pPr lvl="0"/>
+            <a:r>
+              <a:rPr/>
+              <a:t>The consequence: </a:t>
+            </a:r>
+            <a:r>
+              <a:rPr b="1"/>
+              <a:t>contradictory reports</a:t>
+            </a:r>
+            <a:r>
+              <a:rPr/>
+              <a:t> and no practical framework to prioritise targets for human translation.</a:t>
+            </a:r>
+          </a:p>
+          <a:p>
+            <a:pPr lvl="0" indent="0" marL="0">
+              <a:buNone/>
+            </a:pPr>
+            <a:r>
+              <a:rPr/>
+              <a:t>201mouse immunization datasets screened from GEO (Fig. 1a)</a:t>
+            </a:r>
+          </a:p>
+          <a:p>
+            <a:pPr lvl="0" indent="0" marL="0">
+              <a:buNone/>
+            </a:pPr>
+            <a:r>
+              <a:rPr/>
+              <a:t>6matched mouse–human conditions carried forward</a:t>
+            </a:r>
+          </a:p>
+        </p:txBody>
+      </p:sp>
     </p:spTree>
   </p:cSld>
-  <p:clrMapOvr>
-    <a:masterClrMapping/>
-  </p:clrMapOvr>
 </p:sld>
 </file>
 
-<file path=ppt/slides/slide8.xml><?xml version="1.0" encoding="utf-8"?>
-<p:sld xmlns:a="http://schemas.openxmlformats.org/drawingml/2006/main" xmlns:p="http://schemas.openxmlformats.org/presentationml/2006/main" xmlns:r="http://schemas.openxmlformats.org/officeDocument/2006/relationships">
+<file path=ppt/slides/slide3.xml><?xml version="1.0" encoding="utf-8"?>
+<p:sld xmlns:a="http://schemas.openxmlformats.org/drawingml/2006/main" xmlns:r="http://schemas.openxmlformats.org/officeDocument/2006/relationships" xmlns:p="http://schemas.openxmlformats.org/presentationml/2006/main">
   <p:cSld>
     <p:spTree>
       <p:nvGrpSpPr>
@@ -4482,41 +5095,166 @@
         <p:cNvGrpSpPr/>
         <p:nvPr/>
       </p:nvGrpSpPr>
-      <p:grpSpPr/>
-      <p:pic>
-        <p:nvPicPr>
-          <p:cNvPr id="2" name="Picture 1" descr="shot-8.png"/>
-          <p:cNvPicPr>
-            <a:picLocks noChangeAspect="1"/>
-          </p:cNvPicPr>
-          <p:nvPr/>
-        </p:nvPicPr>
-        <p:blipFill>
-          <a:blip r:embed="rId2"/>
-          <a:stretch>
-            <a:fillRect/>
-          </a:stretch>
-        </p:blipFill>
-        <p:spPr>
-          <a:xfrm>
-            <a:off x="0" y="0"/>
-            <a:ext cx="12191695" cy="6858000"/>
-          </a:xfrm>
-          <a:prstGeom prst="rect">
-            <a:avLst/>
-          </a:prstGeom>
-        </p:spPr>
-      </p:pic>
+      <p:grpSpPr>
+        <a:xfrm>
+          <a:off x="0" y="0"/>
+          <a:ext cx="0" cy="0"/>
+          <a:chOff x="0" y="0"/>
+          <a:chExt cx="0" cy="0"/>
+        </a:xfrm>
+      </p:grpSpPr>
+      <p:sp>
+        <p:nvSpPr>
+          <p:cNvPr id="2" name="Title 1"/>
+          <p:cNvSpPr>
+            <a:spLocks noGrp="1"/>
+          </p:cNvSpPr>
+          <p:nvPr>
+            <p:ph type="title"/>
+          </p:nvPr>
+        </p:nvSpPr>
+        <p:spPr/>
+        <p:txBody>
+          <a:bodyPr/>
+          <a:lstStyle/>
+          <a:p>
+            <a:pPr lvl="0" indent="0" marL="0">
+              <a:buNone/>
+            </a:pPr>
+            <a:r>
+              <a:rPr/>
+              <a:t>02 · Study design</a:t>
+            </a:r>
+          </a:p>
+        </p:txBody>
+      </p:sp>
+      <p:sp>
+        <p:nvSpPr>
+          <p:cNvPr id="3" name="Content Placeholder 2"/>
+          <p:cNvSpPr>
+            <a:spLocks noGrp="1"/>
+          </p:cNvSpPr>
+          <p:nvPr>
+            <p:ph idx="1" sz="half"/>
+          </p:nvPr>
+        </p:nvSpPr>
+        <p:spPr/>
+        <p:txBody>
+          <a:bodyPr/>
+          <a:lstStyle/>
+          <a:p>
+            <a:pPr lvl="0" indent="0" marL="0">
+              <a:buNone/>
+            </a:pPr>
+            <a:r>
+              <a:rPr/>
+              <a:t>One framework, three stimulus categories, matched across species</a:t>
+            </a:r>
+          </a:p>
+          <a:p>
+            <a:pPr lvl="0"/>
+            <a:r>
+              <a:rPr b="1"/>
+              <a:t>Vaccination</a:t>
+            </a:r>
+            <a:r>
+              <a:rPr/>
+              <a:t> — Fluad® (influenza), Engerix B® (hepatitis B)</a:t>
+            </a:r>
+          </a:p>
+          <a:p>
+            <a:pPr lvl="0"/>
+            <a:r>
+              <a:rPr b="1"/>
+              <a:t>Infection</a:t>
+            </a:r>
+            <a:r>
+              <a:rPr/>
+              <a:t> — </a:t>
+            </a:r>
+            <a:r>
+              <a:rPr i="1"/>
+              <a:t>S. aureus</a:t>
+            </a:r>
+            <a:r>
+              <a:rPr/>
+              <a:t>, </a:t>
+            </a:r>
+            <a:r>
+              <a:rPr i="1"/>
+              <a:t>E. coli</a:t>
+            </a:r>
+          </a:p>
+          <a:p>
+            <a:pPr lvl="0"/>
+            <a:r>
+              <a:rPr b="1"/>
+              <a:t>Injury</a:t>
+            </a:r>
+            <a:r>
+              <a:rPr/>
+              <a:t> — burn, trauma-haemorrhage</a:t>
+            </a:r>
+          </a:p>
+          <a:p>
+            <a:pPr lvl="0"/>
+            <a:r>
+              <a:rPr b="1"/>
+              <a:t>+ DMD</a:t>
+            </a:r>
+            <a:r>
+              <a:rPr/>
+              <a:t> (mdx mouse) as a biological negative control</a:t>
+            </a:r>
+          </a:p>
+          <a:p>
+            <a:pPr lvl="0" indent="0" marL="0">
+              <a:buNone/>
+            </a:pPr>
+            <a:r>
+              <a:rPr/>
+              <a:t>Blood transcriptomes · GEO / BioProject limma + empirical Bayes · covariates (age, sex, ethnicity) human downsampled to n = 5, 200 iterations, median statistics</a:t>
+            </a:r>
+          </a:p>
+        </p:txBody>
+      </p:sp>
+      <p:sp>
+        <p:nvSpPr>
+          <p:cNvPr id="4" name="Content Placeholder 3"/>
+          <p:cNvSpPr>
+            <a:spLocks noGrp="1"/>
+          </p:cNvSpPr>
+          <p:nvPr>
+            <p:ph idx="2" sz="half"/>
+          </p:nvPr>
+        </p:nvSpPr>
+        <p:spPr/>
+        <p:txBody>
+          <a:bodyPr/>
+          <a:lstStyle/>
+          <a:p>
+            <a:pPr lvl="0" indent="0" marL="0">
+              <a:buNone/>
+            </a:pPr>
+          </a:p>
+          <a:p>
+            <a:pPr lvl="0" indent="0" marL="0">
+              <a:buNone/>
+            </a:pPr>
+            <a:r>
+              <a:rPr/>
+              <a:t>Fig. 1b — experimental timelines for matched mouse and human datasets across vaccination, infection and injury (GSE120661 · GSE124689 · GSE19668 · GSE33341 · GSE7404 · GSE37069 · GSE36809).</a:t>
+            </a:r>
+          </a:p>
+        </p:txBody>
+      </p:sp>
     </p:spTree>
   </p:cSld>
-  <p:clrMapOvr>
-    <a:masterClrMapping/>
-  </p:clrMapOvr>
 </p:sld>
 </file>
 
-<file path=ppt/slides/slide9.xml><?xml version="1.0" encoding="utf-8"?>
-<p:sld xmlns:a="http://schemas.openxmlformats.org/drawingml/2006/main" xmlns:p="http://schemas.openxmlformats.org/presentationml/2006/main" xmlns:r="http://schemas.openxmlformats.org/officeDocument/2006/relationships">
+<file path=ppt/slides/slide4.xml><?xml version="1.0" encoding="utf-8"?>
+<p:sld xmlns:a="http://schemas.openxmlformats.org/drawingml/2006/main" xmlns:r="http://schemas.openxmlformats.org/officeDocument/2006/relationships" xmlns:p="http://schemas.openxmlformats.org/presentationml/2006/main">
   <p:cSld>
     <p:spTree>
       <p:nvGrpSpPr>
@@ -4524,36 +5262,771 @@
         <p:cNvGrpSpPr/>
         <p:nvPr/>
       </p:nvGrpSpPr>
-      <p:grpSpPr/>
-      <p:pic>
-        <p:nvPicPr>
-          <p:cNvPr id="2" name="Picture 1" descr="shot-9.png"/>
-          <p:cNvPicPr>
-            <a:picLocks noChangeAspect="1"/>
-          </p:cNvPicPr>
-          <p:nvPr/>
-        </p:nvPicPr>
-        <p:blipFill>
-          <a:blip r:embed="rId2"/>
-          <a:stretch>
-            <a:fillRect/>
-          </a:stretch>
-        </p:blipFill>
-        <p:spPr>
-          <a:xfrm>
-            <a:off x="0" y="0"/>
-            <a:ext cx="12191695" cy="6858000"/>
-          </a:xfrm>
-          <a:prstGeom prst="rect">
-            <a:avLst/>
-          </a:prstGeom>
-        </p:spPr>
-      </p:pic>
+      <p:grpSpPr>
+        <a:xfrm>
+          <a:off x="0" y="0"/>
+          <a:ext cx="0" cy="0"/>
+          <a:chOff x="0" y="0"/>
+          <a:chExt cx="0" cy="0"/>
+        </a:xfrm>
+      </p:grpSpPr>
+      <p:sp>
+        <p:nvSpPr>
+          <p:cNvPr id="2" name="Title 1"/>
+          <p:cNvSpPr>
+            <a:spLocks noGrp="1"/>
+          </p:cNvSpPr>
+          <p:nvPr>
+            <p:ph type="title"/>
+          </p:nvPr>
+        </p:nvSpPr>
+        <p:spPr/>
+        <p:txBody>
+          <a:bodyPr/>
+          <a:lstStyle/>
+          <a:p>
+            <a:pPr lvl="0" indent="0" marL="0">
+              <a:buNone/>
+            </a:pPr>
+            <a:r>
+              <a:rPr/>
+              <a:t>03 · Result — analytical granularity</a:t>
+            </a:r>
+          </a:p>
+        </p:txBody>
+      </p:sp>
+      <p:sp>
+        <p:nvSpPr>
+          <p:cNvPr id="3" name="Content Placeholder 2"/>
+          <p:cNvSpPr>
+            <a:spLocks noGrp="1"/>
+          </p:cNvSpPr>
+          <p:nvPr>
+            <p:ph idx="1" sz="half"/>
+          </p:nvPr>
+        </p:nvSpPr>
+        <p:spPr/>
+        <p:txBody>
+          <a:bodyPr/>
+          <a:lstStyle/>
+          <a:p>
+            <a:pPr lvl="0" indent="0" marL="0">
+              <a:buNone/>
+            </a:pPr>
+            <a:r>
+              <a:rPr/>
+              <a:t>Cells disagree. Pathways </a:t>
+            </a:r>
+            <a:r>
+              <a:rPr i="1"/>
+              <a:t>agree</a:t>
+            </a:r>
+            <a:r>
+              <a:rPr/>
+              <a:t>.</a:t>
+            </a:r>
+          </a:p>
+          <a:p>
+            <a:pPr lvl="0" indent="0" marL="0">
+              <a:buNone/>
+            </a:pPr>
+            <a:r>
+              <a:rPr/>
+              <a:t>0.89–0.97module-level (BTM NES) Pearson correlation between species</a:t>
+            </a:r>
+          </a:p>
+          <a:p>
+            <a:pPr lvl="0"/>
+            <a:r>
+              <a:rPr/>
+              <a:t>Gene-level effect sizes correlate only </a:t>
+            </a:r>
+            <a:r>
+              <a:rPr b="1"/>
+              <a:t>moderately</a:t>
+            </a:r>
+            <a:r>
+              <a:rPr/>
+              <a:t>; module activation is </a:t>
+            </a:r>
+            <a:r>
+              <a:rPr b="1"/>
+              <a:t>highly conserved</a:t>
+            </a:r>
+            <a:r>
+              <a:rPr/>
+              <a:t>.</a:t>
+            </a:r>
+          </a:p>
+          <a:p>
+            <a:pPr lvl="0"/>
+            <a:r>
+              <a:rPr/>
+              <a:t>Shared leading-edge genes = </a:t>
+            </a:r>
+            <a:r>
+              <a:rPr b="1"/>
+              <a:t>67.5–79%</a:t>
+            </a:r>
+            <a:r>
+              <a:rPr/>
+              <a:t> of mouse LEGs in enriched modules (70.5% pooled).</a:t>
+            </a:r>
+          </a:p>
+          <a:p>
+            <a:pPr lvl="0"/>
+            <a:r>
+              <a:rPr/>
+              <a:t>Collapsing dimensionality into BTMs </a:t>
+            </a:r>
+            <a:r>
+              <a:rPr b="1"/>
+              <a:t>reduces noise</a:t>
+            </a:r>
+            <a:r>
+              <a:rPr/>
+              <a:t> and exposes a robust translational signature.</a:t>
+            </a:r>
+          </a:p>
+        </p:txBody>
+      </p:sp>
+      <p:sp>
+        <p:nvSpPr>
+          <p:cNvPr id="4" name="Content Placeholder 3"/>
+          <p:cNvSpPr>
+            <a:spLocks noGrp="1"/>
+          </p:cNvSpPr>
+          <p:nvPr>
+            <p:ph idx="2" sz="half"/>
+          </p:nvPr>
+        </p:nvSpPr>
+        <p:spPr/>
+        <p:txBody>
+          <a:bodyPr/>
+          <a:lstStyle/>
+          <a:p>
+            <a:pPr lvl="0" indent="0" marL="0">
+              <a:buNone/>
+            </a:pPr>
+          </a:p>
+          <a:p>
+            <a:pPr lvl="0" indent="0" marL="0">
+              <a:buNone/>
+            </a:pPr>
+            <a:r>
+              <a:rPr/>
+              <a:t>Fig. 4a–c — BTM module-level correlation (a) and classification performance (b, c) across conditions. · Fig. 5a — shared leading-edge genes across BTM process categories.</a:t>
+            </a:r>
+          </a:p>
+        </p:txBody>
+      </p:sp>
     </p:spTree>
   </p:cSld>
-  <p:clrMapOvr>
-    <a:masterClrMapping/>
-  </p:clrMapOvr>
+</p:sld>
+</file>
+
+<file path=ppt/slides/slide5.xml><?xml version="1.0" encoding="utf-8"?>
+<p:sld xmlns:a="http://schemas.openxmlformats.org/drawingml/2006/main" xmlns:r="http://schemas.openxmlformats.org/officeDocument/2006/relationships" xmlns:p="http://schemas.openxmlformats.org/presentationml/2006/main">
+  <p:cSld>
+    <p:spTree>
+      <p:nvGrpSpPr>
+        <p:cNvPr id="1" name=""/>
+        <p:cNvGrpSpPr/>
+        <p:nvPr/>
+      </p:nvGrpSpPr>
+      <p:grpSpPr>
+        <a:xfrm>
+          <a:off x="0" y="0"/>
+          <a:ext cx="0" cy="0"/>
+          <a:chOff x="0" y="0"/>
+          <a:chExt cx="0" cy="0"/>
+        </a:xfrm>
+      </p:grpSpPr>
+      <p:sp>
+        <p:nvSpPr>
+          <p:cNvPr id="2" name="Title 1"/>
+          <p:cNvSpPr>
+            <a:spLocks noGrp="1"/>
+          </p:cNvSpPr>
+          <p:nvPr>
+            <p:ph type="title"/>
+          </p:nvPr>
+        </p:nvSpPr>
+        <p:spPr/>
+        <p:txBody>
+          <a:bodyPr/>
+          <a:lstStyle/>
+          <a:p>
+            <a:pPr lvl="0" indent="0" marL="0">
+              <a:buNone/>
+            </a:pPr>
+            <a:r>
+              <a:rPr/>
+              <a:t>04 · Result — stimulus intensity &amp; kinetics</a:t>
+            </a:r>
+          </a:p>
+        </p:txBody>
+      </p:sp>
+      <p:sp>
+        <p:nvSpPr>
+          <p:cNvPr id="3" name="Content Placeholder 2"/>
+          <p:cNvSpPr>
+            <a:spLocks noGrp="1"/>
+          </p:cNvSpPr>
+          <p:nvPr>
+            <p:ph idx="1"/>
+          </p:nvPr>
+        </p:nvSpPr>
+        <p:spPr/>
+        <p:txBody>
+          <a:bodyPr/>
+          <a:lstStyle/>
+          <a:p>
+            <a:pPr lvl="0" indent="0" marL="0">
+              <a:buNone/>
+            </a:pPr>
+            <a:r>
+              <a:rPr/>
+              <a:t>Translatability scales with the </a:t>
+            </a:r>
+            <a:r>
+              <a:rPr i="1"/>
+              <a:t>strength</a:t>
+            </a:r>
+            <a:r>
+              <a:rPr/>
+              <a:t> of the perturbation</a:t>
+            </a:r>
+          </a:p>
+        </p:txBody>
+      </p:sp>
+    </p:spTree>
+  </p:cSld>
+</p:sld>
+</file>
+
+<file path=ppt/slides/slide6.xml><?xml version="1.0" encoding="utf-8"?>
+<p:sld xmlns:a="http://schemas.openxmlformats.org/drawingml/2006/main" xmlns:r="http://schemas.openxmlformats.org/officeDocument/2006/relationships" xmlns:p="http://schemas.openxmlformats.org/presentationml/2006/main">
+  <p:cSld>
+    <p:spTree>
+      <p:nvGrpSpPr>
+        <p:cNvPr id="1" name=""/>
+        <p:cNvGrpSpPr/>
+        <p:nvPr/>
+      </p:nvGrpSpPr>
+      <p:grpSpPr>
+        <a:xfrm>
+          <a:off x="0" y="0"/>
+          <a:ext cx="0" cy="0"/>
+          <a:chOff x="0" y="0"/>
+          <a:chExt cx="0" cy="0"/>
+        </a:xfrm>
+      </p:grpSpPr>
+      <p:sp>
+        <p:nvSpPr>
+          <p:cNvPr id="3" name="Content Placeholder 2"/>
+          <p:cNvSpPr>
+            <a:spLocks noGrp="1"/>
+          </p:cNvSpPr>
+          <p:nvPr>
+            <p:ph idx="1" sz="half"/>
+          </p:nvPr>
+        </p:nvSpPr>
+        <p:spPr/>
+        <p:txBody>
+          <a:bodyPr/>
+          <a:lstStyle/>
+          <a:p>
+            <a:pPr lvl="0" indent="0" marL="0">
+              <a:buNone/>
+            </a:pPr>
+            <a:r>
+              <a:rPr/>
+              <a:t>Infection &amp; injury — conserved</a:t>
+            </a:r>
+          </a:p>
+          <a:p>
+            <a:pPr lvl="0" indent="0" marL="0">
+              <a:buNone/>
+            </a:pPr>
+            <a:r>
+              <a:rPr/>
+              <a:t>ρ = 0.41–0.59</a:t>
+            </a:r>
+          </a:p>
+          <a:p>
+            <a:pPr lvl="0" indent="0" marL="0">
+              <a:buNone/>
+            </a:pPr>
+            <a:r>
+              <a:rPr/>
+              <a:t>Acute </a:t>
+            </a:r>
+            <a:r>
+              <a:rPr i="1"/>
+              <a:t>S. aureus</a:t>
+            </a:r>
+            <a:r>
+              <a:rPr/>
+              <a:t>, </a:t>
+            </a:r>
+            <a:r>
+              <a:rPr i="1"/>
+              <a:t>E. coli</a:t>
+            </a:r>
+            <a:r>
+              <a:rPr/>
+              <a:t> and burn engage evolutionarily stable, highly conserved programs.</a:t>
+            </a:r>
+          </a:p>
+          <a:p>
+            <a:pPr lvl="0" indent="0" marL="0">
+              <a:buNone/>
+            </a:pPr>
+            <a:r>
+              <a:rPr/>
+              <a:t>Effect-size difference (|ΔLog2FC|) significantly smaller than negative controls — WMW adjusted P &lt; 1 × 10⁻¹⁵.</a:t>
+            </a:r>
+          </a:p>
+        </p:txBody>
+      </p:sp>
+      <p:sp>
+        <p:nvSpPr>
+          <p:cNvPr id="4" name="Content Placeholder 3"/>
+          <p:cNvSpPr>
+            <a:spLocks noGrp="1"/>
+          </p:cNvSpPr>
+          <p:nvPr>
+            <p:ph idx="2" sz="half"/>
+          </p:nvPr>
+        </p:nvSpPr>
+        <p:spPr/>
+        <p:txBody>
+          <a:bodyPr/>
+          <a:lstStyle/>
+          <a:p>
+            <a:pPr lvl="0" indent="0" marL="0">
+              <a:buNone/>
+            </a:pPr>
+            <a:r>
+              <a:rPr/>
+              <a:t>Single-dose vaccination — diverges</a:t>
+            </a:r>
+          </a:p>
+          <a:p>
+            <a:pPr lvl="0" indent="0" marL="0">
+              <a:buNone/>
+            </a:pPr>
+            <a:r>
+              <a:rPr/>
+              <a:t>ρ = −0.32–0.27</a:t>
+            </a:r>
+          </a:p>
+          <a:p>
+            <a:pPr lvl="0" indent="0" marL="0">
+              <a:buNone/>
+            </a:pPr>
+            <a:r>
+              <a:rPr/>
+              <a:t>Fluad® and Engerix B® fail to reach the systemic activation threshold, remaining near baseline controls.</a:t>
+            </a:r>
+          </a:p>
+          <a:p>
+            <a:pPr lvl="0" indent="0" marL="0">
+              <a:buNone/>
+            </a:pPr>
+            <a:r>
+              <a:rPr/>
+              <a:t>Preclinical immunogenicity may require </a:t>
+            </a:r>
+            <a:r>
+              <a:rPr b="1"/>
+              <a:t>boosters or stronger adjuvants</a:t>
+            </a:r>
+            <a:r>
+              <a:rPr/>
+              <a:t> to emerge from species-specific noise.</a:t>
+            </a:r>
+          </a:p>
+        </p:txBody>
+      </p:sp>
+    </p:spTree>
+  </p:cSld>
+</p:sld>
+</file>
+
+<file path=ppt/slides/slide7.xml><?xml version="1.0" encoding="utf-8"?>
+<p:sld xmlns:a="http://schemas.openxmlformats.org/drawingml/2006/main" xmlns:r="http://schemas.openxmlformats.org/officeDocument/2006/relationships" xmlns:p="http://schemas.openxmlformats.org/presentationml/2006/main">
+  <p:cSld>
+    <p:spTree>
+      <p:nvGrpSpPr>
+        <p:cNvPr id="1" name=""/>
+        <p:cNvGrpSpPr/>
+        <p:nvPr/>
+      </p:nvGrpSpPr>
+      <p:grpSpPr>
+        <a:xfrm>
+          <a:off x="0" y="0"/>
+          <a:ext cx="0" cy="0"/>
+          <a:chOff x="0" y="0"/>
+          <a:chExt cx="0" cy="0"/>
+        </a:xfrm>
+      </p:grpSpPr>
+      <p:sp>
+        <p:nvSpPr>
+          <p:cNvPr id="3" name="Content Placeholder 2"/>
+          <p:cNvSpPr>
+            <a:spLocks noGrp="1"/>
+          </p:cNvSpPr>
+          <p:nvPr>
+            <p:ph idx="1"/>
+          </p:nvPr>
+        </p:nvSpPr>
+        <p:spPr/>
+        <p:txBody>
+          <a:bodyPr/>
+          <a:lstStyle/>
+          <a:p>
+            <a:pPr lvl="0" indent="0" marL="0">
+              <a:buNone/>
+            </a:pPr>
+            <a:r>
+              <a:rPr/>
+              <a:t>Timing ≠ chronology · mouse 2–6 h matches the human peak inflammatory window (days 1–3) → align by biological equivalence</a:t>
+            </a:r>
+          </a:p>
+        </p:txBody>
+      </p:sp>
+    </p:spTree>
+  </p:cSld>
+</p:sld>
+</file>
+
+<file path=ppt/slides/slide8.xml><?xml version="1.0" encoding="utf-8"?>
+<p:sld xmlns:a="http://schemas.openxmlformats.org/drawingml/2006/main" xmlns:r="http://schemas.openxmlformats.org/officeDocument/2006/relationships" xmlns:p="http://schemas.openxmlformats.org/presentationml/2006/main">
+  <p:cSld>
+    <p:spTree>
+      <p:nvGrpSpPr>
+        <p:cNvPr id="1" name=""/>
+        <p:cNvGrpSpPr/>
+        <p:nvPr/>
+      </p:nvGrpSpPr>
+      <p:grpSpPr>
+        <a:xfrm>
+          <a:off x="0" y="0"/>
+          <a:ext cx="0" cy="0"/>
+          <a:chOff x="0" y="0"/>
+          <a:chExt cx="0" cy="0"/>
+        </a:xfrm>
+      </p:grpSpPr>
+      <p:sp>
+        <p:nvSpPr>
+          <p:cNvPr id="2" name="Title 1"/>
+          <p:cNvSpPr>
+            <a:spLocks noGrp="1"/>
+          </p:cNvSpPr>
+          <p:nvPr>
+            <p:ph type="title"/>
+          </p:nvPr>
+        </p:nvSpPr>
+        <p:spPr/>
+        <p:txBody>
+          <a:bodyPr/>
+          <a:lstStyle/>
+          <a:p>
+            <a:pPr lvl="0" indent="0" marL="0">
+              <a:buNone/>
+            </a:pPr>
+            <a:r>
+              <a:rPr/>
+              <a:t>05 · Result — classification performance</a:t>
+            </a:r>
+          </a:p>
+        </p:txBody>
+      </p:sp>
+      <p:sp>
+        <p:nvSpPr>
+          <p:cNvPr id="3" name="Content Placeholder 2"/>
+          <p:cNvSpPr>
+            <a:spLocks noGrp="1"/>
+          </p:cNvSpPr>
+          <p:nvPr>
+            <p:ph idx="1" sz="half"/>
+          </p:nvPr>
+        </p:nvSpPr>
+        <p:spPr/>
+        <p:txBody>
+          <a:bodyPr/>
+          <a:lstStyle/>
+          <a:p>
+            <a:pPr lvl="0" indent="0" marL="0">
+              <a:buNone/>
+            </a:pPr>
+            <a:r>
+              <a:rPr/>
+              <a:t>Mouse signatures call human direction — best at </a:t>
+            </a:r>
+            <a:r>
+              <a:rPr i="1"/>
+              <a:t>module</a:t>
+            </a:r>
+            <a:r>
+              <a:rPr/>
+              <a:t> level</a:t>
+            </a:r>
+          </a:p>
+          <a:p>
+            <a:pPr lvl="0" indent="0" marL="0">
+              <a:buNone/>
+            </a:pPr>
+            <a:r>
+              <a:rPr/>
+              <a:t>0.84–0.98ROC-AUC · mouse BTM signatures classifying human module regulation</a:t>
+            </a:r>
+          </a:p>
+          <a:p>
+            <a:pPr lvl="0" indent="0" marL="0">
+              <a:buNone/>
+            </a:pPr>
+            <a:r>
+              <a:rPr/>
+              <a:t>0.64–0.74ROC-AUC · gene-level mouse signatures in infection &amp; injury</a:t>
+            </a:r>
+          </a:p>
+          <a:p>
+            <a:pPr lvl="0" indent="0" marL="0">
+              <a:buNone/>
+            </a:pPr>
+            <a:r>
+              <a:rPr/>
+              <a:t>Biological negative control (DMD): ROC-AUC 0.48–0.61 — near random</a:t>
+            </a:r>
+          </a:p>
+        </p:txBody>
+      </p:sp>
+      <p:sp>
+        <p:nvSpPr>
+          <p:cNvPr id="4" name="Content Placeholder 3"/>
+          <p:cNvSpPr>
+            <a:spLocks noGrp="1"/>
+          </p:cNvSpPr>
+          <p:nvPr>
+            <p:ph idx="2" sz="half"/>
+          </p:nvPr>
+        </p:nvSpPr>
+        <p:spPr/>
+        <p:txBody>
+          <a:bodyPr/>
+          <a:lstStyle/>
+          <a:p>
+            <a:pPr lvl="0" indent="0" marL="0">
+              <a:buNone/>
+            </a:pPr>
+          </a:p>
+          <a:p>
+            <a:pPr lvl="0" indent="0" marL="0">
+              <a:buNone/>
+            </a:pPr>
+            <a:r>
+              <a:rPr/>
+              <a:t>Fig. 3a–b — ROC-AUC and PR-AUC matrices for mouse signatures classifying up- and downregulated human genes, with human self-prediction and the DMD negative control.</a:t>
+            </a:r>
+          </a:p>
+        </p:txBody>
+      </p:sp>
+    </p:spTree>
+  </p:cSld>
+</p:sld>
+</file>
+
+<file path=ppt/slides/slide9.xml><?xml version="1.0" encoding="utf-8"?>
+<p:sld xmlns:a="http://schemas.openxmlformats.org/drawingml/2006/main" xmlns:r="http://schemas.openxmlformats.org/officeDocument/2006/relationships" xmlns:p="http://schemas.openxmlformats.org/presentationml/2006/main">
+  <p:cSld>
+    <p:spTree>
+      <p:nvGrpSpPr>
+        <p:cNvPr id="1" name=""/>
+        <p:cNvGrpSpPr/>
+        <p:nvPr/>
+      </p:nvGrpSpPr>
+      <p:grpSpPr>
+        <a:xfrm>
+          <a:off x="0" y="0"/>
+          <a:ext cx="0" cy="0"/>
+          <a:chOff x="0" y="0"/>
+          <a:chExt cx="0" cy="0"/>
+        </a:xfrm>
+      </p:grpSpPr>
+      <p:sp>
+        <p:nvSpPr>
+          <p:cNvPr id="2" name="Title 1"/>
+          <p:cNvSpPr>
+            <a:spLocks noGrp="1"/>
+          </p:cNvSpPr>
+          <p:nvPr>
+            <p:ph type="title"/>
+          </p:nvPr>
+        </p:nvSpPr>
+        <p:spPr/>
+        <p:txBody>
+          <a:bodyPr/>
+          <a:lstStyle/>
+          <a:p>
+            <a:pPr lvl="0" indent="0" marL="0">
+              <a:buNone/>
+            </a:pPr>
+            <a:r>
+              <a:rPr/>
+              <a:t>06 · Result — evolution &amp; regulation</a:t>
+            </a:r>
+          </a:p>
+        </p:txBody>
+      </p:sp>
+      <p:sp>
+        <p:nvSpPr>
+          <p:cNvPr id="3" name="Content Placeholder 2"/>
+          <p:cNvSpPr>
+            <a:spLocks noGrp="1"/>
+          </p:cNvSpPr>
+          <p:nvPr>
+            <p:ph idx="1" sz="half"/>
+          </p:nvPr>
+        </p:nvSpPr>
+        <p:spPr/>
+        <p:txBody>
+          <a:bodyPr/>
+          <a:lstStyle/>
+          <a:p>
+            <a:pPr lvl="0" indent="0" marL="0">
+              <a:buNone/>
+            </a:pPr>
+            <a:r>
+              <a:rPr/>
+              <a:t>Why genes </a:t>
+            </a:r>
+            <a:r>
+              <a:rPr i="1"/>
+              <a:t>diverge</a:t>
+            </a:r>
+          </a:p>
+          <a:p>
+            <a:pPr lvl="0" indent="0" marL="0">
+              <a:buNone/>
+            </a:pPr>
+            <a:r>
+              <a:rPr/>
+              <a:t>Small per-gene effects, but a consistent direction: sequence constraint tracks </a:t>
+            </a:r>
+            <a:r>
+              <a:rPr b="1"/>
+              <a:t>stability</a:t>
+            </a:r>
+            <a:r>
+              <a:rPr/>
+              <a:t>; regulatory plasticity tracks </a:t>
+            </a:r>
+            <a:r>
+              <a:rPr b="1"/>
+              <a:t>divergence</a:t>
+            </a:r>
+            <a:r>
+              <a:rPr/>
+              <a:t>.</a:t>
+            </a:r>
+          </a:p>
+          <a:p>
+            <a:pPr lvl="0" indent="0" marL="0">
+              <a:buNone/>
+            </a:pPr>
+            <a:r>
+              <a:rPr/>
+              <a:t>Associated with lower |ΔLog2FC|</a:t>
+            </a:r>
+          </a:p>
+          <a:p>
+            <a:pPr lvl="0"/>
+            <a:r>
+              <a:rPr/>
+              <a:t>Higher protein sequence identity rho = −0.08</a:t>
+            </a:r>
+          </a:p>
+          <a:p>
+            <a:pPr lvl="0"/>
+            <a:r>
+              <a:rPr/>
+              <a:t>Greater TF availability and TF sharing rho = −0.017 / −0.013</a:t>
+            </a:r>
+          </a:p>
+          <a:p>
+            <a:pPr lvl="0"/>
+            <a:r>
+              <a:rPr/>
+              <a:t>Conserved promoter-like (PLS) signatures n.s.</a:t>
+            </a:r>
+          </a:p>
+          <a:p>
+            <a:pPr lvl="0" indent="0" marL="0">
+              <a:buNone/>
+            </a:pPr>
+            <a:r>
+              <a:rPr/>
+              <a:t>Associated with higher |ΔLog2FC|</a:t>
+            </a:r>
+          </a:p>
+          <a:p>
+            <a:pPr lvl="0"/>
+            <a:r>
+              <a:rPr/>
+              <a:t>Greater Kimura (K80) evolutionary distance rho = 0.10</a:t>
+            </a:r>
+          </a:p>
+          <a:p>
+            <a:pPr lvl="0"/>
+            <a:r>
+              <a:rPr/>
+              <a:t>Enhancer multiplicity — pELS / dELS counts rho = 0.036 / 0.039</a:t>
+            </a:r>
+          </a:p>
+          <a:p>
+            <a:pPr lvl="0"/>
+            <a:r>
+              <a:rPr/>
+              <a:t>CRE turnover and CTCF-bound pELS bound rho = 0.042</a:t>
+            </a:r>
+          </a:p>
+        </p:txBody>
+      </p:sp>
+      <p:sp>
+        <p:nvSpPr>
+          <p:cNvPr id="4" name="Content Placeholder 3"/>
+          <p:cNvSpPr>
+            <a:spLocks noGrp="1"/>
+          </p:cNvSpPr>
+          <p:nvPr>
+            <p:ph idx="2" sz="half"/>
+          </p:nvPr>
+        </p:nvSpPr>
+        <p:spPr/>
+        <p:txBody>
+          <a:bodyPr/>
+          <a:lstStyle/>
+          <a:p>
+            <a:pPr lvl="0" indent="0" marL="0">
+              <a:buNone/>
+            </a:pPr>
+          </a:p>
+          <a:p>
+            <a:pPr lvl="0" indent="0" marL="0">
+              <a:buNone/>
+            </a:pPr>
+            <a:r>
+              <a:rPr/>
+              <a:t>Fig. 6a–e — protein sequence identity and Kimura distance (a), transcription factor availability (b), cis-regulatory element abundance (c), CRE conservation and turnover (d) and CTCF binding (e) against |ΔLog2FC|.</a:t>
+            </a:r>
+          </a:p>
+        </p:txBody>
+      </p:sp>
+    </p:spTree>
+  </p:cSld>
 </p:sld>
 </file>
 
@@ -4888,39 +6361,39 @@
         <a:sysClr val="window" lastClr="FFFFFF"/>
       </a:lt1>
       <a:dk2>
-        <a:srgbClr val="1F497D"/>
+        <a:srgbClr val="44546A"/>
       </a:dk2>
       <a:lt2>
-        <a:srgbClr val="EEECE1"/>
+        <a:srgbClr val="E7E6E6"/>
       </a:lt2>
       <a:accent1>
-        <a:srgbClr val="4F81BD"/>
+        <a:srgbClr val="5B9BD5"/>
       </a:accent1>
       <a:accent2>
-        <a:srgbClr val="C0504D"/>
+        <a:srgbClr val="ED7D31"/>
       </a:accent2>
       <a:accent3>
-        <a:srgbClr val="9BBB59"/>
+        <a:srgbClr val="A5A5A5"/>
       </a:accent3>
       <a:accent4>
-        <a:srgbClr val="8064A2"/>
+        <a:srgbClr val="FFC000"/>
       </a:accent4>
       <a:accent5>
-        <a:srgbClr val="4BACC6"/>
+        <a:srgbClr val="4472C4"/>
       </a:accent5>
       <a:accent6>
-        <a:srgbClr val="F79646"/>
+        <a:srgbClr val="70AD47"/>
       </a:accent6>
       <a:hlink>
-        <a:srgbClr val="0000FF"/>
+        <a:srgbClr val="0563C1"/>
       </a:hlink>
       <a:folHlink>
-        <a:srgbClr val="800080"/>
+        <a:srgbClr val="954F72"/>
       </a:folHlink>
     </a:clrScheme>
     <a:fontScheme name="Office">
       <a:majorFont>
-        <a:latin typeface="Calibri"/>
+        <a:latin typeface="Calibri Light" panose="020F0302020204030204"/>
         <a:ea typeface=""/>
         <a:cs typeface=""/>
         <a:font script="Jpan" typeface="ＭＳ Ｐゴシック"/>
@@ -4955,7 +6428,7 @@
         <a:font script="Geor" typeface="Sylfaen"/>
       </a:majorFont>
       <a:minorFont>
-        <a:latin typeface="Calibri"/>
+        <a:latin typeface="Calibri" panose="020F0502020204030204"/>
         <a:ea typeface=""/>
         <a:cs typeface=""/>
         <a:font script="Jpan" typeface="ＭＳ Ｐゴシック"/>
@@ -4999,200 +6472,141 @@
           <a:gsLst>
             <a:gs pos="0">
               <a:schemeClr val="phClr">
-                <a:tint val="50000"/>
-                <a:satMod val="300000"/>
+                <a:lumMod val="110000"/>
+                <a:satMod val="105000"/>
+                <a:tint val="67000"/>
               </a:schemeClr>
             </a:gs>
-            <a:gs pos="35000">
+            <a:gs pos="50000">
               <a:schemeClr val="phClr">
-                <a:tint val="37000"/>
-                <a:satMod val="300000"/>
+                <a:lumMod val="105000"/>
+                <a:satMod val="103000"/>
+                <a:tint val="73000"/>
               </a:schemeClr>
             </a:gs>
             <a:gs pos="100000">
               <a:schemeClr val="phClr">
-                <a:tint val="15000"/>
-                <a:satMod val="350000"/>
+                <a:lumMod val="105000"/>
+                <a:satMod val="109000"/>
+                <a:tint val="81000"/>
               </a:schemeClr>
             </a:gs>
           </a:gsLst>
-          <a:lin ang="16200000" scaled="1"/>
+          <a:lin ang="5400000" scaled="0"/>
         </a:gradFill>
         <a:gradFill rotWithShape="1">
           <a:gsLst>
             <a:gs pos="0">
               <a:schemeClr val="phClr">
-                <a:tint val="100000"/>
+                <a:satMod val="103000"/>
+                <a:lumMod val="102000"/>
+                <a:tint val="94000"/>
+              </a:schemeClr>
+            </a:gs>
+            <a:gs pos="50000">
+              <a:schemeClr val="phClr">
+                <a:satMod val="110000"/>
+                <a:lumMod val="100000"/>
                 <a:shade val="100000"/>
-                <a:satMod val="130000"/>
               </a:schemeClr>
             </a:gs>
             <a:gs pos="100000">
               <a:schemeClr val="phClr">
-                <a:tint val="50000"/>
-                <a:shade val="100000"/>
-                <a:satMod val="350000"/>
+                <a:lumMod val="99000"/>
+                <a:satMod val="120000"/>
+                <a:shade val="78000"/>
               </a:schemeClr>
             </a:gs>
           </a:gsLst>
-          <a:lin ang="16200000" scaled="0"/>
+          <a:lin ang="5400000" scaled="0"/>
         </a:gradFill>
       </a:fillStyleLst>
       <a:lnStyleLst>
-        <a:ln w="9525" cap="flat" cmpd="sng" algn="ctr">
-          <a:solidFill>
-            <a:schemeClr val="phClr">
-              <a:shade val="95000"/>
-              <a:satMod val="105000"/>
-            </a:schemeClr>
-          </a:solidFill>
-          <a:prstDash val="solid"/>
-        </a:ln>
-        <a:ln w="25400" cap="flat" cmpd="sng" algn="ctr">
+        <a:ln w="6350" cap="flat" cmpd="sng" algn="ctr">
           <a:solidFill>
             <a:schemeClr val="phClr"/>
           </a:solidFill>
           <a:prstDash val="solid"/>
+          <a:miter lim="800000"/>
         </a:ln>
-        <a:ln w="38100" cap="flat" cmpd="sng" algn="ctr">
+        <a:ln w="12700" cap="flat" cmpd="sng" algn="ctr">
           <a:solidFill>
             <a:schemeClr val="phClr"/>
           </a:solidFill>
           <a:prstDash val="solid"/>
+          <a:miter lim="800000"/>
+        </a:ln>
+        <a:ln w="19050" cap="flat" cmpd="sng" algn="ctr">
+          <a:solidFill>
+            <a:schemeClr val="phClr"/>
+          </a:solidFill>
+          <a:prstDash val="solid"/>
+          <a:miter lim="800000"/>
         </a:ln>
       </a:lnStyleLst>
       <a:effectStyleLst>
         <a:effectStyle>
+          <a:effectLst/>
+        </a:effectStyle>
+        <a:effectStyle>
+          <a:effectLst/>
+        </a:effectStyle>
+        <a:effectStyle>
           <a:effectLst>
-            <a:outerShdw blurRad="40000" dist="20000" dir="5400000" rotWithShape="0">
+            <a:outerShdw blurRad="57150" dist="19050" dir="5400000" algn="ctr" rotWithShape="0">
               <a:srgbClr val="000000">
-                <a:alpha val="38000"/>
+                <a:alpha val="63000"/>
               </a:srgbClr>
             </a:outerShdw>
           </a:effectLst>
-        </a:effectStyle>
-        <a:effectStyle>
-          <a:effectLst>
-            <a:outerShdw blurRad="40000" dist="23000" dir="5400000" rotWithShape="0">
-              <a:srgbClr val="000000">
-                <a:alpha val="35000"/>
-              </a:srgbClr>
-            </a:outerShdw>
-          </a:effectLst>
-        </a:effectStyle>
-        <a:effectStyle>
-          <a:effectLst>
-            <a:outerShdw blurRad="40000" dist="23000" dir="5400000" rotWithShape="0">
-              <a:srgbClr val="000000">
-                <a:alpha val="35000"/>
-              </a:srgbClr>
-            </a:outerShdw>
-          </a:effectLst>
-          <a:scene3d>
-            <a:camera prst="orthographicFront">
-              <a:rot lat="0" lon="0" rev="0"/>
-            </a:camera>
-            <a:lightRig rig="threePt" dir="t">
-              <a:rot lat="0" lon="0" rev="1200000"/>
-            </a:lightRig>
-          </a:scene3d>
-          <a:sp3d>
-            <a:bevelT w="63500" h="25400"/>
-          </a:sp3d>
         </a:effectStyle>
       </a:effectStyleLst>
       <a:bgFillStyleLst>
         <a:solidFill>
           <a:schemeClr val="phClr"/>
         </a:solidFill>
+        <a:solidFill>
+          <a:schemeClr val="phClr">
+            <a:tint val="95000"/>
+            <a:satMod val="170000"/>
+          </a:schemeClr>
+        </a:solidFill>
         <a:gradFill rotWithShape="1">
           <a:gsLst>
             <a:gs pos="0">
               <a:schemeClr val="phClr">
-                <a:tint val="40000"/>
-                <a:satMod val="350000"/>
+                <a:tint val="93000"/>
+                <a:satMod val="150000"/>
+                <a:shade val="98000"/>
+                <a:lumMod val="102000"/>
               </a:schemeClr>
             </a:gs>
-            <a:gs pos="40000">
+            <a:gs pos="50000">
               <a:schemeClr val="phClr">
-                <a:tint val="45000"/>
-                <a:shade val="99000"/>
-                <a:satMod val="350000"/>
+                <a:tint val="98000"/>
+                <a:satMod val="130000"/>
+                <a:shade val="90000"/>
+                <a:lumMod val="103000"/>
               </a:schemeClr>
             </a:gs>
             <a:gs pos="100000">
               <a:schemeClr val="phClr">
-                <a:shade val="20000"/>
-                <a:satMod val="255000"/>
+                <a:shade val="63000"/>
+                <a:satMod val="120000"/>
               </a:schemeClr>
             </a:gs>
           </a:gsLst>
-          <a:path path="circle">
-            <a:fillToRect l="50000" t="-80000" r="50000" b="180000"/>
-          </a:path>
-        </a:gradFill>
-        <a:gradFill rotWithShape="1">
-          <a:gsLst>
-            <a:gs pos="0">
-              <a:schemeClr val="phClr">
-                <a:tint val="80000"/>
-                <a:satMod val="300000"/>
-              </a:schemeClr>
-            </a:gs>
-            <a:gs pos="100000">
-              <a:schemeClr val="phClr">
-                <a:shade val="30000"/>
-                <a:satMod val="200000"/>
-              </a:schemeClr>
-            </a:gs>
-          </a:gsLst>
-          <a:path path="circle">
-            <a:fillToRect l="50000" t="50000" r="50000" b="50000"/>
-          </a:path>
+          <a:lin ang="5400000" scaled="0"/>
         </a:gradFill>
       </a:bgFillStyleLst>
     </a:fmtScheme>
   </a:themeElements>
-  <a:objectDefaults>
-    <a:spDef>
-      <a:spPr/>
-      <a:bodyPr/>
-      <a:lstStyle/>
-      <a:style>
-        <a:lnRef idx="1">
-          <a:schemeClr val="accent1"/>
-        </a:lnRef>
-        <a:fillRef idx="3">
-          <a:schemeClr val="accent1"/>
-        </a:fillRef>
-        <a:effectRef idx="2">
-          <a:schemeClr val="accent1"/>
-        </a:effectRef>
-        <a:fontRef idx="minor">
-          <a:schemeClr val="lt1"/>
-        </a:fontRef>
-      </a:style>
-    </a:spDef>
-    <a:lnDef>
-      <a:spPr/>
-      <a:bodyPr/>
-      <a:lstStyle/>
-      <a:style>
-        <a:lnRef idx="2">
-          <a:schemeClr val="accent1"/>
-        </a:lnRef>
-        <a:fillRef idx="0">
-          <a:schemeClr val="accent1"/>
-        </a:fillRef>
-        <a:effectRef idx="1">
-          <a:schemeClr val="accent1"/>
-        </a:effectRef>
-        <a:fontRef idx="minor">
-          <a:schemeClr val="tx1"/>
-        </a:fontRef>
-      </a:style>
-    </a:lnDef>
-  </a:objectDefaults>
+  <a:objectDefaults/>
   <a:extraClrSchemeLst/>
+  <a:extLst>
+    <a:ext uri="{05A4C25C-085E-4340-85A3-A5531E510DB2}">
+      <thm15:themeFamily xmlns:thm15="http://schemas.microsoft.com/office/thememl/2012/main" name="Office Theme" id="{62F939B6-93AF-4DB8-9C6B-D6C7DFDC589F}" vid="{4A3C46E8-61CC-4603-A589-7422A47A8E4A}"/>
+    </a:ext>
+  </a:extLst>
 </a:theme>
 </file>